--- a/artifacts/reports/device-control/20_基本設計/クラス構成図_端末アプリ_デバイス制御/diagram.pptx
+++ b/artifacts/reports/device-control/20_基本設計/クラス構成図_端末アプリ_デバイス制御/diagram.pptx
@@ -3613,7 +3613,7 @@
       </p:grpSpPr>
       <p:grpSp>
         <p:nvGrpSpPr>
-          <p:cNvPr id="2" name="ImportedDiagram_slide_1">
+          <p:cNvPr id="34" name="ImportedDiagram_slide_1">
             <a:extLst>
               <a:ext uri="{FF2B5EF4-FFF2-40B4-BE49-F238E27FC236}">
                 <a16:creationId xmlns:a16="http://schemas.microsoft.com/office/drawing/2014/main" id="{944FAD00-5B11-41B4-83E1-07CAF82EEBA6}"/>
@@ -3627,15 +3627,15 @@
         </p:nvGrpSpPr>
         <p:grpSpPr>
           <a:xfrm>
-            <a:off x="254000" y="254000"/>
-            <a:ext cx="9525003" cy="3437567"/>
+            <a:off x="76200" y="1291790"/>
+            <a:ext cx="12547600" cy="4528420"/>
             <a:chOff x="0" y="0"/>
             <a:chExt cx="19616444" cy="7014186"/>
           </a:xfrm>
         </p:grpSpPr>
         <p:cxnSp>
           <p:nvCxnSpPr>
-            <p:cNvPr id="3" name="Connector 130">
+            <p:cNvPr id="35" name="Connector 130">
               <a:extLst>
                 <a:ext uri="{FF2B5EF4-FFF2-40B4-BE49-F238E27FC236}">
                   <a16:creationId xmlns:a16="http://schemas.microsoft.com/office/drawing/2014/main" id="{05C00D7A-3A65-12EA-B2FD-0826260902CE}"/>
@@ -3678,7 +3678,7 @@
         </p:cxnSp>
         <p:cxnSp>
           <p:nvCxnSpPr>
-            <p:cNvPr id="4" name="Connector 128">
+            <p:cNvPr id="36" name="Connector 128">
               <a:extLst>
                 <a:ext uri="{FF2B5EF4-FFF2-40B4-BE49-F238E27FC236}">
                   <a16:creationId xmlns:a16="http://schemas.microsoft.com/office/drawing/2014/main" id="{DB04890D-ADB5-075F-3F64-602E85AB3A4E}"/>
@@ -3721,7 +3721,7 @@
         </p:cxnSp>
         <p:cxnSp>
           <p:nvCxnSpPr>
-            <p:cNvPr id="5" name="Connector 126">
+            <p:cNvPr id="37" name="Connector 126">
               <a:extLst>
                 <a:ext uri="{FF2B5EF4-FFF2-40B4-BE49-F238E27FC236}">
                   <a16:creationId xmlns:a16="http://schemas.microsoft.com/office/drawing/2014/main" id="{58B9E8E4-081F-3857-6218-F6F3E1A749D7}"/>
@@ -3764,7 +3764,7 @@
         </p:cxnSp>
         <p:sp>
           <p:nvSpPr>
-            <p:cNvPr id="6" name="frame_0">
+            <p:cNvPr id="38" name="frame_0">
               <a:extLst>
                 <a:ext uri="{FF2B5EF4-FFF2-40B4-BE49-F238E27FC236}">
                   <a16:creationId xmlns:a16="http://schemas.microsoft.com/office/drawing/2014/main" id="{5C120B19-A392-0FDA-1203-9BF7A3162180}"/>
@@ -3895,7 +3895,7 @@
         </p:sp>
         <p:sp>
           <p:nvSpPr>
-            <p:cNvPr id="7" name="frame_title_0">
+            <p:cNvPr id="39" name="frame_title_0">
               <a:extLst>
                 <a:ext uri="{FF2B5EF4-FFF2-40B4-BE49-F238E27FC236}">
                   <a16:creationId xmlns:a16="http://schemas.microsoft.com/office/drawing/2014/main" id="{DE4CC980-EEA0-C726-8DA4-CCE702D36D00}"/>
@@ -3907,8 +3907,8 @@
           </p:nvSpPr>
           <p:spPr>
             <a:xfrm>
-              <a:off x="1868850" y="80937"/>
-              <a:ext cx="2093604" cy="213392"/>
+              <a:off x="1868850" y="41697"/>
+              <a:ext cx="2093605" cy="291874"/>
             </a:xfrm>
             <a:prstGeom prst="rect">
               <a:avLst/>
@@ -4022,7 +4022,7 @@
             <a:p>
               <a:pPr algn="ctr"/>
               <a:r>
-                <a:rPr lang="ja-JP" altLang="en-US" sz="575" b="1">
+                <a:rPr lang="ja-JP" sz="575" b="1">
                   <a:solidFill>
                     <a:srgbClr val="2E75B6"/>
                   </a:solidFill>
@@ -4030,36 +4030,14 @@
                   <a:ea typeface="Meiryo UI"/>
                   <a:cs typeface="Meiryo UI"/>
                 </a:rPr>
-                <a:t>（</a:t>
-              </a:r>
-              <a:r>
-                <a:rPr lang="en-US" altLang="ja-JP" sz="575" b="1">
-                  <a:solidFill>
-                    <a:srgbClr val="2E75B6"/>
-                  </a:solidFill>
-                  <a:latin typeface="Meiryo UI"/>
-                  <a:ea typeface="Meiryo UI"/>
-                  <a:cs typeface="Meiryo UI"/>
-                </a:rPr>
-                <a:t>1</a:t>
-              </a:r>
-              <a:r>
-                <a:rPr lang="ja-JP" altLang="en-US" sz="575" b="1">
-                  <a:solidFill>
-                    <a:srgbClr val="2E75B6"/>
-                  </a:solidFill>
-                  <a:latin typeface="Meiryo UI"/>
-                  <a:ea typeface="Meiryo UI"/>
-                  <a:cs typeface="Meiryo UI"/>
-                </a:rPr>
-                <a:t>）アプリケーション層</a:t>
+                <a:t>1 アプリケーション層</a:t>
               </a:r>
             </a:p>
           </p:txBody>
         </p:sp>
         <p:sp>
           <p:nvSpPr>
-            <p:cNvPr id="8" name="frame_1">
+            <p:cNvPr id="40" name="frame_1">
               <a:extLst>
                 <a:ext uri="{FF2B5EF4-FFF2-40B4-BE49-F238E27FC236}">
                   <a16:creationId xmlns:a16="http://schemas.microsoft.com/office/drawing/2014/main" id="{5237B5A7-55AF-03DF-1641-FBCE173CE47D}"/>
@@ -4190,7 +4168,7 @@
         </p:sp>
         <p:sp>
           <p:nvSpPr>
-            <p:cNvPr id="9" name="frame_title_1">
+            <p:cNvPr id="41" name="frame_title_1">
               <a:extLst>
                 <a:ext uri="{FF2B5EF4-FFF2-40B4-BE49-F238E27FC236}">
                   <a16:creationId xmlns:a16="http://schemas.microsoft.com/office/drawing/2014/main" id="{5962FFDE-4246-BF2B-4572-5F054BDC1AAD}"/>
@@ -4202,8 +4180,8 @@
           </p:nvSpPr>
           <p:spPr>
             <a:xfrm>
-              <a:off x="12132710" y="114067"/>
-              <a:ext cx="2971428" cy="213392"/>
+              <a:off x="12132710" y="74828"/>
+              <a:ext cx="2971428" cy="291874"/>
             </a:xfrm>
             <a:prstGeom prst="rect">
               <a:avLst/>
@@ -4317,7 +4295,7 @@
             <a:p>
               <a:pPr algn="ctr"/>
               <a:r>
-                <a:rPr lang="ja-JP" altLang="en-US" sz="575" b="1">
+                <a:rPr lang="ja-JP" sz="575" b="1">
                   <a:solidFill>
                     <a:srgbClr val="538135"/>
                   </a:solidFill>
@@ -4325,58 +4303,14 @@
                   <a:ea typeface="Meiryo UI"/>
                   <a:cs typeface="Meiryo UI"/>
                 </a:rPr>
-                <a:t>（</a:t>
-              </a:r>
-              <a:r>
-                <a:rPr lang="en-US" altLang="ja-JP" sz="575" b="1">
-                  <a:solidFill>
-                    <a:srgbClr val="538135"/>
-                  </a:solidFill>
-                  <a:latin typeface="Meiryo UI"/>
-                  <a:ea typeface="Meiryo UI"/>
-                  <a:cs typeface="Meiryo UI"/>
-                </a:rPr>
-                <a:t>2</a:t>
-              </a:r>
-              <a:r>
-                <a:rPr lang="ja-JP" altLang="en-US" sz="575" b="1">
-                  <a:solidFill>
-                    <a:srgbClr val="538135"/>
-                  </a:solidFill>
-                  <a:latin typeface="Meiryo UI"/>
-                  <a:ea typeface="Meiryo UI"/>
-                  <a:cs typeface="Meiryo UI"/>
-                </a:rPr>
-                <a:t>）デバイス制御層（</a:t>
-              </a:r>
-              <a:r>
-                <a:rPr lang="en-US" altLang="ja-JP" sz="575" b="1">
-                  <a:solidFill>
-                    <a:srgbClr val="538135"/>
-                  </a:solidFill>
-                  <a:latin typeface="Meiryo UI"/>
-                  <a:ea typeface="Meiryo UI"/>
-                  <a:cs typeface="Meiryo UI"/>
-                </a:rPr>
-                <a:t>DeviceCtrl</a:t>
-              </a:r>
-              <a:r>
-                <a:rPr lang="ja-JP" altLang="en-US" sz="575" b="1">
-                  <a:solidFill>
-                    <a:srgbClr val="538135"/>
-                  </a:solidFill>
-                  <a:latin typeface="Meiryo UI"/>
-                  <a:ea typeface="Meiryo UI"/>
-                  <a:cs typeface="Meiryo UI"/>
-                </a:rPr>
-                <a:t>）</a:t>
+                <a:t>2 デバイス制御層（DeviceCtrl）</a:t>
               </a:r>
             </a:p>
           </p:txBody>
         </p:sp>
         <p:sp>
           <p:nvSpPr>
-            <p:cNvPr id="10" name="shape_d51_DEVICE_CTRL_CONTRACT" title="④ 《インターフェース》 公開デバイス契約群 1. IPrinterStrategy 2. IBarcodeScannerStrategy 3. ICashChangerStrategy 4. ICustomerDisplayStrategy 5. IDrawerStrategy 6. IPaymentStrategy 7. IKeyboardStrategy">
+            <p:cNvPr id="42" name="shape_d51_DEVICE_CTRL_CONTRACT" title="④ 《インターフェース》 公開デバイス契約群 1. IPrinterStrategy 2. IBarcodeScannerStrategy 3. ICashChangerStrategy 4. ICustomerDisplayStrategy 5. IDrawerStrategy 6. IPaymentStrategy 7. IKeyboardStrategy">
               <a:extLst>
                 <a:ext uri="{FF2B5EF4-FFF2-40B4-BE49-F238E27FC236}">
                   <a16:creationId xmlns:a16="http://schemas.microsoft.com/office/drawing/2014/main" id="{F8F5B202-6497-7165-7980-B5817FAF46CB}"/>
@@ -4388,8 +4322,8 @@
           </p:nvSpPr>
           <p:spPr>
             <a:xfrm>
-              <a:off x="15986865" y="4836950"/>
-              <a:ext cx="3441944" cy="1459159"/>
+              <a:off x="15986866" y="4306505"/>
+              <a:ext cx="3441945" cy="2520048"/>
             </a:xfrm>
             <a:prstGeom prst="roundRect">
               <a:avLst/>
@@ -4525,40 +4459,64 @@
             <a:p>
               <a:pPr algn="l"/>
               <a:r>
-                <a:rPr kumimoji="0" lang="ja-JP" altLang="en-US" sz="442" b="1" kern="0">
+                <a:rPr kumimoji="0" lang="ja-JP" altLang="en-US" sz="442" b="1" i="0" u="none" strike="noStrike" kern="0" cap="none" spc="0" normalizeH="0" baseline="0">
+                  <a:ln>
+                    <a:noFill/>
+                  </a:ln>
                   <a:solidFill>
                     <a:srgbClr val="111111"/>
                   </a:solidFill>
+                  <a:effectLst/>
+                  <a:uLnTx/>
+                  <a:uFillTx/>
                   <a:latin typeface="Meiryo UI"/>
                   <a:ea typeface="Meiryo UI"/>
                 </a:rPr>
-                <a:t>(4) </a:t>
+                <a:t>2.4 </a:t>
               </a:r>
               <a:r>
-                <a:rPr kumimoji="0" lang="en-US" altLang="ja-JP" sz="442" b="1" kern="0">
+                <a:rPr kumimoji="0" lang="en-US" altLang="ja-JP" sz="442" b="1" i="0" u="none" strike="noStrike" kern="0" cap="none" spc="0" normalizeH="0" baseline="0">
+                  <a:ln>
+                    <a:noFill/>
+                  </a:ln>
                   <a:solidFill>
                     <a:srgbClr val="111111"/>
                   </a:solidFill>
+                  <a:effectLst/>
+                  <a:uLnTx/>
+                  <a:uFillTx/>
                   <a:latin typeface="Meiryo UI"/>
                   <a:ea typeface="Meiryo UI"/>
                 </a:rPr>
                 <a:t>《</a:t>
               </a:r>
               <a:r>
-                <a:rPr kumimoji="0" lang="ja-JP" altLang="en-US" sz="442" b="1" kern="0">
+                <a:rPr kumimoji="0" lang="ja-JP" altLang="en-US" sz="442" b="1" i="0" u="none" strike="noStrike" kern="0" cap="none" spc="0" normalizeH="0" baseline="0">
+                  <a:ln>
+                    <a:noFill/>
+                  </a:ln>
                   <a:solidFill>
                     <a:srgbClr val="111111"/>
                   </a:solidFill>
+                  <a:effectLst/>
+                  <a:uLnTx/>
+                  <a:uFillTx/>
                   <a:latin typeface="Meiryo UI"/>
                   <a:ea typeface="Meiryo UI"/>
                 </a:rPr>
                 <a:t>インターフェース</a:t>
               </a:r>
               <a:r>
-                <a:rPr kumimoji="0" lang="en-US" altLang="ja-JP" sz="442" b="1" kern="0">
+                <a:rPr kumimoji="0" lang="en-US" altLang="ja-JP" sz="442" b="1" i="0" u="none" strike="noStrike" kern="0" cap="none" spc="0" normalizeH="0" baseline="0">
+                  <a:ln>
+                    <a:noFill/>
+                  </a:ln>
                   <a:solidFill>
                     <a:srgbClr val="111111"/>
                   </a:solidFill>
+                  <a:effectLst/>
+                  <a:uLnTx/>
+                  <a:uFillTx/>
                   <a:latin typeface="Meiryo UI"/>
                   <a:ea typeface="Meiryo UI"/>
                 </a:rPr>
@@ -4566,10 +4524,16 @@
 </a:t>
               </a:r>
               <a:r>
-                <a:rPr kumimoji="0" lang="ja-JP" altLang="en-US" sz="442" b="1" kern="0">
+                <a:rPr kumimoji="0" lang="ja-JP" altLang="en-US" sz="442" b="1" i="0" u="none" strike="noStrike" kern="0" cap="none" spc="0" normalizeH="0" baseline="0">
+                  <a:ln>
+                    <a:noFill/>
+                  </a:ln>
                   <a:solidFill>
                     <a:srgbClr val="111111"/>
                   </a:solidFill>
+                  <a:effectLst/>
+                  <a:uLnTx/>
+                  <a:uFillTx/>
                   <a:latin typeface="Meiryo UI"/>
                   <a:ea typeface="Meiryo UI"/>
                 </a:rPr>
@@ -4577,10 +4541,16 @@
 </a:t>
               </a:r>
               <a:r>
-                <a:rPr kumimoji="0" lang="en-US" altLang="ja-JP" sz="442" b="1" kern="0">
+                <a:rPr kumimoji="0" lang="en-US" altLang="ja-JP" sz="442" b="1" i="0" u="none" strike="noStrike" kern="0" cap="none" spc="0" normalizeH="0" baseline="0">
+                  <a:ln>
+                    <a:noFill/>
+                  </a:ln>
                   <a:solidFill>
                     <a:srgbClr val="111111"/>
                   </a:solidFill>
+                  <a:effectLst/>
+                  <a:uLnTx/>
+                  <a:uFillTx/>
                   <a:latin typeface="Meiryo UI"/>
                   <a:ea typeface="Meiryo UI"/>
                 </a:rPr>
@@ -4592,10 +4562,16 @@
 6. IPaymentStrategy
 7. IKeyboardStrategy</a:t>
               </a:r>
-              <a:endParaRPr kumimoji="0" lang="ja-JP" altLang="en-US" sz="442" b="1" kern="0">
+              <a:endParaRPr kumimoji="0" lang="ja-JP" altLang="en-US" sz="442" b="1" i="0" u="none" strike="noStrike" kern="0" cap="none" spc="0" normalizeH="0" baseline="0">
+                <a:ln>
+                  <a:noFill/>
+                </a:ln>
                 <a:solidFill>
                   <a:srgbClr val="111111"/>
                 </a:solidFill>
+                <a:effectLst/>
+                <a:uLnTx/>
+                <a:uFillTx/>
                 <a:latin typeface="Meiryo UI"/>
                 <a:ea typeface="Meiryo UI"/>
               </a:endParaRPr>
@@ -4604,7 +4580,7 @@
         </p:sp>
         <p:sp>
           <p:nvSpPr>
-            <p:cNvPr id="11" name="shape_d51_APP_SERVICE" title="③ アプリケーションサービス IDeviceIntegrationTestStrategyProvider等">
+            <p:cNvPr id="43" name="shape_d51_APP_SERVICE" title="③ アプリケーションサービス IDeviceIntegrationTestStrategyProvider等">
               <a:extLst>
                 <a:ext uri="{FF2B5EF4-FFF2-40B4-BE49-F238E27FC236}">
                   <a16:creationId xmlns:a16="http://schemas.microsoft.com/office/drawing/2014/main" id="{96F9D587-0FA7-4A4A-3BAD-7EB141387794}"/>
@@ -4616,8 +4592,8 @@
           </p:nvSpPr>
           <p:spPr>
             <a:xfrm>
-              <a:off x="1910680" y="2363144"/>
-              <a:ext cx="3479062" cy="384082"/>
+              <a:off x="1910680" y="2305589"/>
+              <a:ext cx="3479062" cy="499195"/>
             </a:xfrm>
             <a:prstGeom prst="roundRect">
               <a:avLst/>
@@ -4753,14 +4729,20 @@
             <a:p>
               <a:pPr algn="ctr"/>
               <a:r>
-                <a:rPr kumimoji="0" lang="ja-JP" altLang="en-US" sz="442" b="1" kern="0">
+                <a:rPr kumimoji="0" lang="ja-JP" altLang="en-US" sz="442" b="1" i="0" u="none" strike="noStrike" kern="0" cap="none" spc="0" normalizeH="0" baseline="0">
+                  <a:ln>
+                    <a:noFill/>
+                  </a:ln>
                   <a:solidFill>
                     <a:srgbClr val="111111"/>
                   </a:solidFill>
+                  <a:effectLst/>
+                  <a:uLnTx/>
+                  <a:uFillTx/>
                   <a:latin typeface="Meiryo UI"/>
                   <a:ea typeface="Meiryo UI"/>
                 </a:rPr>
-                <a:t>(3) アプリケーションサービス
+                <a:t>1.3 アプリケーションサービス
 画面の業務ロジック</a:t>
               </a:r>
             </a:p>
@@ -4768,7 +4750,7 @@
         </p:sp>
         <p:sp>
           <p:nvSpPr>
-            <p:cNvPr id="12" name="shape_d51_APP_VIEW" title="② 画面状態管理 DeviceIntegrationTestViewModel等">
+            <p:cNvPr id="44" name="shape_d51_APP_VIEW" title="② 画面状態管理 DeviceIntegrationTestViewModel等">
               <a:extLst>
                 <a:ext uri="{FF2B5EF4-FFF2-40B4-BE49-F238E27FC236}">
                   <a16:creationId xmlns:a16="http://schemas.microsoft.com/office/drawing/2014/main" id="{435B3AED-8C91-5DA5-1B4C-5B70AD4A5A02}"/>
@@ -4917,14 +4899,20 @@
             <a:p>
               <a:pPr algn="ctr"/>
               <a:r>
-                <a:rPr kumimoji="0" lang="ja-JP" altLang="en-US" sz="442" b="1" kern="0">
+                <a:rPr kumimoji="0" lang="ja-JP" altLang="en-US" sz="442" b="1" i="0" u="none" strike="noStrike" kern="0" cap="none" spc="0" normalizeH="0" baseline="0">
+                  <a:ln>
+                    <a:noFill/>
+                  </a:ln>
                   <a:solidFill>
                     <a:srgbClr val="111111"/>
                   </a:solidFill>
+                  <a:effectLst/>
+                  <a:uLnTx/>
+                  <a:uFillTx/>
                   <a:latin typeface="Meiryo UI"/>
                   <a:ea typeface="Meiryo UI"/>
                 </a:rPr>
-                <a:t>(2) 画面状態管理
+                <a:t>1.2 画面状態管理
 画面のViewModel</a:t>
               </a:r>
             </a:p>
@@ -4932,7 +4920,7 @@
         </p:sp>
         <p:sp>
           <p:nvSpPr>
-            <p:cNvPr id="13" name="shape_d51_DEVICE_CTRL_FACTORY" title="③ ストラテジーファクトリー StrategyFactory&lt;T&gt;">
+            <p:cNvPr id="45" name="shape_d51_DEVICE_CTRL_FACTORY" title="③ ストラテジーファクトリー StrategyFactory&lt;T&gt;">
               <a:extLst>
                 <a:ext uri="{FF2B5EF4-FFF2-40B4-BE49-F238E27FC236}">
                   <a16:creationId xmlns:a16="http://schemas.microsoft.com/office/drawing/2014/main" id="{AE08A5ED-2A14-D4BC-FF7A-5A6790F21BC0}"/>
@@ -4944,8 +4932,8 @@
           </p:nvSpPr>
           <p:spPr>
             <a:xfrm>
-              <a:off x="11935541" y="3670151"/>
-              <a:ext cx="3450631" cy="384082"/>
+              <a:off x="11935541" y="3421727"/>
+              <a:ext cx="3450631" cy="880927"/>
             </a:xfrm>
             <a:prstGeom prst="roundRect">
               <a:avLst/>
@@ -5081,30 +5069,48 @@
             <a:p>
               <a:pPr algn="ctr"/>
               <a:r>
-                <a:rPr kumimoji="0" lang="ja-JP" altLang="en-US" sz="442" b="1" kern="0">
+                <a:rPr kumimoji="0" lang="ja-JP" altLang="en-US" sz="442" b="1" i="0" u="none" strike="noStrike" kern="0" cap="none" spc="0" normalizeH="0" baseline="0">
+                  <a:ln>
+                    <a:noFill/>
+                  </a:ln>
                   <a:solidFill>
                     <a:srgbClr val="111111"/>
                   </a:solidFill>
+                  <a:effectLst/>
+                  <a:uLnTx/>
+                  <a:uFillTx/>
                   <a:latin typeface="Meiryo UI"/>
                   <a:ea typeface="Meiryo UI"/>
                 </a:rPr>
-                <a:t>(3) ストラテジーファクトリー
+                <a:t>2.3 ストラテジーファクトリー
 </a:t>
               </a:r>
               <a:r>
-                <a:rPr kumimoji="0" lang="en-US" altLang="ja-JP" sz="442" b="1" kern="0">
+                <a:rPr kumimoji="0" lang="en-US" altLang="ja-JP" sz="442" b="1" i="0" u="none" strike="noStrike" kern="0" cap="none" spc="0" normalizeH="0" baseline="0">
+                  <a:ln>
+                    <a:noFill/>
+                  </a:ln>
                   <a:solidFill>
                     <a:srgbClr val="111111"/>
                   </a:solidFill>
+                  <a:effectLst/>
+                  <a:uLnTx/>
+                  <a:uFillTx/>
                   <a:latin typeface="Meiryo UI"/>
                   <a:ea typeface="Meiryo UI"/>
                 </a:rPr>
                 <a:t>StrategyFactory&lt;T&gt;</a:t>
               </a:r>
-              <a:endParaRPr kumimoji="0" lang="ja-JP" altLang="en-US" sz="442" b="1" kern="0">
+              <a:endParaRPr kumimoji="0" lang="ja-JP" altLang="en-US" sz="442" b="1" i="0" u="none" strike="noStrike" kern="0" cap="none" spc="0" normalizeH="0" baseline="0">
+                <a:ln>
+                  <a:noFill/>
+                </a:ln>
                 <a:solidFill>
                   <a:srgbClr val="111111"/>
                 </a:solidFill>
+                <a:effectLst/>
+                <a:uLnTx/>
+                <a:uFillTx/>
                 <a:latin typeface="Meiryo UI"/>
                 <a:ea typeface="Meiryo UI"/>
               </a:endParaRPr>
@@ -5113,7 +5119,7 @@
         </p:sp>
         <p:sp>
           <p:nvSpPr>
-            <p:cNvPr id="14" name="shape_d51_APP_BOOT" title="① 構成ルート・ライフサイクル MauiProgram / App">
+            <p:cNvPr id="46" name="shape_d51_APP_BOOT" title="① 構成ルート・ライフサイクル MauiProgram / App">
               <a:extLst>
                 <a:ext uri="{FF2B5EF4-FFF2-40B4-BE49-F238E27FC236}">
                   <a16:creationId xmlns:a16="http://schemas.microsoft.com/office/drawing/2014/main" id="{787D119C-4BA1-ED25-C1E4-0AFF71E20744}"/>
@@ -5125,8 +5131,8 @@
           </p:nvSpPr>
           <p:spPr>
             <a:xfrm>
-              <a:off x="3396774" y="694857"/>
-              <a:ext cx="2246899" cy="537665"/>
+              <a:off x="3396774" y="524095"/>
+              <a:ext cx="2246898" cy="879190"/>
             </a:xfrm>
             <a:prstGeom prst="roundRect">
               <a:avLst/>
@@ -5262,14 +5268,20 @@
             <a:p>
               <a:pPr algn="ctr"/>
               <a:r>
-                <a:rPr kumimoji="0" lang="ja-JP" altLang="en-US" sz="442" b="1" kern="0">
+                <a:rPr kumimoji="0" lang="ja-JP" altLang="en-US" sz="442" b="1" i="0" u="none" strike="noStrike" kern="0" cap="none" spc="0" normalizeH="0" baseline="0">
+                  <a:ln>
+                    <a:noFill/>
+                  </a:ln>
                   <a:solidFill>
                     <a:srgbClr val="111111"/>
                   </a:solidFill>
+                  <a:effectLst/>
+                  <a:uLnTx/>
+                  <a:uFillTx/>
                   <a:latin typeface="Meiryo UI"/>
                   <a:ea typeface="Meiryo UI"/>
                 </a:rPr>
-                <a:t>(1) 構成ルート・ライフサイクル
+                <a:t>1.1 構成ルート・ライフサイクル
 MauiProgram / DeviceControlWindow</a:t>
               </a:r>
             </a:p>
@@ -5277,7 +5289,7 @@
         </p:sp>
         <p:sp>
           <p:nvSpPr>
-            <p:cNvPr id="15" name="shape_d51_DEVICE_CTRL_EVENT" title="⑤ 《インターフェース》 イベント受信 IDeviceEventReceiver">
+            <p:cNvPr id="47" name="shape_d51_DEVICE_CTRL_EVENT" title="⑤ 《インターフェース》 イベント受信 IDeviceEventReceiver">
               <a:extLst>
                 <a:ext uri="{FF2B5EF4-FFF2-40B4-BE49-F238E27FC236}">
                   <a16:creationId xmlns:a16="http://schemas.microsoft.com/office/drawing/2014/main" id="{7B573B8B-2BD7-DFD1-68DC-D424B7B1FB41}"/>
@@ -5289,8 +5301,8 @@
           </p:nvSpPr>
           <p:spPr>
             <a:xfrm>
-              <a:off x="12087184" y="696589"/>
-              <a:ext cx="1952833" cy="537665"/>
+              <a:off x="12087183" y="533488"/>
+              <a:ext cx="1952833" cy="863870"/>
             </a:xfrm>
             <a:prstGeom prst="roundRect">
               <a:avLst/>
@@ -5426,40 +5438,64 @@
             <a:p>
               <a:pPr algn="ctr"/>
               <a:r>
-                <a:rPr kumimoji="0" lang="ja-JP" altLang="en-US" sz="442" b="1" kern="0">
+                <a:rPr kumimoji="0" lang="ja-JP" altLang="en-US" sz="442" b="1" i="0" u="none" strike="noStrike" kern="0" cap="none" spc="0" normalizeH="0" baseline="0">
+                  <a:ln>
+                    <a:noFill/>
+                  </a:ln>
                   <a:solidFill>
                     <a:srgbClr val="111111"/>
                   </a:solidFill>
+                  <a:effectLst/>
+                  <a:uLnTx/>
+                  <a:uFillTx/>
                   <a:latin typeface="Meiryo UI"/>
                   <a:ea typeface="Meiryo UI"/>
                 </a:rPr>
-                <a:t>(5) </a:t>
+                <a:t>2.5 </a:t>
               </a:r>
               <a:r>
-                <a:rPr kumimoji="0" lang="en-US" altLang="ja-JP" sz="442" b="1" kern="0">
+                <a:rPr kumimoji="0" lang="en-US" altLang="ja-JP" sz="442" b="1" i="0" u="none" strike="noStrike" kern="0" cap="none" spc="0" normalizeH="0" baseline="0">
+                  <a:ln>
+                    <a:noFill/>
+                  </a:ln>
                   <a:solidFill>
                     <a:srgbClr val="111111"/>
                   </a:solidFill>
+                  <a:effectLst/>
+                  <a:uLnTx/>
+                  <a:uFillTx/>
                   <a:latin typeface="Meiryo UI"/>
                   <a:ea typeface="Meiryo UI"/>
                 </a:rPr>
                 <a:t>《</a:t>
               </a:r>
               <a:r>
-                <a:rPr kumimoji="0" lang="ja-JP" altLang="en-US" sz="442" b="1" kern="0">
+                <a:rPr kumimoji="0" lang="ja-JP" altLang="en-US" sz="442" b="1" i="0" u="none" strike="noStrike" kern="0" cap="none" spc="0" normalizeH="0" baseline="0">
+                  <a:ln>
+                    <a:noFill/>
+                  </a:ln>
                   <a:solidFill>
                     <a:srgbClr val="111111"/>
                   </a:solidFill>
+                  <a:effectLst/>
+                  <a:uLnTx/>
+                  <a:uFillTx/>
                   <a:latin typeface="Meiryo UI"/>
                   <a:ea typeface="Meiryo UI"/>
                 </a:rPr>
                 <a:t>インターフェース</a:t>
               </a:r>
               <a:r>
-                <a:rPr kumimoji="0" lang="en-US" altLang="ja-JP" sz="442" b="1" kern="0">
+                <a:rPr kumimoji="0" lang="en-US" altLang="ja-JP" sz="442" b="1" i="0" u="none" strike="noStrike" kern="0" cap="none" spc="0" normalizeH="0" baseline="0">
+                  <a:ln>
+                    <a:noFill/>
+                  </a:ln>
                   <a:solidFill>
                     <a:srgbClr val="111111"/>
                   </a:solidFill>
+                  <a:effectLst/>
+                  <a:uLnTx/>
+                  <a:uFillTx/>
                   <a:latin typeface="Meiryo UI"/>
                   <a:ea typeface="Meiryo UI"/>
                 </a:rPr>
@@ -5467,10 +5503,16 @@
 </a:t>
               </a:r>
               <a:r>
-                <a:rPr kumimoji="0" lang="ja-JP" altLang="en-US" sz="442" b="1" kern="0">
+                <a:rPr kumimoji="0" lang="ja-JP" altLang="en-US" sz="442" b="1" i="0" u="none" strike="noStrike" kern="0" cap="none" spc="0" normalizeH="0" baseline="0">
+                  <a:ln>
+                    <a:noFill/>
+                  </a:ln>
                   <a:solidFill>
                     <a:srgbClr val="111111"/>
                   </a:solidFill>
+                  <a:effectLst/>
+                  <a:uLnTx/>
+                  <a:uFillTx/>
                   <a:latin typeface="Meiryo UI"/>
                   <a:ea typeface="Meiryo UI"/>
                 </a:rPr>
@@ -5478,19 +5520,31 @@
 </a:t>
               </a:r>
               <a:r>
-                <a:rPr kumimoji="0" lang="en-US" altLang="ja-JP" sz="442" b="1" kern="0">
+                <a:rPr kumimoji="0" lang="en-US" altLang="ja-JP" sz="442" b="1" i="0" u="none" strike="noStrike" kern="0" cap="none" spc="0" normalizeH="0" baseline="0">
+                  <a:ln>
+                    <a:noFill/>
+                  </a:ln>
                   <a:solidFill>
                     <a:srgbClr val="111111"/>
                   </a:solidFill>
+                  <a:effectLst/>
+                  <a:uLnTx/>
+                  <a:uFillTx/>
                   <a:latin typeface="Meiryo UI"/>
                   <a:ea typeface="Meiryo UI"/>
                 </a:rPr>
                 <a:t>IDeviceEventReceiver</a:t>
               </a:r>
-              <a:endParaRPr kumimoji="0" lang="ja-JP" altLang="en-US" sz="442" b="1" kern="0">
+              <a:endParaRPr kumimoji="0" lang="ja-JP" altLang="en-US" sz="442" b="1" i="0" u="none" strike="noStrike" kern="0" cap="none" spc="0" normalizeH="0" baseline="0">
+                <a:ln>
+                  <a:noFill/>
+                </a:ln>
                 <a:solidFill>
                   <a:srgbClr val="111111"/>
                 </a:solidFill>
+                <a:effectLst/>
+                <a:uLnTx/>
+                <a:uFillTx/>
                 <a:latin typeface="Meiryo UI"/>
                 <a:ea typeface="Meiryo UI"/>
               </a:endParaRPr>
@@ -5499,7 +5553,7 @@
         </p:sp>
         <p:sp>
           <p:nvSpPr>
-            <p:cNvPr id="16" name="shape_d51_DEVICE_CTRL_CONFIG" title="② 設定サービス DeviceControllerConfigService">
+            <p:cNvPr id="48" name="shape_d51_DEVICE_CTRL_CONFIG" title="② 設定サービス DeviceControllerConfigService">
               <a:extLst>
                 <a:ext uri="{FF2B5EF4-FFF2-40B4-BE49-F238E27FC236}">
                   <a16:creationId xmlns:a16="http://schemas.microsoft.com/office/drawing/2014/main" id="{AE719E2D-3ACD-7E3E-3DA6-D9F0DF14FB8A}"/>
@@ -5511,8 +5565,8 @@
           </p:nvSpPr>
           <p:spPr>
             <a:xfrm>
-              <a:off x="12752235" y="2374387"/>
-              <a:ext cx="3948469" cy="384082"/>
+              <a:off x="12752235" y="2224939"/>
+              <a:ext cx="3948469" cy="682979"/>
             </a:xfrm>
             <a:prstGeom prst="roundRect">
               <a:avLst/>
@@ -5648,30 +5702,48 @@
             <a:p>
               <a:pPr algn="ctr"/>
               <a:r>
-                <a:rPr kumimoji="0" lang="ja-JP" altLang="en-US" sz="442" b="1" kern="0">
+                <a:rPr kumimoji="0" lang="ja-JP" altLang="en-US" sz="442" b="1" i="0" u="none" strike="noStrike" kern="0" cap="none" spc="0" normalizeH="0" baseline="0">
+                  <a:ln>
+                    <a:noFill/>
+                  </a:ln>
                   <a:solidFill>
                     <a:srgbClr val="111111"/>
                   </a:solidFill>
+                  <a:effectLst/>
+                  <a:uLnTx/>
+                  <a:uFillTx/>
                   <a:latin typeface="Meiryo UI"/>
                   <a:ea typeface="Meiryo UI"/>
                 </a:rPr>
-                <a:t>(2) 設定サービス
+                <a:t>2.2 設定サービス
 </a:t>
               </a:r>
               <a:r>
-                <a:rPr kumimoji="0" lang="en-US" altLang="ja-JP" sz="442" b="1" kern="0">
+                <a:rPr kumimoji="0" lang="en-US" altLang="ja-JP" sz="442" b="1" i="0" u="none" strike="noStrike" kern="0" cap="none" spc="0" normalizeH="0" baseline="0">
+                  <a:ln>
+                    <a:noFill/>
+                  </a:ln>
                   <a:solidFill>
                     <a:srgbClr val="111111"/>
                   </a:solidFill>
+                  <a:effectLst/>
+                  <a:uLnTx/>
+                  <a:uFillTx/>
                   <a:latin typeface="Meiryo UI"/>
                   <a:ea typeface="Meiryo UI"/>
                 </a:rPr>
                 <a:t>DeviceControllerConfigService</a:t>
               </a:r>
-              <a:endParaRPr kumimoji="0" lang="ja-JP" altLang="en-US" sz="442" b="1" kern="0">
+              <a:endParaRPr kumimoji="0" lang="ja-JP" altLang="en-US" sz="442" b="1" i="0" u="none" strike="noStrike" kern="0" cap="none" spc="0" normalizeH="0" baseline="0">
+                <a:ln>
+                  <a:noFill/>
+                </a:ln>
                 <a:solidFill>
                   <a:srgbClr val="111111"/>
                 </a:solidFill>
+                <a:effectLst/>
+                <a:uLnTx/>
+                <a:uFillTx/>
                 <a:latin typeface="Meiryo UI"/>
                 <a:ea typeface="Meiryo UI"/>
               </a:endParaRPr>
@@ -5680,7 +5752,7 @@
         </p:sp>
         <p:sp>
           <p:nvSpPr>
-            <p:cNvPr id="17" name="shape_d51_DEVICE_CTRL_MANAGER" title="① デバイスマネージャー DeviceManager">
+            <p:cNvPr id="49" name="shape_d51_DEVICE_CTRL_MANAGER" title="① デバイスマネージャー DeviceManager">
               <a:extLst>
                 <a:ext uri="{FF2B5EF4-FFF2-40B4-BE49-F238E27FC236}">
                   <a16:creationId xmlns:a16="http://schemas.microsoft.com/office/drawing/2014/main" id="{75906FC6-C508-B280-D99B-AD02B15D36C1}"/>
@@ -5829,30 +5901,48 @@
             <a:p>
               <a:pPr algn="ctr"/>
               <a:r>
-                <a:rPr kumimoji="0" lang="ja-JP" altLang="en-US" sz="442" b="1" kern="0">
+                <a:rPr kumimoji="0" lang="ja-JP" altLang="en-US" sz="442" b="1" i="0" u="none" strike="noStrike" kern="0" cap="none" spc="0" normalizeH="0" baseline="0">
+                  <a:ln>
+                    <a:noFill/>
+                  </a:ln>
                   <a:solidFill>
                     <a:srgbClr val="111111"/>
                   </a:solidFill>
+                  <a:effectLst/>
+                  <a:uLnTx/>
+                  <a:uFillTx/>
                   <a:latin typeface="Meiryo UI"/>
                   <a:ea typeface="Meiryo UI"/>
                 </a:rPr>
-                <a:t>(1) デバイスマネージャー
+                <a:t>2.1 デバイスマネージャー
 </a:t>
               </a:r>
               <a:r>
-                <a:rPr kumimoji="0" lang="en-US" altLang="ja-JP" sz="442" b="1" kern="0">
+                <a:rPr kumimoji="0" lang="en-US" altLang="ja-JP" sz="442" b="1" i="0" u="none" strike="noStrike" kern="0" cap="none" spc="0" normalizeH="0" baseline="0">
+                  <a:ln>
+                    <a:noFill/>
+                  </a:ln>
                   <a:solidFill>
                     <a:srgbClr val="111111"/>
                   </a:solidFill>
+                  <a:effectLst/>
+                  <a:uLnTx/>
+                  <a:uFillTx/>
                   <a:latin typeface="Meiryo UI"/>
                   <a:ea typeface="Meiryo UI"/>
                 </a:rPr>
                 <a:t>DeviceManager</a:t>
               </a:r>
-              <a:endParaRPr kumimoji="0" lang="ja-JP" altLang="en-US" sz="442" b="1" kern="0">
+              <a:endParaRPr kumimoji="0" lang="ja-JP" altLang="en-US" sz="442" b="1" i="0" u="none" strike="noStrike" kern="0" cap="none" spc="0" normalizeH="0" baseline="0">
+                <a:ln>
+                  <a:noFill/>
+                </a:ln>
                 <a:solidFill>
                   <a:srgbClr val="111111"/>
                 </a:solidFill>
+                <a:effectLst/>
+                <a:uLnTx/>
+                <a:uFillTx/>
                 <a:latin typeface="Meiryo UI"/>
                 <a:ea typeface="Meiryo UI"/>
               </a:endParaRPr>
@@ -5861,7 +5951,7 @@
         </p:sp>
         <p:cxnSp>
           <p:nvCxnSpPr>
-            <p:cNvPr id="18" name="edge_d51_01_APP_VIEW_to_APP_SERVICE" descr="ユースケース" title="ユースケース">
+            <p:cNvPr id="50" name="edge_d51_01_APP_VIEW_to_APP_SERVICE" descr="ユースケース" title="ユースケース">
               <a:extLst>
                 <a:ext uri="{FF2B5EF4-FFF2-40B4-BE49-F238E27FC236}">
                   <a16:creationId xmlns:a16="http://schemas.microsoft.com/office/drawing/2014/main" id="{D5241639-CBB4-247E-92FE-53951519FE7F}"/>
@@ -5870,15 +5960,15 @@
             </p:cNvPr>
             <p:cNvCxnSpPr>
               <a:cxnSpLocks/>
-              <a:stCxn id="12" idx="2"/>
-              <a:endCxn id="11" idx="1"/>
+              <a:stCxn id="44" idx="2"/>
+              <a:endCxn id="43" idx="1"/>
             </p:cNvCxnSpPr>
             <p:nvPr/>
           </p:nvCxnSpPr>
           <p:spPr>
             <a:xfrm rot="16200000" flipH="1">
               <a:off x="1075674" y="1720179"/>
-              <a:ext cx="1189905" cy="480105"/>
+              <a:ext cx="1189906" cy="480105"/>
             </a:xfrm>
             <a:prstGeom prst="bentConnector2">
               <a:avLst/>
@@ -5910,7 +6000,7 @@
         </p:cxnSp>
         <p:cxnSp>
           <p:nvCxnSpPr>
-            <p:cNvPr id="19" name="edge_d51_02_DEVICE_CTRL_MANAGER_to_DEVICE_CTRL_CONFIG" descr="設定を委譲" title="設定を委譲">
+            <p:cNvPr id="51" name="edge_d51_02_DEVICE_CTRL_MANAGER_to_DEVICE_CTRL_CONFIG" descr="設定を委譲" title="設定を委譲">
               <a:extLst>
                 <a:ext uri="{FF2B5EF4-FFF2-40B4-BE49-F238E27FC236}">
                   <a16:creationId xmlns:a16="http://schemas.microsoft.com/office/drawing/2014/main" id="{15EE46CF-12D7-68FA-36B7-A7F868FC4AB4}"/>
@@ -5919,8 +6009,8 @@
             </p:cNvPr>
             <p:cNvCxnSpPr>
               <a:cxnSpLocks/>
-              <a:stCxn id="17" idx="3"/>
-              <a:endCxn id="16" idx="1"/>
+              <a:stCxn id="49" idx="3"/>
+              <a:endCxn id="48" idx="1"/>
             </p:cNvCxnSpPr>
             <p:nvPr/>
           </p:nvCxnSpPr>
@@ -5961,7 +6051,7 @@
         </p:cxnSp>
         <p:cxnSp>
           <p:nvCxnSpPr>
-            <p:cNvPr id="20" name="edge_d51_03_DEVICE_CTRL_MANAGER_to_DEVICE_CTRL_FACTORY" descr="生成を要求" title="生成を要求">
+            <p:cNvPr id="52" name="edge_d51_03_DEVICE_CTRL_MANAGER_to_DEVICE_CTRL_FACTORY" descr="生成を要求" title="生成を要求">
               <a:extLst>
                 <a:ext uri="{FF2B5EF4-FFF2-40B4-BE49-F238E27FC236}">
                   <a16:creationId xmlns:a16="http://schemas.microsoft.com/office/drawing/2014/main" id="{665F4F74-D86D-163E-A84A-594212837B48}"/>
@@ -5970,19 +6060,19 @@
             </p:cNvPr>
             <p:cNvCxnSpPr>
               <a:cxnSpLocks/>
-              <a:stCxn id="17" idx="2"/>
-              <a:endCxn id="13" idx="2"/>
+              <a:stCxn id="49" idx="2"/>
+              <a:endCxn id="45" idx="2"/>
             </p:cNvCxnSpPr>
             <p:nvPr/>
           </p:nvCxnSpPr>
           <p:spPr>
             <a:xfrm rot="16200000" flipH="1">
-              <a:off x="10759563" y="1152937"/>
-              <a:ext cx="1016783" cy="4785803"/>
+              <a:off x="10635352" y="1277148"/>
+              <a:ext cx="1265205" cy="4785803"/>
             </a:xfrm>
             <a:prstGeom prst="bentConnector3">
               <a:avLst>
-                <a:gd name="adj1" fmla="val 145875"/>
+                <a:gd name="adj1" fmla="val 137211"/>
               </a:avLst>
             </a:prstGeom>
             <a:noFill/>
@@ -6012,7 +6102,7 @@
         </p:cxnSp>
         <p:cxnSp>
           <p:nvCxnSpPr>
-            <p:cNvPr id="21" name="edge_d51_04_DEVICE_CTRL_FACTORY_to_DEVICE_CTRL_CONTRACT" descr="公開契約として返却" title="公開契約として返却">
+            <p:cNvPr id="53" name="edge_d51_04_DEVICE_CTRL_FACTORY_to_DEVICE_CTRL_CONTRACT" descr="公開契約として返却" title="公開契約として返却">
               <a:extLst>
                 <a:ext uri="{FF2B5EF4-FFF2-40B4-BE49-F238E27FC236}">
                   <a16:creationId xmlns:a16="http://schemas.microsoft.com/office/drawing/2014/main" id="{F565C754-DDD2-0D86-0992-E1C7CAB5C26C}"/>
@@ -6021,15 +6111,15 @@
             </p:cNvPr>
             <p:cNvCxnSpPr>
               <a:cxnSpLocks/>
-              <a:stCxn id="13" idx="3"/>
-              <a:endCxn id="10" idx="0"/>
+              <a:stCxn id="45" idx="3"/>
+              <a:endCxn id="42" idx="0"/>
             </p:cNvCxnSpPr>
             <p:nvPr/>
           </p:nvCxnSpPr>
           <p:spPr>
             <a:xfrm>
-              <a:off x="15386172" y="3862192"/>
-              <a:ext cx="2321666" cy="974758"/>
+              <a:off x="15386172" y="3862191"/>
+              <a:ext cx="2321666" cy="444314"/>
             </a:xfrm>
             <a:prstGeom prst="bentConnector2">
               <a:avLst/>
@@ -6061,7 +6151,7 @@
         </p:cxnSp>
         <p:cxnSp>
           <p:nvCxnSpPr>
-            <p:cNvPr id="22" name="edge_d51_05_APP_SERVICE_to_DEVICE_CTRL_MANAGER" descr="ストラテジーを取得" title="ストラテジーを取得">
+            <p:cNvPr id="54" name="edge_d51_05_APP_SERVICE_to_DEVICE_CTRL_MANAGER" descr="ストラテジーを取得" title="ストラテジーを取得">
               <a:extLst>
                 <a:ext uri="{FF2B5EF4-FFF2-40B4-BE49-F238E27FC236}">
                   <a16:creationId xmlns:a16="http://schemas.microsoft.com/office/drawing/2014/main" id="{2E3930B6-D942-B55B-34BC-6D9DD53F789B}"/>
@@ -6070,15 +6160,15 @@
             </p:cNvPr>
             <p:cNvCxnSpPr>
               <a:cxnSpLocks/>
-              <a:stCxn id="11" idx="3"/>
-              <a:endCxn id="17" idx="1"/>
+              <a:stCxn id="43" idx="3"/>
+              <a:endCxn id="49" idx="1"/>
             </p:cNvCxnSpPr>
             <p:nvPr/>
           </p:nvCxnSpPr>
           <p:spPr>
             <a:xfrm>
-              <a:off x="5389742" y="2555185"/>
-              <a:ext cx="2418296" cy="12367"/>
+              <a:off x="5389742" y="2555187"/>
+              <a:ext cx="2418296" cy="12365"/>
             </a:xfrm>
             <a:prstGeom prst="straightConnector1">
               <a:avLst/>
@@ -6110,7 +6200,7 @@
         </p:cxnSp>
         <p:cxnSp>
           <p:nvCxnSpPr>
-            <p:cNvPr id="23" name="edge_d51_06_APP_SERVICE_to_DEVICE_CTRL_CONTRACT" descr="デバイス操作" title="デバイス操作">
+            <p:cNvPr id="55" name="edge_d51_06_APP_SERVICE_to_DEVICE_CTRL_CONTRACT" descr="デバイス操作" title="デバイス操作">
               <a:extLst>
                 <a:ext uri="{FF2B5EF4-FFF2-40B4-BE49-F238E27FC236}">
                   <a16:creationId xmlns:a16="http://schemas.microsoft.com/office/drawing/2014/main" id="{5113B9A9-B4FD-B11D-93CE-1F71067A448B}"/>
@@ -6119,15 +6209,15 @@
             </p:cNvPr>
             <p:cNvCxnSpPr>
               <a:cxnSpLocks/>
-              <a:stCxn id="11" idx="2"/>
-              <a:endCxn id="10" idx="1"/>
+              <a:stCxn id="43" idx="2"/>
+              <a:endCxn id="42" idx="1"/>
             </p:cNvCxnSpPr>
             <p:nvPr/>
           </p:nvCxnSpPr>
           <p:spPr>
             <a:xfrm rot="16200000" flipH="1">
-              <a:off x="8408887" y="-2011449"/>
-              <a:ext cx="2819303" cy="12336653"/>
+              <a:off x="8437666" y="-1982669"/>
+              <a:ext cx="2761746" cy="12336653"/>
             </a:xfrm>
             <a:prstGeom prst="bentConnector2">
               <a:avLst/>
@@ -6159,7 +6249,7 @@
         </p:cxnSp>
         <p:sp>
           <p:nvSpPr>
-            <p:cNvPr id="24" name="edge_label_d51_01_APP_VIEW_to_APP_SERVICE" descr="ユースケース" title="ユースケース">
+            <p:cNvPr id="56" name="edge_label_d51_01_APP_VIEW_to_APP_SERVICE" descr="ユースケース" title="ユースケース">
               <a:extLst>
                 <a:ext uri="{FF2B5EF4-FFF2-40B4-BE49-F238E27FC236}">
                   <a16:creationId xmlns:a16="http://schemas.microsoft.com/office/drawing/2014/main" id="{EF58412C-725B-18EF-80C3-F301A2D7A473}"/>
@@ -6171,8 +6261,8 @@
           </p:nvSpPr>
           <p:spPr>
             <a:xfrm>
-              <a:off x="1043726" y="1936143"/>
-              <a:ext cx="750839" cy="148122"/>
+              <a:off x="1043727" y="1919803"/>
+              <a:ext cx="750838" cy="180803"/>
             </a:xfrm>
             <a:prstGeom prst="rect">
               <a:avLst/>
@@ -6288,10 +6378,16 @@
             <a:p>
               <a:pPr algn="ctr"/>
               <a:r>
-                <a:rPr kumimoji="0" lang="ja-JP" altLang="en-US" sz="398" kern="0">
+                <a:rPr kumimoji="0" lang="ja-JP" altLang="en-US" sz="398" b="0" i="0" u="none" strike="noStrike" kern="0" cap="none" spc="0" normalizeH="0" baseline="0">
+                  <a:ln>
+                    <a:noFill/>
+                  </a:ln>
                   <a:solidFill>
                     <a:srgbClr val="111111"/>
                   </a:solidFill>
+                  <a:effectLst/>
+                  <a:uLnTx/>
+                  <a:uFillTx/>
                   <a:latin typeface="Meiryo UI"/>
                   <a:ea typeface="Meiryo UI"/>
                 </a:rPr>
@@ -6302,7 +6398,7 @@
         </p:sp>
         <p:sp>
           <p:nvSpPr>
-            <p:cNvPr id="25" name="edge_label_d51_02_DEVICE_CTRL_MANAGER_to_DEVICE_CTRL_CONFIG" descr="設定を委譲" title="設定を委譲">
+            <p:cNvPr id="57" name="edge_label_d51_02_DEVICE_CTRL_MANAGER_to_DEVICE_CTRL_CONFIG" descr="設定を委譲" title="設定を委譲">
               <a:extLst>
                 <a:ext uri="{FF2B5EF4-FFF2-40B4-BE49-F238E27FC236}">
                   <a16:creationId xmlns:a16="http://schemas.microsoft.com/office/drawing/2014/main" id="{A5E10188-0A60-7A92-AF51-CEF560572A44}"/>
@@ -6314,8 +6410,8 @@
           </p:nvSpPr>
           <p:spPr>
             <a:xfrm>
-              <a:off x="10634791" y="2463724"/>
-              <a:ext cx="926773" cy="148122"/>
+              <a:off x="10634790" y="2439565"/>
+              <a:ext cx="926774" cy="196440"/>
             </a:xfrm>
             <a:prstGeom prst="rect">
               <a:avLst/>
@@ -6431,10 +6527,16 @@
             <a:p>
               <a:pPr algn="ctr"/>
               <a:r>
-                <a:rPr kumimoji="0" lang="ja-JP" altLang="en-US" sz="398" kern="0">
+                <a:rPr kumimoji="0" lang="ja-JP" altLang="en-US" sz="398" b="0" i="0" u="none" strike="noStrike" kern="0" cap="none" spc="0" normalizeH="0" baseline="0">
+                  <a:ln>
+                    <a:noFill/>
+                  </a:ln>
                   <a:solidFill>
                     <a:srgbClr val="111111"/>
                   </a:solidFill>
+                  <a:effectLst/>
+                  <a:uLnTx/>
+                  <a:uFillTx/>
                   <a:latin typeface="Meiryo UI"/>
                   <a:ea typeface="Meiryo UI"/>
                 </a:rPr>
@@ -6445,7 +6547,7 @@
         </p:sp>
         <p:sp>
           <p:nvSpPr>
-            <p:cNvPr id="26" name="edge_label_d51_03_DEVICE_CTRL_MANAGER_to_DEVICE_CTRL_FACTORY" descr="生成を要求" title="生成を要求">
+            <p:cNvPr id="58" name="edge_label_d51_03_DEVICE_CTRL_MANAGER_to_DEVICE_CTRL_FACTORY" descr="生成を要求" title="生成を要求">
               <a:extLst>
                 <a:ext uri="{FF2B5EF4-FFF2-40B4-BE49-F238E27FC236}">
                   <a16:creationId xmlns:a16="http://schemas.microsoft.com/office/drawing/2014/main" id="{8FD0B72D-1A87-EFE4-DDFD-1FA223D59BB1}"/>
@@ -6457,8 +6559,8 @@
           </p:nvSpPr>
           <p:spPr>
             <a:xfrm>
-              <a:off x="10207154" y="4426135"/>
-              <a:ext cx="1041317" cy="148122"/>
+              <a:off x="10207155" y="4402846"/>
+              <a:ext cx="1041317" cy="194703"/>
             </a:xfrm>
             <a:prstGeom prst="rect">
               <a:avLst/>
@@ -6574,10 +6676,16 @@
             <a:p>
               <a:pPr algn="ctr"/>
               <a:r>
-                <a:rPr kumimoji="0" lang="ja-JP" altLang="en-US" sz="398" kern="0">
+                <a:rPr kumimoji="0" lang="ja-JP" altLang="en-US" sz="398" b="0" i="0" u="none" strike="noStrike" kern="0" cap="none" spc="0" normalizeH="0" baseline="0">
+                  <a:ln>
+                    <a:noFill/>
+                  </a:ln>
                   <a:solidFill>
                     <a:srgbClr val="111111"/>
                   </a:solidFill>
+                  <a:effectLst/>
+                  <a:uLnTx/>
+                  <a:uFillTx/>
                   <a:latin typeface="Meiryo UI"/>
                   <a:ea typeface="Meiryo UI"/>
                 </a:rPr>
@@ -6588,7 +6696,7 @@
         </p:sp>
         <p:sp>
           <p:nvSpPr>
-            <p:cNvPr id="27" name="edge_label_d51_04_DEVICE_CTRL_FACTORY_to_DEVICE_CTRL_CONTRACT" descr="公開契約として返却" title="公開契約として返却">
+            <p:cNvPr id="59" name="edge_label_d51_04_DEVICE_CTRL_FACTORY_to_DEVICE_CTRL_CONTRACT" descr="公開契約として返却" title="公開契約として返却">
               <a:extLst>
                 <a:ext uri="{FF2B5EF4-FFF2-40B4-BE49-F238E27FC236}">
                   <a16:creationId xmlns:a16="http://schemas.microsoft.com/office/drawing/2014/main" id="{7E02A816-9F43-3EE6-94C0-A77A3589E3A8}"/>
@@ -6600,8 +6708,8 @@
           </p:nvSpPr>
           <p:spPr>
             <a:xfrm>
-              <a:off x="15996463" y="3811935"/>
-              <a:ext cx="1372665" cy="148122"/>
+              <a:off x="15996462" y="3786695"/>
+              <a:ext cx="1372664" cy="198605"/>
             </a:xfrm>
             <a:prstGeom prst="rect">
               <a:avLst/>
@@ -6717,10 +6825,16 @@
             <a:p>
               <a:pPr algn="ctr"/>
               <a:r>
-                <a:rPr kumimoji="0" lang="ja-JP" altLang="en-US" sz="398" kern="0">
+                <a:rPr kumimoji="0" lang="ja-JP" altLang="en-US" sz="398" b="0" i="0" u="none" strike="noStrike" kern="0" cap="none" spc="0" normalizeH="0" baseline="0">
+                  <a:ln>
+                    <a:noFill/>
+                  </a:ln>
                   <a:solidFill>
                     <a:srgbClr val="111111"/>
                   </a:solidFill>
+                  <a:effectLst/>
+                  <a:uLnTx/>
+                  <a:uFillTx/>
                   <a:latin typeface="Meiryo UI"/>
                   <a:ea typeface="Meiryo UI"/>
                 </a:rPr>
@@ -6731,7 +6845,7 @@
         </p:sp>
         <p:sp>
           <p:nvSpPr>
-            <p:cNvPr id="28" name="edge_label_d51_05_APP_SERVICE_to_DEVICE_CTRL_MANAGER" descr="ストラテジーを取得" title="ストラテジーを取得">
+            <p:cNvPr id="60" name="edge_label_d51_05_APP_SERVICE_to_DEVICE_CTRL_MANAGER" descr="ストラテジーを取得" title="ストラテジーを取得">
               <a:extLst>
                 <a:ext uri="{FF2B5EF4-FFF2-40B4-BE49-F238E27FC236}">
                   <a16:creationId xmlns:a16="http://schemas.microsoft.com/office/drawing/2014/main" id="{3B53F97D-1050-5AFB-D472-9A5893C28B7E}"/>
@@ -6743,8 +6857,8 @@
           </p:nvSpPr>
           <p:spPr>
             <a:xfrm>
-              <a:off x="5716084" y="2478931"/>
-              <a:ext cx="1305409" cy="148122"/>
+              <a:off x="5716083" y="2450217"/>
+              <a:ext cx="1305409" cy="205555"/>
             </a:xfrm>
             <a:prstGeom prst="rect">
               <a:avLst/>
@@ -6860,10 +6974,16 @@
             <a:p>
               <a:pPr algn="ctr"/>
               <a:r>
-                <a:rPr kumimoji="0" lang="ja-JP" altLang="en-US" sz="398" kern="0">
+                <a:rPr kumimoji="0" lang="ja-JP" altLang="en-US" sz="398" b="0" i="0" u="none" strike="noStrike" kern="0" cap="none" spc="0" normalizeH="0" baseline="0">
+                  <a:ln>
+                    <a:noFill/>
+                  </a:ln>
                   <a:solidFill>
                     <a:srgbClr val="111111"/>
                   </a:solidFill>
+                  <a:effectLst/>
+                  <a:uLnTx/>
+                  <a:uFillTx/>
                   <a:latin typeface="Meiryo UI"/>
                   <a:ea typeface="Meiryo UI"/>
                 </a:rPr>
@@ -6874,7 +6994,7 @@
         </p:sp>
         <p:sp>
           <p:nvSpPr>
-            <p:cNvPr id="29" name="edge_label_d51_06_APP_SERVICE_to_DEVICE_CTRL_CONTRACT">
+            <p:cNvPr id="61" name="edge_label_d51_06_APP_SERVICE_to_DEVICE_CTRL_CONTRACT">
               <a:extLst>
                 <a:ext uri="{FF2B5EF4-FFF2-40B4-BE49-F238E27FC236}">
                   <a16:creationId xmlns:a16="http://schemas.microsoft.com/office/drawing/2014/main" id="{2DFDC522-3571-8DB5-45D1-207E93D34335}"/>
@@ -6996,7 +7116,7 @@
             <a:p>
               <a:pPr algn="ctr"/>
               <a:r>
-                <a:rPr lang="ja-JP" altLang="en-US" sz="486">
+                <a:rPr kumimoji="1" lang="ja-JP" altLang="en-US" sz="486">
                   <a:solidFill>
                     <a:srgbClr val="514137"/>
                   </a:solidFill>
@@ -7009,7 +7129,7 @@
         </p:sp>
         <p:sp>
           <p:nvSpPr>
-            <p:cNvPr id="30" name="Rounded Rectangle 125">
+            <p:cNvPr id="62" name="Rounded Rectangle 125">
               <a:extLst>
                 <a:ext uri="{FF2B5EF4-FFF2-40B4-BE49-F238E27FC236}">
                   <a16:creationId xmlns:a16="http://schemas.microsoft.com/office/drawing/2014/main" id="{0102AA0B-9B10-407A-9D2E-128E56B58A60}"/>
@@ -7167,7 +7287,7 @@
             <a:p>
               <a:pPr algn="ctr"/>
               <a:r>
-                <a:rPr sz="486">
+                <a:rPr sz="486" b="0">
                   <a:solidFill>
                     <a:srgbClr val="111111"/>
                   </a:solidFill>
@@ -7182,7 +7302,7 @@
         </p:sp>
         <p:sp>
           <p:nvSpPr>
-            <p:cNvPr id="31" name="Rectangle 127">
+            <p:cNvPr id="63" name="Rectangle 127">
               <a:extLst>
                 <a:ext uri="{FF2B5EF4-FFF2-40B4-BE49-F238E27FC236}">
                   <a16:creationId xmlns:a16="http://schemas.microsoft.com/office/drawing/2014/main" id="{72C860B2-9C97-C6CB-CD99-F937E46FF2C0}"/>
@@ -7324,7 +7444,7 @@
             <a:p>
               <a:pPr algn="ctr"/>
               <a:r>
-                <a:rPr sz="437">
+                <a:rPr sz="437" b="0">
                   <a:solidFill>
                     <a:srgbClr val="111111"/>
                   </a:solidFill>
@@ -7339,7 +7459,7 @@
         </p:sp>
         <p:sp>
           <p:nvSpPr>
-            <p:cNvPr id="32" name="Rectangle 129">
+            <p:cNvPr id="64" name="Rectangle 129">
               <a:extLst>
                 <a:ext uri="{FF2B5EF4-FFF2-40B4-BE49-F238E27FC236}">
                   <a16:creationId xmlns:a16="http://schemas.microsoft.com/office/drawing/2014/main" id="{7E6F8FC8-E9F6-A7F9-3F16-2BBCF4878451}"/>
@@ -7481,7 +7601,7 @@
             <a:p>
               <a:pPr algn="ctr"/>
               <a:r>
-                <a:rPr sz="437">
+                <a:rPr sz="437" b="0">
                   <a:solidFill>
                     <a:srgbClr val="111111"/>
                   </a:solidFill>
@@ -7496,7 +7616,7 @@
         </p:sp>
         <p:sp>
           <p:nvSpPr>
-            <p:cNvPr id="33" name="Rectangle 131">
+            <p:cNvPr id="65" name="Rectangle 131">
               <a:extLst>
                 <a:ext uri="{FF2B5EF4-FFF2-40B4-BE49-F238E27FC236}">
                   <a16:creationId xmlns:a16="http://schemas.microsoft.com/office/drawing/2014/main" id="{03E31FF8-1DFB-3D5E-C302-0DA3BD129185}"/>
@@ -7638,7 +7758,7 @@
             <a:p>
               <a:pPr algn="ctr"/>
               <a:r>
-                <a:rPr sz="437">
+                <a:rPr sz="437" b="0">
                   <a:solidFill>
                     <a:srgbClr val="111111"/>
                   </a:solidFill>
@@ -7684,7 +7804,7 @@
       </p:grpSpPr>
       <p:grpSp>
         <p:nvGrpSpPr>
-          <p:cNvPr id="2" name="ImportedDiagram_slide_2">
+          <p:cNvPr id="27" name="ImportedDiagram_slide_2">
             <a:extLst>
               <a:ext uri="{FF2B5EF4-FFF2-40B4-BE49-F238E27FC236}">
                 <a16:creationId xmlns:a16="http://schemas.microsoft.com/office/drawing/2014/main" id="{D61201A3-99A0-4E35-87CE-35A5AA20A672}"/>
@@ -7698,15 +7818,15 @@
         </p:nvGrpSpPr>
         <p:grpSpPr>
           <a:xfrm>
-            <a:off x="254000" y="254000"/>
-            <a:ext cx="9525000" cy="2513430"/>
+            <a:off x="76200" y="1900487"/>
+            <a:ext cx="12547600" cy="3311025"/>
             <a:chOff x="0" y="0"/>
             <a:chExt cx="19555044" cy="5114502"/>
           </a:xfrm>
         </p:grpSpPr>
         <p:sp>
           <p:nvSpPr>
-            <p:cNvPr id="3" name="frame_0">
+            <p:cNvPr id="28" name="frame_0">
               <a:extLst>
                 <a:ext uri="{FF2B5EF4-FFF2-40B4-BE49-F238E27FC236}">
                   <a16:creationId xmlns:a16="http://schemas.microsoft.com/office/drawing/2014/main" id="{674F2E40-FFB3-D5C8-0E1D-74BE1012EC48}"/>
@@ -7837,7 +7957,7 @@
         </p:sp>
         <p:sp>
           <p:nvSpPr>
-            <p:cNvPr id="4" name="frame_title_0">
+            <p:cNvPr id="29" name="frame_title_0">
               <a:extLst>
                 <a:ext uri="{FF2B5EF4-FFF2-40B4-BE49-F238E27FC236}">
                   <a16:creationId xmlns:a16="http://schemas.microsoft.com/office/drawing/2014/main" id="{F2C40708-2DF3-861B-6CAC-71C669302363}"/>
@@ -7849,8 +7969,8 @@
           </p:nvSpPr>
           <p:spPr>
             <a:xfrm>
-              <a:off x="9050239" y="120497"/>
-              <a:ext cx="1454569" cy="239783"/>
+              <a:off x="9050238" y="76543"/>
+              <a:ext cx="1454568" cy="327690"/>
             </a:xfrm>
             <a:prstGeom prst="rect">
               <a:avLst/>
@@ -7964,7 +8084,7 @@
             <a:p>
               <a:pPr algn="ctr"/>
               <a:r>
-                <a:rPr lang="ja-JP" altLang="en-US" sz="648" b="1">
+                <a:rPr lang="ja-JP" sz="648" b="1">
                   <a:solidFill>
                     <a:srgbClr val="538135"/>
                   </a:solidFill>
@@ -7972,36 +8092,14 @@
                   <a:ea typeface="Meiryo UI"/>
                   <a:cs typeface="Meiryo UI"/>
                 </a:rPr>
-                <a:t>（</a:t>
-              </a:r>
-              <a:r>
-                <a:rPr lang="en-US" altLang="ja-JP" sz="648" b="1">
-                  <a:solidFill>
-                    <a:srgbClr val="538135"/>
-                  </a:solidFill>
-                  <a:latin typeface="Meiryo UI"/>
-                  <a:ea typeface="Meiryo UI"/>
-                  <a:cs typeface="Meiryo UI"/>
-                </a:rPr>
-                <a:t>1</a:t>
-              </a:r>
-              <a:r>
-                <a:rPr lang="ja-JP" altLang="en-US" sz="648" b="1">
-                  <a:solidFill>
-                    <a:srgbClr val="538135"/>
-                  </a:solidFill>
-                  <a:latin typeface="Meiryo UI"/>
-                  <a:ea typeface="Meiryo UI"/>
-                  <a:cs typeface="Meiryo UI"/>
-                </a:rPr>
-                <a:t>）設定管理</a:t>
+                <a:t>1 設定管理</a:t>
               </a:r>
             </a:p>
           </p:txBody>
         </p:sp>
         <p:sp>
           <p:nvSpPr>
-            <p:cNvPr id="5" name="shape_d61_CONFIG_DOMAIN_DEFAULT" title="④ 《設定資源》 デフォルト設定 TabletPos.DeviceCtrl組込みリソース">
+            <p:cNvPr id="30" name="shape_d61_CONFIG_DOMAIN_DEFAULT" title="④ 《設定資源》 デフォルト設定 TabletPos.DeviceCtrl組込みリソース">
               <a:extLst>
                 <a:ext uri="{FF2B5EF4-FFF2-40B4-BE49-F238E27FC236}">
                   <a16:creationId xmlns:a16="http://schemas.microsoft.com/office/drawing/2014/main" id="{B5174D61-63FC-4811-8634-3EC3C4993DD5}"/>
@@ -8150,40 +8248,64 @@
             <a:p>
               <a:pPr algn="ctr"/>
               <a:r>
-                <a:rPr kumimoji="0" lang="ja-JP" altLang="en-US" sz="498" b="1" kern="0">
+                <a:rPr kumimoji="0" lang="ja-JP" altLang="en-US" sz="498" b="1" i="0" u="none" strike="noStrike" kern="0" cap="none" spc="0" normalizeH="0" baseline="0">
+                  <a:ln>
+                    <a:noFill/>
+                  </a:ln>
                   <a:solidFill>
                     <a:srgbClr val="111111"/>
                   </a:solidFill>
+                  <a:effectLst/>
+                  <a:uLnTx/>
+                  <a:uFillTx/>
                   <a:latin typeface="Meiryo UI"/>
                   <a:ea typeface="Meiryo UI"/>
                 </a:rPr>
-                <a:t>(4) </a:t>
+                <a:t>1.4 </a:t>
               </a:r>
               <a:r>
-                <a:rPr kumimoji="0" lang="en-US" altLang="ja-JP" sz="498" b="1" kern="0">
+                <a:rPr kumimoji="0" lang="en-US" altLang="ja-JP" sz="498" b="1" i="0" u="none" strike="noStrike" kern="0" cap="none" spc="0" normalizeH="0" baseline="0">
+                  <a:ln>
+                    <a:noFill/>
+                  </a:ln>
                   <a:solidFill>
                     <a:srgbClr val="111111"/>
                   </a:solidFill>
+                  <a:effectLst/>
+                  <a:uLnTx/>
+                  <a:uFillTx/>
                   <a:latin typeface="Meiryo UI"/>
                   <a:ea typeface="Meiryo UI"/>
                 </a:rPr>
                 <a:t>《</a:t>
               </a:r>
               <a:r>
-                <a:rPr kumimoji="0" lang="ja-JP" altLang="en-US" sz="498" b="1" kern="0">
+                <a:rPr kumimoji="0" lang="ja-JP" altLang="en-US" sz="498" b="1" i="0" u="none" strike="noStrike" kern="0" cap="none" spc="0" normalizeH="0" baseline="0">
+                  <a:ln>
+                    <a:noFill/>
+                  </a:ln>
                   <a:solidFill>
                     <a:srgbClr val="111111"/>
                   </a:solidFill>
+                  <a:effectLst/>
+                  <a:uLnTx/>
+                  <a:uFillTx/>
                   <a:latin typeface="Meiryo UI"/>
                   <a:ea typeface="Meiryo UI"/>
                 </a:rPr>
                 <a:t>設定資源</a:t>
               </a:r>
               <a:r>
-                <a:rPr kumimoji="0" lang="en-US" altLang="ja-JP" sz="498" b="1" kern="0">
+                <a:rPr kumimoji="0" lang="en-US" altLang="ja-JP" sz="498" b="1" i="0" u="none" strike="noStrike" kern="0" cap="none" spc="0" normalizeH="0" baseline="0">
+                  <a:ln>
+                    <a:noFill/>
+                  </a:ln>
                   <a:solidFill>
                     <a:srgbClr val="111111"/>
                   </a:solidFill>
+                  <a:effectLst/>
+                  <a:uLnTx/>
+                  <a:uFillTx/>
                   <a:latin typeface="Meiryo UI"/>
                   <a:ea typeface="Meiryo UI"/>
                 </a:rPr>
@@ -8193,10 +8315,16 @@
             <a:p>
               <a:pPr algn="ctr"/>
               <a:r>
-                <a:rPr kumimoji="0" lang="ja-JP" altLang="en-US" sz="498" b="1" kern="0">
+                <a:rPr kumimoji="0" lang="ja-JP" altLang="en-US" sz="498" b="1" i="0" u="none" strike="noStrike" kern="0" cap="none" spc="0" normalizeH="0" baseline="0">
+                  <a:ln>
+                    <a:noFill/>
+                  </a:ln>
                   <a:solidFill>
                     <a:srgbClr val="111111"/>
                   </a:solidFill>
+                  <a:effectLst/>
+                  <a:uLnTx/>
+                  <a:uFillTx/>
                   <a:latin typeface="Meiryo UI"/>
                   <a:ea typeface="Meiryo UI"/>
                 </a:rPr>
@@ -8206,19 +8334,31 @@
             <a:p>
               <a:pPr algn="ctr"/>
               <a:r>
-                <a:rPr kumimoji="0" lang="en-US" altLang="ja-JP" sz="498" b="1" kern="0">
+                <a:rPr kumimoji="0" lang="en-US" altLang="ja-JP" sz="498" b="1" i="0" u="none" strike="noStrike" kern="0" cap="none" spc="0" normalizeH="0" baseline="0">
+                  <a:ln>
+                    <a:noFill/>
+                  </a:ln>
                   <a:solidFill>
                     <a:srgbClr val="111111"/>
                   </a:solidFill>
+                  <a:effectLst/>
+                  <a:uLnTx/>
+                  <a:uFillTx/>
                   <a:latin typeface="Meiryo UI"/>
                   <a:ea typeface="Meiryo UI"/>
                 </a:rPr>
                 <a:t>Pos.DeviceCtrl組込みリソース</a:t>
               </a:r>
-              <a:endParaRPr kumimoji="0" lang="ja-JP" altLang="en-US" sz="498" b="1" kern="0">
+              <a:endParaRPr kumimoji="0" lang="ja-JP" altLang="en-US" sz="498" b="1" i="0" u="none" strike="noStrike" kern="0" cap="none" spc="0" normalizeH="0" baseline="0">
+                <a:ln>
+                  <a:noFill/>
+                </a:ln>
                 <a:solidFill>
                   <a:srgbClr val="111111"/>
                 </a:solidFill>
+                <a:effectLst/>
+                <a:uLnTx/>
+                <a:uFillTx/>
                 <a:latin typeface="Meiryo UI"/>
                 <a:ea typeface="Meiryo UI"/>
               </a:endParaRPr>
@@ -8227,7 +8367,7 @@
         </p:sp>
         <p:sp>
           <p:nvSpPr>
-            <p:cNvPr id="6" name="shape_d61_CONFIG_DOMAIN_RUNTIME" title="③ 《設定資源》 ランタイム設定 device_controller_config.json">
+            <p:cNvPr id="31" name="shape_d61_CONFIG_DOMAIN_RUNTIME" title="③ 《設定資源》 ランタイム設定 device_controller_config.json">
               <a:extLst>
                 <a:ext uri="{FF2B5EF4-FFF2-40B4-BE49-F238E27FC236}">
                   <a16:creationId xmlns:a16="http://schemas.microsoft.com/office/drawing/2014/main" id="{F31C2069-BD38-7AB0-BA62-590F5D0229E1}"/>
@@ -8376,40 +8516,64 @@
             <a:p>
               <a:pPr algn="ctr"/>
               <a:r>
-                <a:rPr kumimoji="0" lang="ja-JP" altLang="en-US" sz="498" b="1" kern="0">
+                <a:rPr kumimoji="0" lang="ja-JP" altLang="en-US" sz="498" b="1" i="0" u="none" strike="noStrike" kern="0" cap="none" spc="0" normalizeH="0" baseline="0">
+                  <a:ln>
+                    <a:noFill/>
+                  </a:ln>
                   <a:solidFill>
                     <a:srgbClr val="111111"/>
                   </a:solidFill>
+                  <a:effectLst/>
+                  <a:uLnTx/>
+                  <a:uFillTx/>
                   <a:latin typeface="Meiryo UI"/>
                   <a:ea typeface="Meiryo UI"/>
                 </a:rPr>
-                <a:t>(3) </a:t>
+                <a:t>1.3 </a:t>
               </a:r>
               <a:r>
-                <a:rPr kumimoji="0" lang="en-US" altLang="ja-JP" sz="498" b="1" kern="0">
+                <a:rPr kumimoji="0" lang="en-US" altLang="ja-JP" sz="498" b="1" i="0" u="none" strike="noStrike" kern="0" cap="none" spc="0" normalizeH="0" baseline="0">
+                  <a:ln>
+                    <a:noFill/>
+                  </a:ln>
                   <a:solidFill>
                     <a:srgbClr val="111111"/>
                   </a:solidFill>
+                  <a:effectLst/>
+                  <a:uLnTx/>
+                  <a:uFillTx/>
                   <a:latin typeface="Meiryo UI"/>
                   <a:ea typeface="Meiryo UI"/>
                 </a:rPr>
                 <a:t>《</a:t>
               </a:r>
               <a:r>
-                <a:rPr kumimoji="0" lang="ja-JP" altLang="en-US" sz="498" b="1" kern="0">
+                <a:rPr kumimoji="0" lang="ja-JP" altLang="en-US" sz="498" b="1" i="0" u="none" strike="noStrike" kern="0" cap="none" spc="0" normalizeH="0" baseline="0">
+                  <a:ln>
+                    <a:noFill/>
+                  </a:ln>
                   <a:solidFill>
                     <a:srgbClr val="111111"/>
                   </a:solidFill>
+                  <a:effectLst/>
+                  <a:uLnTx/>
+                  <a:uFillTx/>
                   <a:latin typeface="Meiryo UI"/>
                   <a:ea typeface="Meiryo UI"/>
                 </a:rPr>
                 <a:t>設定資源</a:t>
               </a:r>
               <a:r>
-                <a:rPr kumimoji="0" lang="en-US" altLang="ja-JP" sz="498" b="1" kern="0">
+                <a:rPr kumimoji="0" lang="en-US" altLang="ja-JP" sz="498" b="1" i="0" u="none" strike="noStrike" kern="0" cap="none" spc="0" normalizeH="0" baseline="0">
+                  <a:ln>
+                    <a:noFill/>
+                  </a:ln>
                   <a:solidFill>
                     <a:srgbClr val="111111"/>
                   </a:solidFill>
+                  <a:effectLst/>
+                  <a:uLnTx/>
+                  <a:uFillTx/>
                   <a:latin typeface="Meiryo UI"/>
                   <a:ea typeface="Meiryo UI"/>
                 </a:rPr>
@@ -8419,20 +8583,32 @@
             <a:p>
               <a:pPr algn="ctr"/>
               <a:r>
-                <a:rPr kumimoji="0" lang="ja-JP" altLang="en-US" sz="498" b="1" kern="0">
+                <a:rPr kumimoji="0" lang="ja-JP" altLang="en-US" sz="498" b="1" i="0" u="none" strike="noStrike" kern="0" cap="none" spc="0" normalizeH="0" baseline="0">
+                  <a:ln>
+                    <a:noFill/>
+                  </a:ln>
                   <a:solidFill>
                     <a:srgbClr val="111111"/>
                   </a:solidFill>
+                  <a:effectLst/>
+                  <a:uLnTx/>
+                  <a:uFillTx/>
                   <a:latin typeface="Meiryo UI"/>
                   <a:ea typeface="Meiryo UI"/>
                 </a:rPr>
                 <a:t>起動時取込</a:t>
               </a:r>
               <a:r>
-                <a:rPr kumimoji="0" lang="en-US" altLang="ja-JP" sz="498" b="1" kern="0">
+                <a:rPr kumimoji="0" lang="en-US" altLang="ja-JP" sz="498" b="1" i="0" u="none" strike="noStrike" kern="0" cap="none" spc="0" normalizeH="0" baseline="0">
+                  <a:ln>
+                    <a:noFill/>
+                  </a:ln>
                   <a:solidFill>
                     <a:srgbClr val="111111"/>
                   </a:solidFill>
+                  <a:effectLst/>
+                  <a:uLnTx/>
+                  <a:uFillTx/>
                   <a:latin typeface="Meiryo UI"/>
                   <a:ea typeface="Meiryo UI"/>
                 </a:rPr>
@@ -8442,19 +8618,31 @@
             <a:p>
               <a:pPr algn="ctr"/>
               <a:r>
-                <a:rPr kumimoji="0" lang="en-US" altLang="ja-JP" sz="498" b="1" kern="0">
+                <a:rPr kumimoji="0" lang="en-US" altLang="ja-JP" sz="498" b="1" i="0" u="none" strike="noStrike" kern="0" cap="none" spc="0" normalizeH="0" baseline="0">
+                  <a:ln>
+                    <a:noFill/>
+                  </a:ln>
                   <a:solidFill>
                     <a:srgbClr val="111111"/>
                   </a:solidFill>
+                  <a:effectLst/>
+                  <a:uLnTx/>
+                  <a:uFillTx/>
                   <a:latin typeface="Meiryo UI"/>
                   <a:ea typeface="Meiryo UI"/>
                 </a:rPr>
                 <a:t>device_controller_config.json</a:t>
               </a:r>
-              <a:endParaRPr kumimoji="0" lang="ja-JP" altLang="en-US" sz="498" b="1" kern="0">
+              <a:endParaRPr kumimoji="0" lang="ja-JP" altLang="en-US" sz="498" b="1" i="0" u="none" strike="noStrike" kern="0" cap="none" spc="0" normalizeH="0" baseline="0">
+                <a:ln>
+                  <a:noFill/>
+                </a:ln>
                 <a:solidFill>
                   <a:srgbClr val="111111"/>
                 </a:solidFill>
+                <a:effectLst/>
+                <a:uLnTx/>
+                <a:uFillTx/>
                 <a:latin typeface="Meiryo UI"/>
                 <a:ea typeface="Meiryo UI"/>
               </a:endParaRPr>
@@ -8463,7 +8651,7 @@
         </p:sp>
         <p:sp>
           <p:nvSpPr>
-            <p:cNvPr id="7" name="shape_d61_CONFIG_DOMAIN_CONFIG" title="② 設定サービス DeviceControllerConfigService">
+            <p:cNvPr id="32" name="shape_d61_CONFIG_DOMAIN_CONFIG" title="② 設定サービス DeviceControllerConfigService">
               <a:extLst>
                 <a:ext uri="{FF2B5EF4-FFF2-40B4-BE49-F238E27FC236}">
                   <a16:creationId xmlns:a16="http://schemas.microsoft.com/office/drawing/2014/main" id="{723271D6-A958-755E-62A2-FB16420B423D}"/>
@@ -8612,30 +8800,48 @@
             <a:p>
               <a:pPr algn="ctr"/>
               <a:r>
-                <a:rPr kumimoji="0" lang="ja-JP" altLang="en-US" sz="498" b="1" kern="0">
+                <a:rPr kumimoji="0" lang="ja-JP" altLang="en-US" sz="498" b="1" i="0" u="none" strike="noStrike" kern="0" cap="none" spc="0" normalizeH="0" baseline="0">
+                  <a:ln>
+                    <a:noFill/>
+                  </a:ln>
                   <a:solidFill>
                     <a:srgbClr val="111111"/>
                   </a:solidFill>
+                  <a:effectLst/>
+                  <a:uLnTx/>
+                  <a:uFillTx/>
                   <a:latin typeface="Meiryo UI"/>
                   <a:ea typeface="Meiryo UI"/>
                 </a:rPr>
-                <a:t>(2) 設定サービス
+                <a:t>1.2 設定サービス
 </a:t>
               </a:r>
               <a:r>
-                <a:rPr kumimoji="0" lang="en-US" altLang="ja-JP" sz="498" b="1" kern="0">
+                <a:rPr kumimoji="0" lang="en-US" altLang="ja-JP" sz="498" b="1" i="0" u="none" strike="noStrike" kern="0" cap="none" spc="0" normalizeH="0" baseline="0">
+                  <a:ln>
+                    <a:noFill/>
+                  </a:ln>
                   <a:solidFill>
                     <a:srgbClr val="111111"/>
                   </a:solidFill>
+                  <a:effectLst/>
+                  <a:uLnTx/>
+                  <a:uFillTx/>
                   <a:latin typeface="Meiryo UI"/>
                   <a:ea typeface="Meiryo UI"/>
                 </a:rPr>
                 <a:t>DeviceControllerConfigService</a:t>
               </a:r>
-              <a:endParaRPr kumimoji="0" lang="ja-JP" altLang="en-US" sz="317" kern="0">
+              <a:endParaRPr kumimoji="0" lang="ja-JP" altLang="en-US" sz="317" i="0" u="none" strike="noStrike" kern="0" cap="none" spc="0" normalizeH="0" baseline="0">
+                <a:ln>
+                  <a:noFill/>
+                </a:ln>
                 <a:solidFill>
                   <a:srgbClr val="111111"/>
                 </a:solidFill>
+                <a:effectLst/>
+                <a:uLnTx/>
+                <a:uFillTx/>
                 <a:latin typeface="Meiryo UI" panose="020B0604030504040204" pitchFamily="50" charset="-128"/>
                 <a:ea typeface="Meiryo UI" panose="020B0604030504040204" pitchFamily="50" charset="-128"/>
               </a:endParaRPr>
@@ -8644,7 +8850,7 @@
         </p:sp>
         <p:sp>
           <p:nvSpPr>
-            <p:cNvPr id="8" name="shape_d61_CONFIG_DOMAIN_MANAGER" title="① デバイスマネージャー DeviceManager">
+            <p:cNvPr id="33" name="shape_d61_CONFIG_DOMAIN_MANAGER" title="① デバイスマネージャー DeviceManager">
               <a:extLst>
                 <a:ext uri="{FF2B5EF4-FFF2-40B4-BE49-F238E27FC236}">
                   <a16:creationId xmlns:a16="http://schemas.microsoft.com/office/drawing/2014/main" id="{5A499871-D40D-8894-76CA-B0CEAA57C817}"/>
@@ -8656,8 +8862,8 @@
           </p:nvSpPr>
           <p:spPr>
             <a:xfrm>
-              <a:off x="210659" y="1029268"/>
-              <a:ext cx="3129331" cy="431403"/>
+              <a:off x="210658" y="954654"/>
+              <a:ext cx="3129330" cy="580629"/>
             </a:xfrm>
             <a:prstGeom prst="roundRect">
               <a:avLst/>
@@ -8793,30 +8999,48 @@
             <a:p>
               <a:pPr algn="ctr"/>
               <a:r>
-                <a:rPr kumimoji="0" lang="ja-JP" altLang="en-US" sz="498" b="1" kern="0">
+                <a:rPr kumimoji="0" lang="ja-JP" altLang="en-US" sz="498" b="1" i="0" u="none" strike="noStrike" kern="0" cap="none" spc="0" normalizeH="0" baseline="0">
+                  <a:ln>
+                    <a:noFill/>
+                  </a:ln>
                   <a:solidFill>
                     <a:srgbClr val="111111"/>
                   </a:solidFill>
+                  <a:effectLst/>
+                  <a:uLnTx/>
+                  <a:uFillTx/>
                   <a:latin typeface="Meiryo UI"/>
                   <a:ea typeface="Meiryo UI"/>
                 </a:rPr>
-                <a:t>(1) デバイスマネージャー
+                <a:t>1.1 デバイスマネージャー
 </a:t>
               </a:r>
               <a:r>
-                <a:rPr kumimoji="0" lang="en-US" altLang="ja-JP" sz="498" b="1" kern="0">
+                <a:rPr kumimoji="0" lang="en-US" altLang="ja-JP" sz="498" b="1" i="0" u="none" strike="noStrike" kern="0" cap="none" spc="0" normalizeH="0" baseline="0">
+                  <a:ln>
+                    <a:noFill/>
+                  </a:ln>
                   <a:solidFill>
                     <a:srgbClr val="111111"/>
                   </a:solidFill>
+                  <a:effectLst/>
+                  <a:uLnTx/>
+                  <a:uFillTx/>
                   <a:latin typeface="Meiryo UI"/>
                   <a:ea typeface="Meiryo UI"/>
                 </a:rPr>
                 <a:t>DeviceManager</a:t>
               </a:r>
-              <a:endParaRPr kumimoji="0" lang="ja-JP" altLang="en-US" sz="498" b="1" kern="0">
+              <a:endParaRPr kumimoji="0" lang="ja-JP" altLang="en-US" sz="498" b="1" i="0" u="none" strike="noStrike" kern="0" cap="none" spc="0" normalizeH="0" baseline="0">
+                <a:ln>
+                  <a:noFill/>
+                </a:ln>
                 <a:solidFill>
                   <a:srgbClr val="111111"/>
                 </a:solidFill>
+                <a:effectLst/>
+                <a:uLnTx/>
+                <a:uFillTx/>
                 <a:latin typeface="Meiryo UI"/>
                 <a:ea typeface="Meiryo UI"/>
               </a:endParaRPr>
@@ -8825,7 +9049,7 @@
         </p:sp>
         <p:sp>
           <p:nvSpPr>
-            <p:cNvPr id="9" name="shape_d61_CONFIG_DOMAIN_ACTIVE" title="⑥ 有効デバイス ActiveDevice">
+            <p:cNvPr id="34" name="shape_d61_CONFIG_DOMAIN_ACTIVE" title="⑥ 有効デバイス ActiveDevice">
               <a:extLst>
                 <a:ext uri="{FF2B5EF4-FFF2-40B4-BE49-F238E27FC236}">
                   <a16:creationId xmlns:a16="http://schemas.microsoft.com/office/drawing/2014/main" id="{34215BF5-31C6-DC21-C538-ABFC964F5BB7}"/>
@@ -8837,8 +9061,8 @@
           </p:nvSpPr>
           <p:spPr>
             <a:xfrm>
-              <a:off x="16329375" y="2151307"/>
-              <a:ext cx="3015010" cy="431403"/>
+              <a:off x="16329375" y="1941006"/>
+              <a:ext cx="3015011" cy="852008"/>
             </a:xfrm>
             <a:prstGeom prst="roundRect">
               <a:avLst/>
@@ -8974,30 +9198,48 @@
             <a:p>
               <a:pPr algn="ctr"/>
               <a:r>
-                <a:rPr kumimoji="0" lang="ja-JP" altLang="en-US" sz="498" b="1" kern="0">
+                <a:rPr kumimoji="0" lang="ja-JP" altLang="en-US" sz="498" b="1" i="0" u="none" strike="noStrike" kern="0" cap="none" spc="0" normalizeH="0" baseline="0">
+                  <a:ln>
+                    <a:noFill/>
+                  </a:ln>
                   <a:solidFill>
                     <a:srgbClr val="111111"/>
                   </a:solidFill>
+                  <a:effectLst/>
+                  <a:uLnTx/>
+                  <a:uFillTx/>
                   <a:latin typeface="Meiryo UI"/>
                   <a:ea typeface="Meiryo UI"/>
                 </a:rPr>
-                <a:t>(6) 有効デバイス
+                <a:t>1.6 有効デバイス
 </a:t>
               </a:r>
               <a:r>
-                <a:rPr kumimoji="0" lang="en-US" altLang="ja-JP" sz="498" b="1" kern="0">
+                <a:rPr kumimoji="0" lang="en-US" altLang="ja-JP" sz="498" b="1" i="0" u="none" strike="noStrike" kern="0" cap="none" spc="0" normalizeH="0" baseline="0">
+                  <a:ln>
+                    <a:noFill/>
+                  </a:ln>
                   <a:solidFill>
                     <a:srgbClr val="111111"/>
                   </a:solidFill>
+                  <a:effectLst/>
+                  <a:uLnTx/>
+                  <a:uFillTx/>
                   <a:latin typeface="Meiryo UI"/>
                   <a:ea typeface="Meiryo UI"/>
                 </a:rPr>
                 <a:t>ActiveDevice</a:t>
               </a:r>
-              <a:endParaRPr kumimoji="0" lang="ja-JP" altLang="en-US" sz="498" b="1" kern="0">
+              <a:endParaRPr kumimoji="0" lang="ja-JP" altLang="en-US" sz="498" b="1" i="0" u="none" strike="noStrike" kern="0" cap="none" spc="0" normalizeH="0" baseline="0">
+                <a:ln>
+                  <a:noFill/>
+                </a:ln>
                 <a:solidFill>
                   <a:srgbClr val="111111"/>
                 </a:solidFill>
+                <a:effectLst/>
+                <a:uLnTx/>
+                <a:uFillTx/>
                 <a:latin typeface="Meiryo UI"/>
                 <a:ea typeface="Meiryo UI"/>
               </a:endParaRPr>
@@ -9006,7 +9248,7 @@
         </p:sp>
         <p:sp>
           <p:nvSpPr>
-            <p:cNvPr id="10" name="shape_d61_CONFIG_DOMAIN_SPEC" title="⑦ デバイス仕様 DeviceSpec">
+            <p:cNvPr id="35" name="shape_d61_CONFIG_DOMAIN_SPEC" title="⑦ デバイス仕様 DeviceSpec">
               <a:extLst>
                 <a:ext uri="{FF2B5EF4-FFF2-40B4-BE49-F238E27FC236}">
                   <a16:creationId xmlns:a16="http://schemas.microsoft.com/office/drawing/2014/main" id="{8054943E-11A1-9D0A-EE31-4197E2812709}"/>
@@ -9018,8 +9260,8 @@
           </p:nvSpPr>
           <p:spPr>
             <a:xfrm>
-              <a:off x="15364547" y="4189961"/>
-              <a:ext cx="3009159" cy="431403"/>
+              <a:off x="15364547" y="3986143"/>
+              <a:ext cx="3009159" cy="839041"/>
             </a:xfrm>
             <a:prstGeom prst="roundRect">
               <a:avLst/>
@@ -9155,30 +9397,48 @@
             <a:p>
               <a:pPr algn="ctr"/>
               <a:r>
-                <a:rPr kumimoji="0" lang="ja-JP" altLang="en-US" sz="498" b="1" kern="0">
+                <a:rPr kumimoji="0" lang="ja-JP" altLang="en-US" sz="498" b="1" i="0" u="none" strike="noStrike" kern="0" cap="none" spc="0" normalizeH="0" baseline="0">
+                  <a:ln>
+                    <a:noFill/>
+                  </a:ln>
                   <a:solidFill>
                     <a:srgbClr val="111111"/>
                   </a:solidFill>
+                  <a:effectLst/>
+                  <a:uLnTx/>
+                  <a:uFillTx/>
                   <a:latin typeface="Meiryo UI"/>
                   <a:ea typeface="Meiryo UI"/>
                 </a:rPr>
-                <a:t>(7) デバイス仕様
+                <a:t>1.7 デバイス仕様
 </a:t>
               </a:r>
               <a:r>
-                <a:rPr kumimoji="0" lang="en-US" altLang="ja-JP" sz="498" b="1" kern="0">
+                <a:rPr kumimoji="0" lang="en-US" altLang="ja-JP" sz="498" b="1" i="0" u="none" strike="noStrike" kern="0" cap="none" spc="0" normalizeH="0" baseline="0">
+                  <a:ln>
+                    <a:noFill/>
+                  </a:ln>
                   <a:solidFill>
                     <a:srgbClr val="111111"/>
                   </a:solidFill>
+                  <a:effectLst/>
+                  <a:uLnTx/>
+                  <a:uFillTx/>
                   <a:latin typeface="Meiryo UI"/>
                   <a:ea typeface="Meiryo UI"/>
                 </a:rPr>
                 <a:t>DeviceSpec</a:t>
               </a:r>
-              <a:endParaRPr kumimoji="0" lang="ja-JP" altLang="en-US" sz="498" b="1" kern="0">
+              <a:endParaRPr kumimoji="0" lang="ja-JP" altLang="en-US" sz="498" b="1" i="0" u="none" strike="noStrike" kern="0" cap="none" spc="0" normalizeH="0" baseline="0">
+                <a:ln>
+                  <a:noFill/>
+                </a:ln>
                 <a:solidFill>
                   <a:srgbClr val="111111"/>
                 </a:solidFill>
+                <a:effectLst/>
+                <a:uLnTx/>
+                <a:uFillTx/>
                 <a:latin typeface="Meiryo UI"/>
                 <a:ea typeface="Meiryo UI"/>
               </a:endParaRPr>
@@ -9187,7 +9447,7 @@
         </p:sp>
         <p:sp>
           <p:nvSpPr>
-            <p:cNvPr id="11" name="shape_d61_CONFIG_DOMAIN_MODEL" title="⑤ 設定モデル DeviceConfig">
+            <p:cNvPr id="36" name="shape_d61_CONFIG_DOMAIN_MODEL" title="⑤ 設定モデル DeviceConfig">
               <a:extLst>
                 <a:ext uri="{FF2B5EF4-FFF2-40B4-BE49-F238E27FC236}">
                   <a16:creationId xmlns:a16="http://schemas.microsoft.com/office/drawing/2014/main" id="{D87A44B2-69D1-3653-206E-8F40209FDCFF}"/>
@@ -9199,8 +9459,8 @@
           </p:nvSpPr>
           <p:spPr>
             <a:xfrm>
-              <a:off x="12386222" y="2135777"/>
-              <a:ext cx="2561434" cy="431403"/>
+              <a:off x="12386223" y="1934251"/>
+              <a:ext cx="2561434" cy="834453"/>
             </a:xfrm>
             <a:prstGeom prst="roundRect">
               <a:avLst/>
@@ -9336,30 +9596,48 @@
             <a:p>
               <a:pPr algn="ctr"/>
               <a:r>
-                <a:rPr kumimoji="0" lang="ja-JP" altLang="en-US" sz="498" b="1" kern="0">
+                <a:rPr kumimoji="0" lang="ja-JP" altLang="en-US" sz="498" b="1" i="0" u="none" strike="noStrike" kern="0" cap="none" spc="0" normalizeH="0" baseline="0">
+                  <a:ln>
+                    <a:noFill/>
+                  </a:ln>
                   <a:solidFill>
                     <a:srgbClr val="111111"/>
                   </a:solidFill>
+                  <a:effectLst/>
+                  <a:uLnTx/>
+                  <a:uFillTx/>
                   <a:latin typeface="Meiryo UI"/>
                   <a:ea typeface="Meiryo UI"/>
                 </a:rPr>
-                <a:t>(5) 設定モデル
+                <a:t>1.5 設定モデル
 </a:t>
               </a:r>
               <a:r>
-                <a:rPr kumimoji="0" lang="en-US" altLang="ja-JP" sz="498" b="1" kern="0">
+                <a:rPr kumimoji="0" lang="en-US" altLang="ja-JP" sz="498" b="1" i="0" u="none" strike="noStrike" kern="0" cap="none" spc="0" normalizeH="0" baseline="0">
+                  <a:ln>
+                    <a:noFill/>
+                  </a:ln>
                   <a:solidFill>
                     <a:srgbClr val="111111"/>
                   </a:solidFill>
+                  <a:effectLst/>
+                  <a:uLnTx/>
+                  <a:uFillTx/>
                   <a:latin typeface="Meiryo UI"/>
                   <a:ea typeface="Meiryo UI"/>
                 </a:rPr>
                 <a:t>DeviceConfig</a:t>
               </a:r>
-              <a:endParaRPr kumimoji="0" lang="ja-JP" altLang="en-US" sz="498" b="1" kern="0">
+              <a:endParaRPr kumimoji="0" lang="ja-JP" altLang="en-US" sz="498" b="1" i="0" u="none" strike="noStrike" kern="0" cap="none" spc="0" normalizeH="0" baseline="0">
+                <a:ln>
+                  <a:noFill/>
+                </a:ln>
                 <a:solidFill>
                   <a:srgbClr val="111111"/>
                 </a:solidFill>
+                <a:effectLst/>
+                <a:uLnTx/>
+                <a:uFillTx/>
                 <a:latin typeface="Meiryo UI"/>
                 <a:ea typeface="Meiryo UI"/>
               </a:endParaRPr>
@@ -9368,7 +9646,7 @@
         </p:sp>
         <p:cxnSp>
           <p:nvCxnSpPr>
-            <p:cNvPr id="12" name="edge_d61_01_CONFIG_DOMAIN_MANAGER_to_CONFIG_DOMAIN_CONFIG" descr="初期化・保存を委譲" title="初期化・保存を委譲">
+            <p:cNvPr id="37" name="edge_d61_01_CONFIG_DOMAIN_MANAGER_to_CONFIG_DOMAIN_CONFIG" descr="初期化・保存を委譲" title="初期化・保存を委譲">
               <a:extLst>
                 <a:ext uri="{FF2B5EF4-FFF2-40B4-BE49-F238E27FC236}">
                   <a16:creationId xmlns:a16="http://schemas.microsoft.com/office/drawing/2014/main" id="{1CDFAFCA-0D53-1666-A18B-49E1067CCF46}"/>
@@ -9377,15 +9655,15 @@
             </p:cNvPr>
             <p:cNvCxnSpPr>
               <a:cxnSpLocks/>
-              <a:stCxn id="8" idx="3"/>
-              <a:endCxn id="7" idx="1"/>
+              <a:stCxn id="33" idx="3"/>
+              <a:endCxn id="32" idx="1"/>
             </p:cNvCxnSpPr>
             <p:nvPr/>
           </p:nvCxnSpPr>
           <p:spPr>
             <a:xfrm>
               <a:off x="3339989" y="1244970"/>
-              <a:ext cx="1836538" cy="2297"/>
+              <a:ext cx="1836538" cy="2295"/>
             </a:xfrm>
             <a:prstGeom prst="straightConnector1">
               <a:avLst/>
@@ -9417,7 +9695,7 @@
         </p:cxnSp>
         <p:cxnSp>
           <p:nvCxnSpPr>
-            <p:cNvPr id="13" name="edge_d61_02_CONFIG_DOMAIN_CONFIG_to_CONFIG_DOMAIN_RUNTIME" descr="優先読込・保存" title="優先読込・保存">
+            <p:cNvPr id="38" name="edge_d61_02_CONFIG_DOMAIN_CONFIG_to_CONFIG_DOMAIN_RUNTIME" descr="優先読込・保存" title="優先読込・保存">
               <a:extLst>
                 <a:ext uri="{FF2B5EF4-FFF2-40B4-BE49-F238E27FC236}">
                   <a16:creationId xmlns:a16="http://schemas.microsoft.com/office/drawing/2014/main" id="{4EF3AE53-659E-7022-9775-C32278BE0EDC}"/>
@@ -9426,8 +9704,8 @@
             </p:cNvPr>
             <p:cNvCxnSpPr>
               <a:cxnSpLocks/>
-              <a:stCxn id="7" idx="2"/>
-              <a:endCxn id="6" idx="1"/>
+              <a:stCxn id="32" idx="2"/>
+              <a:endCxn id="31" idx="1"/>
             </p:cNvCxnSpPr>
             <p:nvPr/>
           </p:nvCxnSpPr>
@@ -9467,7 +9745,7 @@
         </p:cxnSp>
         <p:cxnSp>
           <p:nvCxnSpPr>
-            <p:cNvPr id="14" name="edge_d61_03_CONFIG_DOMAIN_CONFIG_to_CONFIG_DOMAIN_DEFAULT" descr="フォールバック" title="フォールバック">
+            <p:cNvPr id="39" name="edge_d61_03_CONFIG_DOMAIN_CONFIG_to_CONFIG_DOMAIN_DEFAULT" descr="フォールバック" title="フォールバック">
               <a:extLst>
                 <a:ext uri="{FF2B5EF4-FFF2-40B4-BE49-F238E27FC236}">
                   <a16:creationId xmlns:a16="http://schemas.microsoft.com/office/drawing/2014/main" id="{5B45736B-C7A5-6E0C-7B19-A8696FA571C9}"/>
@@ -9476,8 +9754,8 @@
             </p:cNvPr>
             <p:cNvCxnSpPr>
               <a:cxnSpLocks/>
-              <a:stCxn id="7" idx="3"/>
-              <a:endCxn id="5" idx="1"/>
+              <a:stCxn id="32" idx="3"/>
+              <a:endCxn id="30" idx="1"/>
             </p:cNvCxnSpPr>
             <p:nvPr/>
           </p:nvCxnSpPr>
@@ -9519,7 +9797,7 @@
         </p:cxnSp>
         <p:cxnSp>
           <p:nvCxnSpPr>
-            <p:cNvPr id="15" name="edge_d61_04_CONFIG_DOMAIN_CONFIG_to_CONFIG_DOMAIN_MODEL" descr="デシリアライズ" title="デシリアライズ">
+            <p:cNvPr id="40" name="edge_d61_04_CONFIG_DOMAIN_CONFIG_to_CONFIG_DOMAIN_MODEL" descr="デシリアライズ" title="デシリアライズ">
               <a:extLst>
                 <a:ext uri="{FF2B5EF4-FFF2-40B4-BE49-F238E27FC236}">
                   <a16:creationId xmlns:a16="http://schemas.microsoft.com/office/drawing/2014/main" id="{121BA29A-4ED5-ADFA-E0CE-DA2FA5DA61A9}"/>
@@ -9566,7 +9844,7 @@
         </p:cxnSp>
         <p:cxnSp>
           <p:nvCxnSpPr>
-            <p:cNvPr id="16" name="edge_d61_05_CONFIG_DOMAIN_MODEL_to_CONFIG_DOMAIN_ACTIVE" descr="保持" title="保持">
+            <p:cNvPr id="41" name="edge_d61_05_CONFIG_DOMAIN_MODEL_to_CONFIG_DOMAIN_ACTIVE" descr="保持" title="保持">
               <a:extLst>
                 <a:ext uri="{FF2B5EF4-FFF2-40B4-BE49-F238E27FC236}">
                   <a16:creationId xmlns:a16="http://schemas.microsoft.com/office/drawing/2014/main" id="{08045367-542F-AA14-DFF8-89FA6B786929}"/>
@@ -9575,15 +9853,15 @@
             </p:cNvPr>
             <p:cNvCxnSpPr>
               <a:cxnSpLocks/>
-              <a:stCxn id="11" idx="3"/>
-              <a:endCxn id="9" idx="1"/>
+              <a:stCxn id="36" idx="3"/>
+              <a:endCxn id="34" idx="1"/>
             </p:cNvCxnSpPr>
             <p:nvPr/>
           </p:nvCxnSpPr>
           <p:spPr>
             <a:xfrm>
-              <a:off x="14947656" y="2351479"/>
-              <a:ext cx="1381719" cy="15530"/>
+              <a:off x="14947656" y="2351480"/>
+              <a:ext cx="1381719" cy="15531"/>
             </a:xfrm>
             <a:prstGeom prst="straightConnector1">
               <a:avLst/>
@@ -9615,7 +9893,7 @@
         </p:cxnSp>
         <p:cxnSp>
           <p:nvCxnSpPr>
-            <p:cNvPr id="17" name="edge_d61_06_CONFIG_DOMAIN_MODEL_to_CONFIG_DOMAIN_SPEC" descr="保持" title="保持">
+            <p:cNvPr id="42" name="edge_d61_06_CONFIG_DOMAIN_MODEL_to_CONFIG_DOMAIN_SPEC" descr="保持" title="保持">
               <a:extLst>
                 <a:ext uri="{FF2B5EF4-FFF2-40B4-BE49-F238E27FC236}">
                   <a16:creationId xmlns:a16="http://schemas.microsoft.com/office/drawing/2014/main" id="{D759B095-2DB3-DD58-A219-575EE08D60A3}"/>
@@ -9624,15 +9902,15 @@
             </p:cNvPr>
             <p:cNvCxnSpPr>
               <a:cxnSpLocks/>
-              <a:stCxn id="11" idx="2"/>
-              <a:endCxn id="10" idx="1"/>
+              <a:stCxn id="36" idx="2"/>
+              <a:endCxn id="35" idx="1"/>
             </p:cNvCxnSpPr>
             <p:nvPr/>
           </p:nvCxnSpPr>
           <p:spPr>
             <a:xfrm rot="16200000" flipH="1">
-              <a:off x="13596501" y="2637617"/>
-              <a:ext cx="1838484" cy="1697608"/>
+              <a:off x="13697264" y="2738380"/>
+              <a:ext cx="1636960" cy="1697608"/>
             </a:xfrm>
             <a:prstGeom prst="bentConnector2">
               <a:avLst/>
@@ -9664,7 +9942,7 @@
         </p:cxnSp>
         <p:sp>
           <p:nvSpPr>
-            <p:cNvPr id="18" name="edge_label_d61_01_CONFIG_DOMAIN_MANAGER_to_CONFIG_DOMAIN_CONFIG" descr="初期化・保存を委譲" title="初期化・保存を委譲">
+            <p:cNvPr id="43" name="edge_label_d61_01_CONFIG_DOMAIN_MANAGER_to_CONFIG_DOMAIN_CONFIG" descr="初期化・保存を委譲" title="初期化・保存を委譲">
               <a:extLst>
                 <a:ext uri="{FF2B5EF4-FFF2-40B4-BE49-F238E27FC236}">
                   <a16:creationId xmlns:a16="http://schemas.microsoft.com/office/drawing/2014/main" id="{C7CCA05B-DA0F-8977-3E8D-A201B09B660E}"/>
@@ -9676,8 +9954,8 @@
           </p:nvSpPr>
           <p:spPr>
             <a:xfrm>
-              <a:off x="3720156" y="1134073"/>
-              <a:ext cx="1144944" cy="166682"/>
+              <a:off x="3720156" y="1105404"/>
+              <a:ext cx="1144945" cy="224020"/>
             </a:xfrm>
             <a:prstGeom prst="rect">
               <a:avLst/>
@@ -9793,10 +10071,16 @@
             <a:p>
               <a:pPr algn="ctr"/>
               <a:r>
-                <a:rPr kumimoji="0" lang="ja-JP" altLang="en-US" sz="449" kern="0">
+                <a:rPr kumimoji="0" lang="ja-JP" altLang="en-US" sz="449" b="0" i="0" u="none" strike="noStrike" kern="0" cap="none" spc="0" normalizeH="0" baseline="0">
+                  <a:ln>
+                    <a:noFill/>
+                  </a:ln>
                   <a:solidFill>
                     <a:srgbClr val="111111"/>
                   </a:solidFill>
+                  <a:effectLst/>
+                  <a:uLnTx/>
+                  <a:uFillTx/>
                   <a:latin typeface="Meiryo UI"/>
                   <a:ea typeface="Meiryo UI"/>
                 </a:rPr>
@@ -9807,7 +10091,7 @@
         </p:sp>
         <p:sp>
           <p:nvSpPr>
-            <p:cNvPr id="19" name="edge_label_d61_02_CONFIG_DOMAIN_CONFIG_to_CONFIG_DOMAIN_RUNTIME" descr="優先読込・保存" title="優先読込・保存">
+            <p:cNvPr id="44" name="edge_label_d61_02_CONFIG_DOMAIN_CONFIG_to_CONFIG_DOMAIN_RUNTIME" descr="優先読込・保存" title="優先読込・保存">
               <a:extLst>
                 <a:ext uri="{FF2B5EF4-FFF2-40B4-BE49-F238E27FC236}">
                   <a16:creationId xmlns:a16="http://schemas.microsoft.com/office/drawing/2014/main" id="{F7394DE4-DC73-E2E2-EB7C-3FD20D8B8B78}"/>
@@ -9936,10 +10220,16 @@
             <a:p>
               <a:pPr algn="ctr"/>
               <a:r>
-                <a:rPr kumimoji="0" lang="ja-JP" altLang="en-US" sz="438" kern="0">
+                <a:rPr kumimoji="0" lang="ja-JP" altLang="en-US" sz="438" i="0" u="none" strike="noStrike" kern="0" cap="none" spc="0" normalizeH="0" baseline="0">
+                  <a:ln>
+                    <a:noFill/>
+                  </a:ln>
                   <a:solidFill>
                     <a:srgbClr val="111111"/>
                   </a:solidFill>
+                  <a:effectLst/>
+                  <a:uLnTx/>
+                  <a:uFillTx/>
                   <a:latin typeface="Meiryo UI" panose="020B0604030504040204" pitchFamily="50" charset="-128"/>
                   <a:ea typeface="Meiryo UI" panose="020B0604030504040204" pitchFamily="50" charset="-128"/>
                 </a:rPr>
@@ -9950,7 +10240,7 @@
         </p:sp>
         <p:sp>
           <p:nvSpPr>
-            <p:cNvPr id="20" name="edge_label_d61_03_CONFIG_DOMAIN_CONFIG_to_CONFIG_DOMAIN_DEFAULT" descr="フォールバック" title="フォールバック">
+            <p:cNvPr id="45" name="edge_label_d61_03_CONFIG_DOMAIN_CONFIG_to_CONFIG_DOMAIN_DEFAULT" descr="フォールバック" title="フォールバック">
               <a:extLst>
                 <a:ext uri="{FF2B5EF4-FFF2-40B4-BE49-F238E27FC236}">
                   <a16:creationId xmlns:a16="http://schemas.microsoft.com/office/drawing/2014/main" id="{8F52D634-5111-E625-C1C1-4DBA136554BB}"/>
@@ -10079,40 +10369,64 @@
             <a:p>
               <a:pPr algn="ctr"/>
               <a:r>
-                <a:rPr kumimoji="0" lang="en-US" altLang="ja-JP" sz="438" kern="0">
+                <a:rPr kumimoji="0" lang="en-US" altLang="ja-JP" sz="438" b="0" i="0" u="none" strike="noStrike" kern="0" cap="none" spc="0" normalizeH="0" baseline="0">
+                  <a:ln>
+                    <a:noFill/>
+                  </a:ln>
                   <a:solidFill>
                     <a:srgbClr val="111111"/>
                   </a:solidFill>
+                  <a:effectLst/>
+                  <a:uLnTx/>
+                  <a:uFillTx/>
                   <a:latin typeface="Meiryo UI"/>
                   <a:ea typeface="Meiryo UI"/>
                 </a:rPr>
                 <a:t>JSON</a:t>
               </a:r>
               <a:r>
-                <a:rPr kumimoji="0" lang="ja-JP" altLang="en-US" sz="438" kern="0">
+                <a:rPr kumimoji="0" lang="ja-JP" altLang="en-US" sz="438" b="0" i="0" u="none" strike="noStrike" kern="0" cap="none" spc="0" normalizeH="0" baseline="0">
+                  <a:ln>
+                    <a:noFill/>
+                  </a:ln>
                   <a:solidFill>
                     <a:srgbClr val="111111"/>
                   </a:solidFill>
+                  <a:effectLst/>
+                  <a:uLnTx/>
+                  <a:uFillTx/>
                   <a:latin typeface="Meiryo UI"/>
                   <a:ea typeface="Meiryo UI"/>
                 </a:rPr>
                 <a:t>・</a:t>
               </a:r>
               <a:r>
-                <a:rPr kumimoji="0" lang="en-US" altLang="ja-JP" sz="438" kern="0">
+                <a:rPr kumimoji="0" lang="en-US" altLang="ja-JP" sz="438" b="0" i="0" u="none" strike="noStrike" kern="0" cap="none" spc="0" normalizeH="0" baseline="0">
+                  <a:ln>
+                    <a:noFill/>
+                  </a:ln>
                   <a:solidFill>
                     <a:srgbClr val="111111"/>
                   </a:solidFill>
+                  <a:effectLst/>
+                  <a:uLnTx/>
+                  <a:uFillTx/>
                   <a:latin typeface="Meiryo UI"/>
                   <a:ea typeface="Meiryo UI"/>
                 </a:rPr>
                 <a:t>DB</a:t>
               </a:r>
               <a:r>
-                <a:rPr kumimoji="0" lang="ja-JP" altLang="en-US" sz="438" kern="0">
+                <a:rPr kumimoji="0" lang="ja-JP" altLang="en-US" sz="438" b="0" i="0" u="none" strike="noStrike" kern="0" cap="none" spc="0" normalizeH="0" baseline="0">
+                  <a:ln>
+                    <a:noFill/>
+                  </a:ln>
                   <a:solidFill>
                     <a:srgbClr val="111111"/>
                   </a:solidFill>
+                  <a:effectLst/>
+                  <a:uLnTx/>
+                  <a:uFillTx/>
                   <a:latin typeface="Meiryo UI"/>
                   <a:ea typeface="Meiryo UI"/>
                 </a:rPr>
@@ -10123,7 +10437,7 @@
         </p:sp>
         <p:sp>
           <p:nvSpPr>
-            <p:cNvPr id="21" name="edge_label_d61_04_CONFIG_DOMAIN_CONFIG_to_CONFIG_DOMAIN_MODEL" descr="デシリアライズ" title="デシリアライズ">
+            <p:cNvPr id="46" name="edge_label_d61_04_CONFIG_DOMAIN_CONFIG_to_CONFIG_DOMAIN_MODEL" descr="デシリアライズ" title="デシリアライズ">
               <a:extLst>
                 <a:ext uri="{FF2B5EF4-FFF2-40B4-BE49-F238E27FC236}">
                   <a16:creationId xmlns:a16="http://schemas.microsoft.com/office/drawing/2014/main" id="{EE38E5AE-8DD0-5485-4001-0F288CA1A4CB}"/>
@@ -10252,10 +10566,16 @@
             <a:p>
               <a:pPr algn="ctr"/>
               <a:r>
-                <a:rPr kumimoji="0" lang="ja-JP" altLang="en-US" sz="438" kern="0">
+                <a:rPr kumimoji="0" lang="ja-JP" altLang="en-US" sz="438" b="0" i="0" u="none" strike="noStrike" kern="0" cap="none" spc="0" normalizeH="0" baseline="0">
+                  <a:ln>
+                    <a:noFill/>
+                  </a:ln>
                   <a:solidFill>
                     <a:srgbClr val="111111"/>
                   </a:solidFill>
+                  <a:effectLst/>
+                  <a:uLnTx/>
+                  <a:uFillTx/>
                   <a:latin typeface="Meiryo UI"/>
                   <a:ea typeface="Meiryo UI"/>
                 </a:rPr>
@@ -10266,7 +10586,7 @@
         </p:sp>
         <p:sp>
           <p:nvSpPr>
-            <p:cNvPr id="22" name="edge_label_d61_05_CONFIG_DOMAIN_MODEL_to_CONFIG_DOMAIN_ACTIVE" descr="保持" title="保持">
+            <p:cNvPr id="47" name="edge_label_d61_05_CONFIG_DOMAIN_MODEL_to_CONFIG_DOMAIN_ACTIVE" descr="保持" title="保持">
               <a:extLst>
                 <a:ext uri="{FF2B5EF4-FFF2-40B4-BE49-F238E27FC236}">
                   <a16:creationId xmlns:a16="http://schemas.microsoft.com/office/drawing/2014/main" id="{46D4657A-866C-1EF4-D27F-CD9F62E7389B}"/>
@@ -10278,8 +10598,8 @@
           </p:nvSpPr>
           <p:spPr>
             <a:xfrm>
-              <a:off x="15450614" y="2274441"/>
-              <a:ext cx="646583" cy="166682"/>
+              <a:off x="15450613" y="2251458"/>
+              <a:ext cx="646584" cy="212646"/>
             </a:xfrm>
             <a:prstGeom prst="rect">
               <a:avLst/>
@@ -10395,10 +10715,16 @@
             <a:p>
               <a:pPr algn="ctr"/>
               <a:r>
-                <a:rPr kumimoji="0" lang="ja-JP" altLang="en-US" sz="449" kern="0">
+                <a:rPr kumimoji="0" lang="ja-JP" altLang="en-US" sz="449" b="0" i="0" u="none" strike="noStrike" kern="0" cap="none" spc="0" normalizeH="0" baseline="0">
+                  <a:ln>
+                    <a:noFill/>
+                  </a:ln>
                   <a:solidFill>
                     <a:srgbClr val="111111"/>
                   </a:solidFill>
+                  <a:effectLst/>
+                  <a:uLnTx/>
+                  <a:uFillTx/>
                   <a:latin typeface="Meiryo UI"/>
                   <a:ea typeface="Meiryo UI"/>
                 </a:rPr>
@@ -10409,7 +10735,7 @@
         </p:sp>
         <p:sp>
           <p:nvSpPr>
-            <p:cNvPr id="23" name="edge_label_d61_06_CONFIG_DOMAIN_MODEL_to_CONFIG_DOMAIN_SPEC" descr="保持" title="保持">
+            <p:cNvPr id="48" name="edge_label_d61_06_CONFIG_DOMAIN_MODEL_to_CONFIG_DOMAIN_SPEC" descr="保持" title="保持">
               <a:extLst>
                 <a:ext uri="{FF2B5EF4-FFF2-40B4-BE49-F238E27FC236}">
                   <a16:creationId xmlns:a16="http://schemas.microsoft.com/office/drawing/2014/main" id="{5D620827-8E10-0B3D-4B63-656F90DF4634}"/>
@@ -10421,8 +10747,8 @@
           </p:nvSpPr>
           <p:spPr>
             <a:xfrm>
-              <a:off x="13296917" y="3504818"/>
-              <a:ext cx="638782" cy="166682"/>
+              <a:off x="13296917" y="3479885"/>
+              <a:ext cx="638781" cy="216548"/>
             </a:xfrm>
             <a:prstGeom prst="rect">
               <a:avLst/>
@@ -10538,10 +10864,16 @@
             <a:p>
               <a:pPr algn="ctr"/>
               <a:r>
-                <a:rPr kumimoji="0" lang="ja-JP" altLang="en-US" sz="449" kern="0">
+                <a:rPr kumimoji="0" lang="ja-JP" altLang="en-US" sz="449" b="0" i="0" u="none" strike="noStrike" kern="0" cap="none" spc="0" normalizeH="0" baseline="0">
+                  <a:ln>
+                    <a:noFill/>
+                  </a:ln>
                   <a:solidFill>
                     <a:srgbClr val="111111"/>
                   </a:solidFill>
+                  <a:effectLst/>
+                  <a:uLnTx/>
+                  <a:uFillTx/>
                   <a:latin typeface="Meiryo UI"/>
                   <a:ea typeface="Meiryo UI"/>
                 </a:rPr>
@@ -10552,7 +10884,7 @@
         </p:sp>
         <p:cxnSp>
           <p:nvCxnSpPr>
-            <p:cNvPr id="24" name="edge_d61_07_CONFIG_DOMAIN_CONFIG_to_CONFIG_DOMAIN_DB">
+            <p:cNvPr id="49" name="edge_d61_07_CONFIG_DOMAIN_CONFIG_to_CONFIG_DOMAIN_DB">
               <a:extLst>
                 <a:ext uri="{FF2B5EF4-FFF2-40B4-BE49-F238E27FC236}">
                   <a16:creationId xmlns:a16="http://schemas.microsoft.com/office/drawing/2014/main" id="{079D849E-4B2A-83B4-4B15-03F1F0222764}"/>
@@ -10561,7 +10893,7 @@
             </p:cNvPr>
             <p:cNvCxnSpPr>
               <a:cxnSpLocks/>
-              <a:endCxn id="25" idx="0"/>
+              <a:endCxn id="50" idx="0"/>
             </p:cNvCxnSpPr>
             <p:nvPr/>
           </p:nvCxnSpPr>
@@ -10601,7 +10933,7 @@
         </p:cxnSp>
         <p:sp>
           <p:nvSpPr>
-            <p:cNvPr id="25" name="shape_d61_CONFIG_DOMAIN_DB" title="③ 《設定資源》 ランタイム設定 device_controller_config.json">
+            <p:cNvPr id="50" name="shape_d61_CONFIG_DOMAIN_DB" title="③ 《設定資源》 ランタイム設定 device_controller_config.json">
               <a:extLst>
                 <a:ext uri="{FF2B5EF4-FFF2-40B4-BE49-F238E27FC236}">
                   <a16:creationId xmlns:a16="http://schemas.microsoft.com/office/drawing/2014/main" id="{463E62AE-8FC9-5FE1-BDF5-1EE8D6F34E4E}"/>
@@ -10750,40 +11082,64 @@
             <a:p>
               <a:pPr algn="ctr"/>
               <a:r>
-                <a:rPr kumimoji="0" lang="ja-JP" altLang="en-US" sz="498" b="1" kern="0">
+                <a:rPr kumimoji="0" lang="ja-JP" altLang="en-US" sz="498" b="1" i="0" u="none" strike="noStrike" kern="0" cap="none" spc="0" normalizeH="0" baseline="0">
+                  <a:ln>
+                    <a:noFill/>
+                  </a:ln>
                   <a:solidFill>
                     <a:srgbClr val="111111"/>
                   </a:solidFill>
+                  <a:effectLst/>
+                  <a:uLnTx/>
+                  <a:uFillTx/>
                   <a:latin typeface="Meiryo UI" panose="020B0604030504040204" pitchFamily="50" charset="-128"/>
                   <a:ea typeface="Meiryo UI" panose="020B0604030504040204" pitchFamily="50" charset="-128"/>
                 </a:rPr>
-                <a:t>(8) </a:t>
+                <a:t>1.8 </a:t>
               </a:r>
               <a:r>
-                <a:rPr kumimoji="0" lang="en-US" altLang="ja-JP" sz="498" b="1" kern="0">
+                <a:rPr kumimoji="0" lang="en-US" altLang="ja-JP" sz="498" b="1" i="0" u="none" strike="noStrike" kern="0" cap="none" spc="0" normalizeH="0" baseline="0">
+                  <a:ln>
+                    <a:noFill/>
+                  </a:ln>
                   <a:solidFill>
                     <a:srgbClr val="111111"/>
                   </a:solidFill>
+                  <a:effectLst/>
+                  <a:uLnTx/>
+                  <a:uFillTx/>
                   <a:latin typeface="Meiryo UI" panose="020B0604030504040204" pitchFamily="50" charset="-128"/>
                   <a:ea typeface="Meiryo UI" panose="020B0604030504040204" pitchFamily="50" charset="-128"/>
                 </a:rPr>
                 <a:t>《</a:t>
               </a:r>
               <a:r>
-                <a:rPr kumimoji="0" lang="ja-JP" altLang="en-US" sz="498" b="1" kern="0">
+                <a:rPr kumimoji="0" lang="ja-JP" altLang="en-US" sz="498" b="1" i="0" u="none" strike="noStrike" kern="0" cap="none" spc="0" normalizeH="0" baseline="0">
+                  <a:ln>
+                    <a:noFill/>
+                  </a:ln>
                   <a:solidFill>
                     <a:srgbClr val="111111"/>
                   </a:solidFill>
+                  <a:effectLst/>
+                  <a:uLnTx/>
+                  <a:uFillTx/>
                   <a:latin typeface="Meiryo UI" panose="020B0604030504040204" pitchFamily="50" charset="-128"/>
                   <a:ea typeface="Meiryo UI" panose="020B0604030504040204" pitchFamily="50" charset="-128"/>
                 </a:rPr>
                 <a:t>設定資源</a:t>
               </a:r>
               <a:r>
-                <a:rPr kumimoji="0" lang="en-US" altLang="ja-JP" sz="498" b="1" kern="0">
+                <a:rPr kumimoji="0" lang="en-US" altLang="ja-JP" sz="498" b="1" i="0" u="none" strike="noStrike" kern="0" cap="none" spc="0" normalizeH="0" baseline="0">
+                  <a:ln>
+                    <a:noFill/>
+                  </a:ln>
                   <a:solidFill>
                     <a:srgbClr val="111111"/>
                   </a:solidFill>
+                  <a:effectLst/>
+                  <a:uLnTx/>
+                  <a:uFillTx/>
                   <a:latin typeface="Meiryo UI" panose="020B0604030504040204" pitchFamily="50" charset="-128"/>
                   <a:ea typeface="Meiryo UI" panose="020B0604030504040204" pitchFamily="50" charset="-128"/>
                 </a:rPr>
@@ -10793,20 +11149,32 @@
             <a:p>
               <a:pPr algn="ctr"/>
               <a:r>
-                <a:rPr kumimoji="0" lang="ja-JP" altLang="en-US" sz="498" b="1" kern="0">
+                <a:rPr kumimoji="0" lang="ja-JP" altLang="en-US" sz="498" b="1" i="0" u="none" strike="noStrike" kern="0" cap="none" spc="0" normalizeH="0" baseline="0">
+                  <a:ln>
+                    <a:noFill/>
+                  </a:ln>
                   <a:solidFill>
                     <a:srgbClr val="111111"/>
                   </a:solidFill>
+                  <a:effectLst/>
+                  <a:uLnTx/>
+                  <a:uFillTx/>
                   <a:latin typeface="Meiryo UI" panose="020B0604030504040204" pitchFamily="50" charset="-128"/>
                   <a:ea typeface="Meiryo UI" panose="020B0604030504040204" pitchFamily="50" charset="-128"/>
                 </a:rPr>
                 <a:t>デバイス制御設定</a:t>
               </a:r>
               <a:r>
-                <a:rPr kumimoji="0" lang="en-US" altLang="ja-JP" sz="498" b="1" kern="0">
+                <a:rPr kumimoji="0" lang="en-US" altLang="ja-JP" sz="498" b="1" i="0" u="none" strike="noStrike" kern="0" cap="none" spc="0" normalizeH="0" baseline="0">
+                  <a:ln>
+                    <a:noFill/>
+                  </a:ln>
                   <a:solidFill>
                     <a:srgbClr val="111111"/>
                   </a:solidFill>
+                  <a:effectLst/>
+                  <a:uLnTx/>
+                  <a:uFillTx/>
                   <a:latin typeface="Meiryo UI" panose="020B0604030504040204" pitchFamily="50" charset="-128"/>
                   <a:ea typeface="Meiryo UI" panose="020B0604030504040204" pitchFamily="50" charset="-128"/>
                 </a:rPr>
@@ -10816,19 +11184,31 @@
             <a:p>
               <a:pPr algn="ctr"/>
               <a:r>
-                <a:rPr kumimoji="0" lang="en-US" altLang="ja-JP" sz="498" b="1" kern="0">
+                <a:rPr kumimoji="0" lang="en-US" altLang="ja-JP" sz="498" b="1" i="0" u="none" strike="noStrike" kern="0" cap="none" spc="0" normalizeH="0" baseline="0">
+                  <a:ln>
+                    <a:noFill/>
+                  </a:ln>
                   <a:solidFill>
                     <a:srgbClr val="111111"/>
                   </a:solidFill>
+                  <a:effectLst/>
+                  <a:uLnTx/>
+                  <a:uFillTx/>
                   <a:latin typeface="Meiryo UI" panose="020B0604030504040204" pitchFamily="50" charset="-128"/>
                   <a:ea typeface="Meiryo UI" panose="020B0604030504040204" pitchFamily="50" charset="-128"/>
                 </a:rPr>
                 <a:t>device_controller_config.db</a:t>
               </a:r>
-              <a:endParaRPr kumimoji="0" lang="ja-JP" altLang="en-US" sz="317" kern="0">
+              <a:endParaRPr kumimoji="0" lang="ja-JP" altLang="en-US" sz="317" i="0" u="none" strike="noStrike" kern="0" cap="none" spc="0" normalizeH="0" baseline="0">
+                <a:ln>
+                  <a:noFill/>
+                </a:ln>
                 <a:solidFill>
                   <a:srgbClr val="111111"/>
                 </a:solidFill>
+                <a:effectLst/>
+                <a:uLnTx/>
+                <a:uFillTx/>
                 <a:latin typeface="Meiryo UI" panose="020B0604030504040204" pitchFamily="50" charset="-128"/>
                 <a:ea typeface="Meiryo UI" panose="020B0604030504040204" pitchFamily="50" charset="-128"/>
               </a:endParaRPr>
@@ -10837,7 +11217,7 @@
         </p:sp>
         <p:sp>
           <p:nvSpPr>
-            <p:cNvPr id="26" name="edge_label_d61_07_CONFIG_DOMAIN_CONFIG_to_CONFIG_DOMAIN_DB" descr="優先読込・保存" title="優先読込・保存">
+            <p:cNvPr id="51" name="edge_label_d61_07_CONFIG_DOMAIN_CONFIG_to_CONFIG_DOMAIN_DB" descr="優先読込・保存" title="優先読込・保存">
               <a:extLst>
                 <a:ext uri="{FF2B5EF4-FFF2-40B4-BE49-F238E27FC236}">
                   <a16:creationId xmlns:a16="http://schemas.microsoft.com/office/drawing/2014/main" id="{532A22F6-7FC9-5090-8DFB-009B57711908}"/>
@@ -10966,10 +11346,16 @@
             <a:p>
               <a:pPr algn="ctr"/>
               <a:r>
-                <a:rPr kumimoji="0" lang="ja-JP" altLang="en-US" sz="438" kern="0">
+                <a:rPr kumimoji="0" lang="ja-JP" altLang="en-US" sz="438" i="0" u="none" strike="noStrike" kern="0" cap="none" spc="0" normalizeH="0" baseline="0">
+                  <a:ln>
+                    <a:noFill/>
+                  </a:ln>
                   <a:solidFill>
                     <a:srgbClr val="111111"/>
                   </a:solidFill>
+                  <a:effectLst/>
+                  <a:uLnTx/>
+                  <a:uFillTx/>
                   <a:latin typeface="Meiryo UI" panose="020B0604030504040204" pitchFamily="50" charset="-128"/>
                   <a:ea typeface="Meiryo UI" panose="020B0604030504040204" pitchFamily="50" charset="-128"/>
                 </a:rPr>
@@ -11009,36 +11395,4823 @@
           <a:chExt cx="0" cy="0"/>
         </a:xfrm>
       </p:grpSpPr>
-      <p:pic>
-        <p:nvPicPr>
-          <p:cNvPr id="2" name="図 1">
+      <p:grpSp>
+        <p:nvGrpSpPr>
+          <p:cNvPr id="37" name="グループ化 36">
             <a:extLst>
               <a:ext uri="{FF2B5EF4-FFF2-40B4-BE49-F238E27FC236}">
-                <a16:creationId xmlns:a16="http://schemas.microsoft.com/office/drawing/2014/main" id="{1EADE4F4-2025-C757-DBA6-AF2469FCE968}"/>
+                <a16:creationId xmlns:a16="http://schemas.microsoft.com/office/drawing/2014/main" id="{7D64CADB-DAEB-C6A2-D1C6-B4B7F3DF05CD}"/>
               </a:ext>
             </a:extLst>
           </p:cNvPr>
-          <p:cNvPicPr>
-            <a:picLocks noChangeAspect="1"/>
-          </p:cNvPicPr>
+          <p:cNvGrpSpPr>
+            <a:grpSpLocks noChangeAspect="1"/>
+          </p:cNvGrpSpPr>
           <p:nvPr/>
-        </p:nvPicPr>
-        <p:blipFill>
-          <a:blip r:embed="rId2"/>
-          <a:stretch>
-            <a:fillRect/>
-          </a:stretch>
-        </p:blipFill>
-        <p:spPr>
+        </p:nvGrpSpPr>
+        <p:grpSpPr>
           <a:xfrm>
-            <a:off x="254000" y="254000"/>
-            <a:ext cx="12192000" cy="6602228"/>
+            <a:off x="76200" y="1548334"/>
+            <a:ext cx="12547600" cy="4015333"/>
+            <a:chOff x="1586904" y="2031771"/>
+            <a:chExt cx="9526191" cy="3048458"/>
           </a:xfrm>
-          <a:prstGeom prst="rect">
-            <a:avLst/>
-          </a:prstGeom>
-        </p:spPr>
-      </p:pic>
+        </p:grpSpPr>
+        <p:sp>
+          <p:nvSpPr>
+            <p:cNvPr id="3" name="frame_0">
+              <a:extLst>
+                <a:ext uri="{FF2B5EF4-FFF2-40B4-BE49-F238E27FC236}">
+                  <a16:creationId xmlns:a16="http://schemas.microsoft.com/office/drawing/2014/main" id="{0180590C-A86A-9DE2-CA55-E9AFE8F54EC4}"/>
+                </a:ext>
+              </a:extLst>
+            </p:cNvPr>
+            <p:cNvSpPr/>
+            <p:nvPr/>
+          </p:nvSpPr>
+          <p:spPr>
+            <a:xfrm>
+              <a:off x="1586904" y="2031771"/>
+              <a:ext cx="7305364" cy="3048458"/>
+            </a:xfrm>
+            <a:prstGeom prst="roundRect">
+              <a:avLst>
+                <a:gd name="adj" fmla="val 3000"/>
+              </a:avLst>
+            </a:prstGeom>
+            <a:noFill/>
+            <a:ln w="9941">
+              <a:solidFill>
+                <a:srgbClr val="538135"/>
+              </a:solidFill>
+            </a:ln>
+          </p:spPr>
+          <p:txBody>
+            <a:bodyPr wrap="square"/>
+            <a:lstStyle>
+              <a:defPPr>
+                <a:defRPr lang="en-US"/>
+              </a:defPPr>
+              <a:lvl1pPr marL="0" indent="0" algn="l" defTabSz="457200" rtl="0" eaLnBrk="1" latinLnBrk="0" hangingPunct="1">
+                <a:defRPr sz="1800" kern="1200">
+                  <a:solidFill>
+                    <a:schemeClr val="tx1"/>
+                  </a:solidFill>
+                  <a:latin typeface="+mn-lt"/>
+                  <a:ea typeface="+mn-ea"/>
+                  <a:cs typeface="+mn-cs"/>
+                </a:defRPr>
+              </a:lvl1pPr>
+              <a:lvl2pPr marL="457200" indent="0" algn="l" defTabSz="457200" rtl="0" eaLnBrk="1" latinLnBrk="0" hangingPunct="1">
+                <a:defRPr sz="1800" kern="1200">
+                  <a:solidFill>
+                    <a:schemeClr val="tx1"/>
+                  </a:solidFill>
+                  <a:latin typeface="+mn-lt"/>
+                  <a:ea typeface="+mn-ea"/>
+                  <a:cs typeface="+mn-cs"/>
+                </a:defRPr>
+              </a:lvl2pPr>
+              <a:lvl3pPr marL="914400" indent="0" algn="l" defTabSz="457200" rtl="0" eaLnBrk="1" latinLnBrk="0" hangingPunct="1">
+                <a:defRPr sz="1800" kern="1200">
+                  <a:solidFill>
+                    <a:schemeClr val="tx1"/>
+                  </a:solidFill>
+                  <a:latin typeface="+mn-lt"/>
+                  <a:ea typeface="+mn-ea"/>
+                  <a:cs typeface="+mn-cs"/>
+                </a:defRPr>
+              </a:lvl3pPr>
+              <a:lvl4pPr marL="1371600" indent="0" algn="l" defTabSz="457200" rtl="0" eaLnBrk="1" latinLnBrk="0" hangingPunct="1">
+                <a:defRPr sz="1800" kern="1200">
+                  <a:solidFill>
+                    <a:schemeClr val="tx1"/>
+                  </a:solidFill>
+                  <a:latin typeface="+mn-lt"/>
+                  <a:ea typeface="+mn-ea"/>
+                  <a:cs typeface="+mn-cs"/>
+                </a:defRPr>
+              </a:lvl4pPr>
+              <a:lvl5pPr marL="1828800" indent="0" algn="l" defTabSz="457200" rtl="0" eaLnBrk="1" latinLnBrk="0" hangingPunct="1">
+                <a:defRPr sz="1800" kern="1200">
+                  <a:solidFill>
+                    <a:schemeClr val="tx1"/>
+                  </a:solidFill>
+                  <a:latin typeface="+mn-lt"/>
+                  <a:ea typeface="+mn-ea"/>
+                  <a:cs typeface="+mn-cs"/>
+                </a:defRPr>
+              </a:lvl5pPr>
+              <a:lvl6pPr marL="2286000" indent="0" algn="l" defTabSz="457200" rtl="0" eaLnBrk="1" latinLnBrk="0" hangingPunct="1">
+                <a:defRPr sz="1800" kern="1200">
+                  <a:solidFill>
+                    <a:schemeClr val="tx1"/>
+                  </a:solidFill>
+                  <a:latin typeface="+mn-lt"/>
+                  <a:ea typeface="+mn-ea"/>
+                  <a:cs typeface="+mn-cs"/>
+                </a:defRPr>
+              </a:lvl6pPr>
+              <a:lvl7pPr marL="2743200" indent="0" algn="l" defTabSz="457200" rtl="0" eaLnBrk="1" latinLnBrk="0" hangingPunct="1">
+                <a:defRPr sz="1800" kern="1200">
+                  <a:solidFill>
+                    <a:schemeClr val="tx1"/>
+                  </a:solidFill>
+                  <a:latin typeface="+mn-lt"/>
+                  <a:ea typeface="+mn-ea"/>
+                  <a:cs typeface="+mn-cs"/>
+                </a:defRPr>
+              </a:lvl7pPr>
+              <a:lvl8pPr marL="3200400" indent="0" algn="l" defTabSz="457200" rtl="0" eaLnBrk="1" latinLnBrk="0" hangingPunct="1">
+                <a:defRPr sz="1800" kern="1200">
+                  <a:solidFill>
+                    <a:schemeClr val="tx1"/>
+                  </a:solidFill>
+                  <a:latin typeface="+mn-lt"/>
+                  <a:ea typeface="+mn-ea"/>
+                  <a:cs typeface="+mn-cs"/>
+                </a:defRPr>
+              </a:lvl8pPr>
+              <a:lvl9pPr marL="3657600" indent="0" algn="l" defTabSz="457200" rtl="0" eaLnBrk="1" latinLnBrk="0" hangingPunct="1">
+                <a:defRPr sz="1800" kern="1200">
+                  <a:solidFill>
+                    <a:schemeClr val="tx1"/>
+                  </a:solidFill>
+                  <a:latin typeface="+mn-lt"/>
+                  <a:ea typeface="+mn-ea"/>
+                  <a:cs typeface="+mn-cs"/>
+                </a:defRPr>
+              </a:lvl9pPr>
+            </a:lstStyle>
+            <a:p>
+              <a:endParaRPr lang="ja-JP" altLang="en-US"/>
+            </a:p>
+          </p:txBody>
+        </p:sp>
+        <p:sp>
+          <p:nvSpPr>
+            <p:cNvPr id="4" name="frame_title_0">
+              <a:extLst>
+                <a:ext uri="{FF2B5EF4-FFF2-40B4-BE49-F238E27FC236}">
+                  <a16:creationId xmlns:a16="http://schemas.microsoft.com/office/drawing/2014/main" id="{9ADCD7E1-A3D2-371B-DA4A-7D9B59845D3A}"/>
+                </a:ext>
+              </a:extLst>
+            </p:cNvPr>
+            <p:cNvSpPr/>
+            <p:nvPr/>
+          </p:nvSpPr>
+          <p:spPr>
+            <a:xfrm>
+              <a:off x="4294641" y="2099521"/>
+              <a:ext cx="1891080" cy="150237"/>
+            </a:xfrm>
+            <a:prstGeom prst="rect">
+              <a:avLst/>
+            </a:prstGeom>
+            <a:solidFill>
+              <a:srgbClr val="E2F0D9"/>
+            </a:solidFill>
+            <a:ln w="4260">
+              <a:noFill/>
+            </a:ln>
+          </p:spPr>
+          <p:txBody>
+            <a:bodyPr wrap="square" lIns="16102" tIns="8051" rIns="16102" bIns="8051" anchor="ctr">
+              <a:noAutofit/>
+            </a:bodyPr>
+            <a:lstStyle>
+              <a:defPPr>
+                <a:defRPr lang="en-US"/>
+              </a:defPPr>
+              <a:lvl1pPr marL="0" indent="0" algn="l" defTabSz="457200" rtl="0" eaLnBrk="1" latinLnBrk="0" hangingPunct="1">
+                <a:defRPr sz="1800" kern="1200">
+                  <a:solidFill>
+                    <a:schemeClr val="tx1"/>
+                  </a:solidFill>
+                  <a:latin typeface="+mn-lt"/>
+                  <a:ea typeface="+mn-ea"/>
+                  <a:cs typeface="+mn-cs"/>
+                </a:defRPr>
+              </a:lvl1pPr>
+              <a:lvl2pPr marL="457200" indent="0" algn="l" defTabSz="457200" rtl="0" eaLnBrk="1" latinLnBrk="0" hangingPunct="1">
+                <a:defRPr sz="1800" kern="1200">
+                  <a:solidFill>
+                    <a:schemeClr val="tx1"/>
+                  </a:solidFill>
+                  <a:latin typeface="+mn-lt"/>
+                  <a:ea typeface="+mn-ea"/>
+                  <a:cs typeface="+mn-cs"/>
+                </a:defRPr>
+              </a:lvl2pPr>
+              <a:lvl3pPr marL="914400" indent="0" algn="l" defTabSz="457200" rtl="0" eaLnBrk="1" latinLnBrk="0" hangingPunct="1">
+                <a:defRPr sz="1800" kern="1200">
+                  <a:solidFill>
+                    <a:schemeClr val="tx1"/>
+                  </a:solidFill>
+                  <a:latin typeface="+mn-lt"/>
+                  <a:ea typeface="+mn-ea"/>
+                  <a:cs typeface="+mn-cs"/>
+                </a:defRPr>
+              </a:lvl3pPr>
+              <a:lvl4pPr marL="1371600" indent="0" algn="l" defTabSz="457200" rtl="0" eaLnBrk="1" latinLnBrk="0" hangingPunct="1">
+                <a:defRPr sz="1800" kern="1200">
+                  <a:solidFill>
+                    <a:schemeClr val="tx1"/>
+                  </a:solidFill>
+                  <a:latin typeface="+mn-lt"/>
+                  <a:ea typeface="+mn-ea"/>
+                  <a:cs typeface="+mn-cs"/>
+                </a:defRPr>
+              </a:lvl4pPr>
+              <a:lvl5pPr marL="1828800" indent="0" algn="l" defTabSz="457200" rtl="0" eaLnBrk="1" latinLnBrk="0" hangingPunct="1">
+                <a:defRPr sz="1800" kern="1200">
+                  <a:solidFill>
+                    <a:schemeClr val="tx1"/>
+                  </a:solidFill>
+                  <a:latin typeface="+mn-lt"/>
+                  <a:ea typeface="+mn-ea"/>
+                  <a:cs typeface="+mn-cs"/>
+                </a:defRPr>
+              </a:lvl5pPr>
+              <a:lvl6pPr marL="2286000" indent="0" algn="l" defTabSz="457200" rtl="0" eaLnBrk="1" latinLnBrk="0" hangingPunct="1">
+                <a:defRPr sz="1800" kern="1200">
+                  <a:solidFill>
+                    <a:schemeClr val="tx1"/>
+                  </a:solidFill>
+                  <a:latin typeface="+mn-lt"/>
+                  <a:ea typeface="+mn-ea"/>
+                  <a:cs typeface="+mn-cs"/>
+                </a:defRPr>
+              </a:lvl6pPr>
+              <a:lvl7pPr marL="2743200" indent="0" algn="l" defTabSz="457200" rtl="0" eaLnBrk="1" latinLnBrk="0" hangingPunct="1">
+                <a:defRPr sz="1800" kern="1200">
+                  <a:solidFill>
+                    <a:schemeClr val="tx1"/>
+                  </a:solidFill>
+                  <a:latin typeface="+mn-lt"/>
+                  <a:ea typeface="+mn-ea"/>
+                  <a:cs typeface="+mn-cs"/>
+                </a:defRPr>
+              </a:lvl7pPr>
+              <a:lvl8pPr marL="3200400" indent="0" algn="l" defTabSz="457200" rtl="0" eaLnBrk="1" latinLnBrk="0" hangingPunct="1">
+                <a:defRPr sz="1800" kern="1200">
+                  <a:solidFill>
+                    <a:schemeClr val="tx1"/>
+                  </a:solidFill>
+                  <a:latin typeface="+mn-lt"/>
+                  <a:ea typeface="+mn-ea"/>
+                  <a:cs typeface="+mn-cs"/>
+                </a:defRPr>
+              </a:lvl8pPr>
+              <a:lvl9pPr marL="3657600" indent="0" algn="l" defTabSz="457200" rtl="0" eaLnBrk="1" latinLnBrk="0" hangingPunct="1">
+                <a:defRPr sz="1800" kern="1200">
+                  <a:solidFill>
+                    <a:schemeClr val="tx1"/>
+                  </a:solidFill>
+                  <a:latin typeface="+mn-lt"/>
+                  <a:ea typeface="+mn-ea"/>
+                  <a:cs typeface="+mn-cs"/>
+                </a:defRPr>
+              </a:lvl9pPr>
+            </a:lstStyle>
+            <a:p>
+              <a:pPr algn="ctr"/>
+              <a:r>
+                <a:rPr lang="ja-JP" sz="581" b="1">
+                  <a:solidFill>
+                    <a:srgbClr val="538135"/>
+                  </a:solidFill>
+                  <a:latin typeface="Meiryo UI"/>
+                  <a:ea typeface="Meiryo UI"/>
+                  <a:cs typeface="Meiryo UI"/>
+                </a:rPr>
+                <a:t>1 デバイス制御層（プラットフォーム別処理）</a:t>
+              </a:r>
+            </a:p>
+          </p:txBody>
+        </p:sp>
+        <p:sp>
+          <p:nvSpPr>
+            <p:cNvPr id="5" name="frame_1">
+              <a:extLst>
+                <a:ext uri="{FF2B5EF4-FFF2-40B4-BE49-F238E27FC236}">
+                  <a16:creationId xmlns:a16="http://schemas.microsoft.com/office/drawing/2014/main" id="{900ACB88-3216-CA0E-826C-430FC2AB0094}"/>
+                </a:ext>
+              </a:extLst>
+            </p:cNvPr>
+            <p:cNvSpPr/>
+            <p:nvPr/>
+          </p:nvSpPr>
+          <p:spPr>
+            <a:xfrm>
+              <a:off x="9029207" y="2099521"/>
+              <a:ext cx="2083888" cy="2934532"/>
+            </a:xfrm>
+            <a:prstGeom prst="roundRect">
+              <a:avLst>
+                <a:gd name="adj" fmla="val 3000"/>
+              </a:avLst>
+            </a:prstGeom>
+            <a:noFill/>
+            <a:ln w="9941">
+              <a:solidFill>
+                <a:srgbClr val="C55A11"/>
+              </a:solidFill>
+            </a:ln>
+          </p:spPr>
+          <p:txBody>
+            <a:bodyPr wrap="square"/>
+            <a:lstStyle>
+              <a:defPPr>
+                <a:defRPr lang="en-US"/>
+              </a:defPPr>
+              <a:lvl1pPr marL="0" indent="0" algn="l" defTabSz="457200" rtl="0" eaLnBrk="1" latinLnBrk="0" hangingPunct="1">
+                <a:defRPr sz="1800" kern="1200">
+                  <a:solidFill>
+                    <a:schemeClr val="tx1"/>
+                  </a:solidFill>
+                  <a:latin typeface="+mn-lt"/>
+                  <a:ea typeface="+mn-ea"/>
+                  <a:cs typeface="+mn-cs"/>
+                </a:defRPr>
+              </a:lvl1pPr>
+              <a:lvl2pPr marL="457200" indent="0" algn="l" defTabSz="457200" rtl="0" eaLnBrk="1" latinLnBrk="0" hangingPunct="1">
+                <a:defRPr sz="1800" kern="1200">
+                  <a:solidFill>
+                    <a:schemeClr val="tx1"/>
+                  </a:solidFill>
+                  <a:latin typeface="+mn-lt"/>
+                  <a:ea typeface="+mn-ea"/>
+                  <a:cs typeface="+mn-cs"/>
+                </a:defRPr>
+              </a:lvl2pPr>
+              <a:lvl3pPr marL="914400" indent="0" algn="l" defTabSz="457200" rtl="0" eaLnBrk="1" latinLnBrk="0" hangingPunct="1">
+                <a:defRPr sz="1800" kern="1200">
+                  <a:solidFill>
+                    <a:schemeClr val="tx1"/>
+                  </a:solidFill>
+                  <a:latin typeface="+mn-lt"/>
+                  <a:ea typeface="+mn-ea"/>
+                  <a:cs typeface="+mn-cs"/>
+                </a:defRPr>
+              </a:lvl3pPr>
+              <a:lvl4pPr marL="1371600" indent="0" algn="l" defTabSz="457200" rtl="0" eaLnBrk="1" latinLnBrk="0" hangingPunct="1">
+                <a:defRPr sz="1800" kern="1200">
+                  <a:solidFill>
+                    <a:schemeClr val="tx1"/>
+                  </a:solidFill>
+                  <a:latin typeface="+mn-lt"/>
+                  <a:ea typeface="+mn-ea"/>
+                  <a:cs typeface="+mn-cs"/>
+                </a:defRPr>
+              </a:lvl4pPr>
+              <a:lvl5pPr marL="1828800" indent="0" algn="l" defTabSz="457200" rtl="0" eaLnBrk="1" latinLnBrk="0" hangingPunct="1">
+                <a:defRPr sz="1800" kern="1200">
+                  <a:solidFill>
+                    <a:schemeClr val="tx1"/>
+                  </a:solidFill>
+                  <a:latin typeface="+mn-lt"/>
+                  <a:ea typeface="+mn-ea"/>
+                  <a:cs typeface="+mn-cs"/>
+                </a:defRPr>
+              </a:lvl5pPr>
+              <a:lvl6pPr marL="2286000" indent="0" algn="l" defTabSz="457200" rtl="0" eaLnBrk="1" latinLnBrk="0" hangingPunct="1">
+                <a:defRPr sz="1800" kern="1200">
+                  <a:solidFill>
+                    <a:schemeClr val="tx1"/>
+                  </a:solidFill>
+                  <a:latin typeface="+mn-lt"/>
+                  <a:ea typeface="+mn-ea"/>
+                  <a:cs typeface="+mn-cs"/>
+                </a:defRPr>
+              </a:lvl6pPr>
+              <a:lvl7pPr marL="2743200" indent="0" algn="l" defTabSz="457200" rtl="0" eaLnBrk="1" latinLnBrk="0" hangingPunct="1">
+                <a:defRPr sz="1800" kern="1200">
+                  <a:solidFill>
+                    <a:schemeClr val="tx1"/>
+                  </a:solidFill>
+                  <a:latin typeface="+mn-lt"/>
+                  <a:ea typeface="+mn-ea"/>
+                  <a:cs typeface="+mn-cs"/>
+                </a:defRPr>
+              </a:lvl7pPr>
+              <a:lvl8pPr marL="3200400" indent="0" algn="l" defTabSz="457200" rtl="0" eaLnBrk="1" latinLnBrk="0" hangingPunct="1">
+                <a:defRPr sz="1800" kern="1200">
+                  <a:solidFill>
+                    <a:schemeClr val="tx1"/>
+                  </a:solidFill>
+                  <a:latin typeface="+mn-lt"/>
+                  <a:ea typeface="+mn-ea"/>
+                  <a:cs typeface="+mn-cs"/>
+                </a:defRPr>
+              </a:lvl8pPr>
+              <a:lvl9pPr marL="3657600" indent="0" algn="l" defTabSz="457200" rtl="0" eaLnBrk="1" latinLnBrk="0" hangingPunct="1">
+                <a:defRPr sz="1800" kern="1200">
+                  <a:solidFill>
+                    <a:schemeClr val="tx1"/>
+                  </a:solidFill>
+                  <a:latin typeface="+mn-lt"/>
+                  <a:ea typeface="+mn-ea"/>
+                  <a:cs typeface="+mn-cs"/>
+                </a:defRPr>
+              </a:lvl9pPr>
+            </a:lstStyle>
+            <a:p>
+              <a:endParaRPr lang="ja-JP" altLang="en-US"/>
+            </a:p>
+          </p:txBody>
+        </p:sp>
+        <p:sp>
+          <p:nvSpPr>
+            <p:cNvPr id="6" name="frame_title_1">
+              <a:extLst>
+                <a:ext uri="{FF2B5EF4-FFF2-40B4-BE49-F238E27FC236}">
+                  <a16:creationId xmlns:a16="http://schemas.microsoft.com/office/drawing/2014/main" id="{39345D74-AADC-B6C8-B17A-5C63DD24679A}"/>
+                </a:ext>
+              </a:extLst>
+            </p:cNvPr>
+            <p:cNvSpPr/>
+            <p:nvPr/>
+          </p:nvSpPr>
+          <p:spPr>
+            <a:xfrm>
+              <a:off x="9748672" y="2145527"/>
+              <a:ext cx="638608" cy="145077"/>
+            </a:xfrm>
+            <a:prstGeom prst="rect">
+              <a:avLst/>
+            </a:prstGeom>
+            <a:solidFill>
+              <a:srgbClr val="FCE4D6"/>
+            </a:solidFill>
+            <a:ln w="4260">
+              <a:noFill/>
+            </a:ln>
+          </p:spPr>
+          <p:txBody>
+            <a:bodyPr wrap="square" lIns="16102" tIns="8051" rIns="16102" bIns="8051" anchor="ctr">
+              <a:noAutofit/>
+            </a:bodyPr>
+            <a:lstStyle>
+              <a:defPPr>
+                <a:defRPr lang="en-US"/>
+              </a:defPPr>
+              <a:lvl1pPr marL="0" indent="0" algn="l" defTabSz="457200" rtl="0" eaLnBrk="1" latinLnBrk="0" hangingPunct="1">
+                <a:defRPr sz="1800" kern="1200">
+                  <a:solidFill>
+                    <a:schemeClr val="tx1"/>
+                  </a:solidFill>
+                  <a:latin typeface="+mn-lt"/>
+                  <a:ea typeface="+mn-ea"/>
+                  <a:cs typeface="+mn-cs"/>
+                </a:defRPr>
+              </a:lvl1pPr>
+              <a:lvl2pPr marL="457200" indent="0" algn="l" defTabSz="457200" rtl="0" eaLnBrk="1" latinLnBrk="0" hangingPunct="1">
+                <a:defRPr sz="1800" kern="1200">
+                  <a:solidFill>
+                    <a:schemeClr val="tx1"/>
+                  </a:solidFill>
+                  <a:latin typeface="+mn-lt"/>
+                  <a:ea typeface="+mn-ea"/>
+                  <a:cs typeface="+mn-cs"/>
+                </a:defRPr>
+              </a:lvl2pPr>
+              <a:lvl3pPr marL="914400" indent="0" algn="l" defTabSz="457200" rtl="0" eaLnBrk="1" latinLnBrk="0" hangingPunct="1">
+                <a:defRPr sz="1800" kern="1200">
+                  <a:solidFill>
+                    <a:schemeClr val="tx1"/>
+                  </a:solidFill>
+                  <a:latin typeface="+mn-lt"/>
+                  <a:ea typeface="+mn-ea"/>
+                  <a:cs typeface="+mn-cs"/>
+                </a:defRPr>
+              </a:lvl3pPr>
+              <a:lvl4pPr marL="1371600" indent="0" algn="l" defTabSz="457200" rtl="0" eaLnBrk="1" latinLnBrk="0" hangingPunct="1">
+                <a:defRPr sz="1800" kern="1200">
+                  <a:solidFill>
+                    <a:schemeClr val="tx1"/>
+                  </a:solidFill>
+                  <a:latin typeface="+mn-lt"/>
+                  <a:ea typeface="+mn-ea"/>
+                  <a:cs typeface="+mn-cs"/>
+                </a:defRPr>
+              </a:lvl4pPr>
+              <a:lvl5pPr marL="1828800" indent="0" algn="l" defTabSz="457200" rtl="0" eaLnBrk="1" latinLnBrk="0" hangingPunct="1">
+                <a:defRPr sz="1800" kern="1200">
+                  <a:solidFill>
+                    <a:schemeClr val="tx1"/>
+                  </a:solidFill>
+                  <a:latin typeface="+mn-lt"/>
+                  <a:ea typeface="+mn-ea"/>
+                  <a:cs typeface="+mn-cs"/>
+                </a:defRPr>
+              </a:lvl5pPr>
+              <a:lvl6pPr marL="2286000" indent="0" algn="l" defTabSz="457200" rtl="0" eaLnBrk="1" latinLnBrk="0" hangingPunct="1">
+                <a:defRPr sz="1800" kern="1200">
+                  <a:solidFill>
+                    <a:schemeClr val="tx1"/>
+                  </a:solidFill>
+                  <a:latin typeface="+mn-lt"/>
+                  <a:ea typeface="+mn-ea"/>
+                  <a:cs typeface="+mn-cs"/>
+                </a:defRPr>
+              </a:lvl6pPr>
+              <a:lvl7pPr marL="2743200" indent="0" algn="l" defTabSz="457200" rtl="0" eaLnBrk="1" latinLnBrk="0" hangingPunct="1">
+                <a:defRPr sz="1800" kern="1200">
+                  <a:solidFill>
+                    <a:schemeClr val="tx1"/>
+                  </a:solidFill>
+                  <a:latin typeface="+mn-lt"/>
+                  <a:ea typeface="+mn-ea"/>
+                  <a:cs typeface="+mn-cs"/>
+                </a:defRPr>
+              </a:lvl7pPr>
+              <a:lvl8pPr marL="3200400" indent="0" algn="l" defTabSz="457200" rtl="0" eaLnBrk="1" latinLnBrk="0" hangingPunct="1">
+                <a:defRPr sz="1800" kern="1200">
+                  <a:solidFill>
+                    <a:schemeClr val="tx1"/>
+                  </a:solidFill>
+                  <a:latin typeface="+mn-lt"/>
+                  <a:ea typeface="+mn-ea"/>
+                  <a:cs typeface="+mn-cs"/>
+                </a:defRPr>
+              </a:lvl8pPr>
+              <a:lvl9pPr marL="3657600" indent="0" algn="l" defTabSz="457200" rtl="0" eaLnBrk="1" latinLnBrk="0" hangingPunct="1">
+                <a:defRPr sz="1800" kern="1200">
+                  <a:solidFill>
+                    <a:schemeClr val="tx1"/>
+                  </a:solidFill>
+                  <a:latin typeface="+mn-lt"/>
+                  <a:ea typeface="+mn-ea"/>
+                  <a:cs typeface="+mn-cs"/>
+                </a:defRPr>
+              </a:lvl9pPr>
+            </a:lstStyle>
+            <a:p>
+              <a:pPr algn="ctr"/>
+              <a:r>
+                <a:rPr lang="ja-JP" sz="581" b="1">
+                  <a:solidFill>
+                    <a:srgbClr val="C55A11"/>
+                  </a:solidFill>
+                  <a:latin typeface="Meiryo UI"/>
+                  <a:ea typeface="Meiryo UI"/>
+                  <a:cs typeface="Meiryo UI"/>
+                </a:rPr>
+                <a:t>2 外部境界</a:t>
+              </a:r>
+            </a:p>
+          </p:txBody>
+        </p:sp>
+        <p:sp>
+          <p:nvSpPr>
+            <p:cNvPr id="7" name="shape_d71_PLATFORM_DOMAIN_CONTRACT" title="① 《インターフェース》 公開デバイス契約群 1. IPrinterStrategy 2. IBarcodeScannerStrategy 3. ICashChangerStrategy 4. ICustomerDisplayStrategy 5. IDrawerStrategy 6. IPaymentStrategy 7. IKeyboardStrategy">
+              <a:extLst>
+                <a:ext uri="{FF2B5EF4-FFF2-40B4-BE49-F238E27FC236}">
+                  <a16:creationId xmlns:a16="http://schemas.microsoft.com/office/drawing/2014/main" id="{AA4F6DCA-017E-CAE7-6804-FF23E9B767DF}"/>
+                </a:ext>
+              </a:extLst>
+            </p:cNvPr>
+            <p:cNvSpPr/>
+            <p:nvPr/>
+          </p:nvSpPr>
+          <p:spPr>
+            <a:xfrm>
+              <a:off x="1655072" y="3477175"/>
+              <a:ext cx="1142692" cy="1011032"/>
+            </a:xfrm>
+            <a:prstGeom prst="roundRect">
+              <a:avLst/>
+            </a:prstGeom>
+            <a:solidFill>
+              <a:srgbClr val="DDEBF7">
+                <a:alpha val="100000"/>
+              </a:srgbClr>
+            </a:solidFill>
+            <a:ln w="11361" cap="flat" cmpd="sng" algn="ctr">
+              <a:solidFill>
+                <a:srgbClr val="4472C4"/>
+              </a:solidFill>
+              <a:prstDash val="solid"/>
+            </a:ln>
+            <a:effectLst/>
+          </p:spPr>
+          <p:style>
+            <a:lnRef idx="2">
+              <a:schemeClr val="accent1">
+                <a:shade val="15000"/>
+              </a:schemeClr>
+            </a:lnRef>
+            <a:fillRef idx="1">
+              <a:schemeClr val="accent1"/>
+            </a:fillRef>
+            <a:effectRef idx="0">
+              <a:schemeClr val="accent1"/>
+            </a:effectRef>
+            <a:fontRef idx="minor">
+              <a:schemeClr val="lt1"/>
+            </a:fontRef>
+          </p:style>
+          <p:txBody>
+            <a:bodyPr wrap="square" lIns="34084" tIns="17042" rIns="34084" bIns="17042" rtlCol="0" anchor="ctr">
+              <a:noAutofit/>
+            </a:bodyPr>
+            <a:lstStyle>
+              <a:defPPr>
+                <a:defRPr lang="en-US"/>
+              </a:defPPr>
+              <a:lvl1pPr marL="0" indent="0" algn="l" defTabSz="457200" rtl="0" eaLnBrk="1" latinLnBrk="0" hangingPunct="1">
+                <a:defRPr sz="1800" kern="1200">
+                  <a:solidFill>
+                    <a:schemeClr val="lt1"/>
+                  </a:solidFill>
+                  <a:latin typeface="+mn-lt"/>
+                  <a:ea typeface="+mn-ea"/>
+                  <a:cs typeface="+mn-cs"/>
+                </a:defRPr>
+              </a:lvl1pPr>
+              <a:lvl2pPr marL="457200" indent="0" algn="l" defTabSz="457200" rtl="0" eaLnBrk="1" latinLnBrk="0" hangingPunct="1">
+                <a:defRPr sz="1800" kern="1200">
+                  <a:solidFill>
+                    <a:schemeClr val="lt1"/>
+                  </a:solidFill>
+                  <a:latin typeface="+mn-lt"/>
+                  <a:ea typeface="+mn-ea"/>
+                  <a:cs typeface="+mn-cs"/>
+                </a:defRPr>
+              </a:lvl2pPr>
+              <a:lvl3pPr marL="914400" indent="0" algn="l" defTabSz="457200" rtl="0" eaLnBrk="1" latinLnBrk="0" hangingPunct="1">
+                <a:defRPr sz="1800" kern="1200">
+                  <a:solidFill>
+                    <a:schemeClr val="lt1"/>
+                  </a:solidFill>
+                  <a:latin typeface="+mn-lt"/>
+                  <a:ea typeface="+mn-ea"/>
+                  <a:cs typeface="+mn-cs"/>
+                </a:defRPr>
+              </a:lvl3pPr>
+              <a:lvl4pPr marL="1371600" indent="0" algn="l" defTabSz="457200" rtl="0" eaLnBrk="1" latinLnBrk="0" hangingPunct="1">
+                <a:defRPr sz="1800" kern="1200">
+                  <a:solidFill>
+                    <a:schemeClr val="lt1"/>
+                  </a:solidFill>
+                  <a:latin typeface="+mn-lt"/>
+                  <a:ea typeface="+mn-ea"/>
+                  <a:cs typeface="+mn-cs"/>
+                </a:defRPr>
+              </a:lvl4pPr>
+              <a:lvl5pPr marL="1828800" indent="0" algn="l" defTabSz="457200" rtl="0" eaLnBrk="1" latinLnBrk="0" hangingPunct="1">
+                <a:defRPr sz="1800" kern="1200">
+                  <a:solidFill>
+                    <a:schemeClr val="lt1"/>
+                  </a:solidFill>
+                  <a:latin typeface="+mn-lt"/>
+                  <a:ea typeface="+mn-ea"/>
+                  <a:cs typeface="+mn-cs"/>
+                </a:defRPr>
+              </a:lvl5pPr>
+              <a:lvl6pPr marL="2286000" indent="0" algn="l" defTabSz="457200" rtl="0" eaLnBrk="1" latinLnBrk="0" hangingPunct="1">
+                <a:defRPr sz="1800" kern="1200">
+                  <a:solidFill>
+                    <a:schemeClr val="lt1"/>
+                  </a:solidFill>
+                  <a:latin typeface="+mn-lt"/>
+                  <a:ea typeface="+mn-ea"/>
+                  <a:cs typeface="+mn-cs"/>
+                </a:defRPr>
+              </a:lvl6pPr>
+              <a:lvl7pPr marL="2743200" indent="0" algn="l" defTabSz="457200" rtl="0" eaLnBrk="1" latinLnBrk="0" hangingPunct="1">
+                <a:defRPr sz="1800" kern="1200">
+                  <a:solidFill>
+                    <a:schemeClr val="lt1"/>
+                  </a:solidFill>
+                  <a:latin typeface="+mn-lt"/>
+                  <a:ea typeface="+mn-ea"/>
+                  <a:cs typeface="+mn-cs"/>
+                </a:defRPr>
+              </a:lvl7pPr>
+              <a:lvl8pPr marL="3200400" indent="0" algn="l" defTabSz="457200" rtl="0" eaLnBrk="1" latinLnBrk="0" hangingPunct="1">
+                <a:defRPr sz="1800" kern="1200">
+                  <a:solidFill>
+                    <a:schemeClr val="lt1"/>
+                  </a:solidFill>
+                  <a:latin typeface="+mn-lt"/>
+                  <a:ea typeface="+mn-ea"/>
+                  <a:cs typeface="+mn-cs"/>
+                </a:defRPr>
+              </a:lvl8pPr>
+              <a:lvl9pPr marL="3657600" indent="0" algn="l" defTabSz="457200" rtl="0" eaLnBrk="1" latinLnBrk="0" hangingPunct="1">
+                <a:defRPr sz="1800" kern="1200">
+                  <a:solidFill>
+                    <a:schemeClr val="lt1"/>
+                  </a:solidFill>
+                  <a:latin typeface="+mn-lt"/>
+                  <a:ea typeface="+mn-ea"/>
+                  <a:cs typeface="+mn-cs"/>
+                </a:defRPr>
+              </a:lvl9pPr>
+            </a:lstStyle>
+            <a:p>
+              <a:pPr algn="l"/>
+              <a:r>
+                <a:rPr kumimoji="0" lang="ja-JP" altLang="en-US" sz="447" b="1" i="0" u="none" strike="noStrike" kern="0" cap="none" spc="0" normalizeH="0" baseline="0">
+                  <a:ln>
+                    <a:noFill/>
+                  </a:ln>
+                  <a:solidFill>
+                    <a:srgbClr val="111111"/>
+                  </a:solidFill>
+                  <a:effectLst/>
+                  <a:uLnTx/>
+                  <a:uFillTx/>
+                  <a:latin typeface="Meiryo UI"/>
+                  <a:ea typeface="Meiryo UI"/>
+                </a:rPr>
+                <a:t>1.1 </a:t>
+              </a:r>
+              <a:r>
+                <a:rPr kumimoji="0" lang="en-US" altLang="ja-JP" sz="447" b="1" i="0" u="none" strike="noStrike" kern="0" cap="none" spc="0" normalizeH="0" baseline="0">
+                  <a:ln>
+                    <a:noFill/>
+                  </a:ln>
+                  <a:solidFill>
+                    <a:srgbClr val="111111"/>
+                  </a:solidFill>
+                  <a:effectLst/>
+                  <a:uLnTx/>
+                  <a:uFillTx/>
+                  <a:latin typeface="Meiryo UI"/>
+                  <a:ea typeface="Meiryo UI"/>
+                </a:rPr>
+                <a:t>《</a:t>
+              </a:r>
+              <a:r>
+                <a:rPr kumimoji="0" lang="ja-JP" altLang="en-US" sz="447" b="1" i="0" u="none" strike="noStrike" kern="0" cap="none" spc="0" normalizeH="0" baseline="0">
+                  <a:ln>
+                    <a:noFill/>
+                  </a:ln>
+                  <a:solidFill>
+                    <a:srgbClr val="111111"/>
+                  </a:solidFill>
+                  <a:effectLst/>
+                  <a:uLnTx/>
+                  <a:uFillTx/>
+                  <a:latin typeface="Meiryo UI"/>
+                  <a:ea typeface="Meiryo UI"/>
+                </a:rPr>
+                <a:t>インターフェース</a:t>
+              </a:r>
+              <a:r>
+                <a:rPr kumimoji="0" lang="en-US" altLang="ja-JP" sz="447" b="1" i="0" u="none" strike="noStrike" kern="0" cap="none" spc="0" normalizeH="0" baseline="0">
+                  <a:ln>
+                    <a:noFill/>
+                  </a:ln>
+                  <a:solidFill>
+                    <a:srgbClr val="111111"/>
+                  </a:solidFill>
+                  <a:effectLst/>
+                  <a:uLnTx/>
+                  <a:uFillTx/>
+                  <a:latin typeface="Meiryo UI"/>
+                  <a:ea typeface="Meiryo UI"/>
+                </a:rPr>
+                <a:t>》
+</a:t>
+              </a:r>
+              <a:r>
+                <a:rPr kumimoji="0" lang="ja-JP" altLang="en-US" sz="447" b="1" i="0" u="none" strike="noStrike" kern="0" cap="none" spc="0" normalizeH="0" baseline="0">
+                  <a:ln>
+                    <a:noFill/>
+                  </a:ln>
+                  <a:solidFill>
+                    <a:srgbClr val="111111"/>
+                  </a:solidFill>
+                  <a:effectLst/>
+                  <a:uLnTx/>
+                  <a:uFillTx/>
+                  <a:latin typeface="Meiryo UI"/>
+                  <a:ea typeface="Meiryo UI"/>
+                </a:rPr>
+                <a:t>公開デバイス契約群
+</a:t>
+              </a:r>
+              <a:r>
+                <a:rPr kumimoji="0" lang="en-US" altLang="ja-JP" sz="447" b="1" i="0" u="none" strike="noStrike" kern="0" cap="none" spc="0" normalizeH="0" baseline="0">
+                  <a:ln>
+                    <a:noFill/>
+                  </a:ln>
+                  <a:solidFill>
+                    <a:srgbClr val="111111"/>
+                  </a:solidFill>
+                  <a:effectLst/>
+                  <a:uLnTx/>
+                  <a:uFillTx/>
+                  <a:latin typeface="Meiryo UI"/>
+                  <a:ea typeface="Meiryo UI"/>
+                </a:rPr>
+                <a:t>1. IPrinterStrategy
+2. IBarcodeScannerStrategy
+3. ICashChangerStrategy
+4. ICustomerDisplayStrategy
+5. IDrawerStrategy
+6. IPaymentStrategy
+7. IKeyboardStrategy</a:t>
+              </a:r>
+              <a:endParaRPr kumimoji="0" lang="ja-JP" altLang="en-US" sz="447" b="1" i="0" u="none" strike="noStrike" kern="0" cap="none" spc="0" normalizeH="0" baseline="0">
+                <a:ln>
+                  <a:noFill/>
+                </a:ln>
+                <a:solidFill>
+                  <a:srgbClr val="111111"/>
+                </a:solidFill>
+                <a:effectLst/>
+                <a:uLnTx/>
+                <a:uFillTx/>
+                <a:latin typeface="Meiryo UI"/>
+                <a:ea typeface="Meiryo UI"/>
+              </a:endParaRPr>
+            </a:p>
+          </p:txBody>
+        </p:sp>
+        <p:sp>
+          <p:nvSpPr>
+            <p:cNvPr id="8" name="shape_d71_PLATFORM_DOMAIN_ANDROID" title="⑥ Android直接接続 AndroidBluetoothPrinterStrategy等 現在は利用不可">
+              <a:extLst>
+                <a:ext uri="{FF2B5EF4-FFF2-40B4-BE49-F238E27FC236}">
+                  <a16:creationId xmlns:a16="http://schemas.microsoft.com/office/drawing/2014/main" id="{49ED43D5-9BB6-6EEE-0717-251434970A4B}"/>
+                </a:ext>
+              </a:extLst>
+            </p:cNvPr>
+            <p:cNvSpPr/>
+            <p:nvPr/>
+          </p:nvSpPr>
+          <p:spPr>
+            <a:xfrm>
+              <a:off x="4969072" y="2469713"/>
+              <a:ext cx="1341533" cy="275216"/>
+            </a:xfrm>
+            <a:prstGeom prst="roundRect">
+              <a:avLst/>
+            </a:prstGeom>
+            <a:solidFill>
+              <a:srgbClr val="F2F2F2">
+                <a:alpha val="100000"/>
+              </a:srgbClr>
+            </a:solidFill>
+            <a:ln w="11361" cap="flat" cmpd="sng" algn="ctr">
+              <a:solidFill>
+                <a:srgbClr val="7F7F7F"/>
+              </a:solidFill>
+              <a:prstDash val="dash"/>
+            </a:ln>
+            <a:effectLst/>
+          </p:spPr>
+          <p:style>
+            <a:lnRef idx="2">
+              <a:schemeClr val="accent1">
+                <a:shade val="15000"/>
+              </a:schemeClr>
+            </a:lnRef>
+            <a:fillRef idx="1">
+              <a:schemeClr val="accent1"/>
+            </a:fillRef>
+            <a:effectRef idx="0">
+              <a:schemeClr val="accent1"/>
+            </a:effectRef>
+            <a:fontRef idx="minor">
+              <a:schemeClr val="lt1"/>
+            </a:fontRef>
+          </p:style>
+          <p:txBody>
+            <a:bodyPr wrap="square" lIns="34084" tIns="17042" rIns="34084" bIns="17042" rtlCol="0" anchor="ctr">
+              <a:noAutofit/>
+            </a:bodyPr>
+            <a:lstStyle>
+              <a:defPPr>
+                <a:defRPr lang="en-US"/>
+              </a:defPPr>
+              <a:lvl1pPr marL="0" indent="0" algn="l" defTabSz="457200" rtl="0" eaLnBrk="1" latinLnBrk="0" hangingPunct="1">
+                <a:defRPr sz="1800" kern="1200">
+                  <a:solidFill>
+                    <a:schemeClr val="lt1"/>
+                  </a:solidFill>
+                  <a:latin typeface="+mn-lt"/>
+                  <a:ea typeface="+mn-ea"/>
+                  <a:cs typeface="+mn-cs"/>
+                </a:defRPr>
+              </a:lvl1pPr>
+              <a:lvl2pPr marL="457200" indent="0" algn="l" defTabSz="457200" rtl="0" eaLnBrk="1" latinLnBrk="0" hangingPunct="1">
+                <a:defRPr sz="1800" kern="1200">
+                  <a:solidFill>
+                    <a:schemeClr val="lt1"/>
+                  </a:solidFill>
+                  <a:latin typeface="+mn-lt"/>
+                  <a:ea typeface="+mn-ea"/>
+                  <a:cs typeface="+mn-cs"/>
+                </a:defRPr>
+              </a:lvl2pPr>
+              <a:lvl3pPr marL="914400" indent="0" algn="l" defTabSz="457200" rtl="0" eaLnBrk="1" latinLnBrk="0" hangingPunct="1">
+                <a:defRPr sz="1800" kern="1200">
+                  <a:solidFill>
+                    <a:schemeClr val="lt1"/>
+                  </a:solidFill>
+                  <a:latin typeface="+mn-lt"/>
+                  <a:ea typeface="+mn-ea"/>
+                  <a:cs typeface="+mn-cs"/>
+                </a:defRPr>
+              </a:lvl3pPr>
+              <a:lvl4pPr marL="1371600" indent="0" algn="l" defTabSz="457200" rtl="0" eaLnBrk="1" latinLnBrk="0" hangingPunct="1">
+                <a:defRPr sz="1800" kern="1200">
+                  <a:solidFill>
+                    <a:schemeClr val="lt1"/>
+                  </a:solidFill>
+                  <a:latin typeface="+mn-lt"/>
+                  <a:ea typeface="+mn-ea"/>
+                  <a:cs typeface="+mn-cs"/>
+                </a:defRPr>
+              </a:lvl4pPr>
+              <a:lvl5pPr marL="1828800" indent="0" algn="l" defTabSz="457200" rtl="0" eaLnBrk="1" latinLnBrk="0" hangingPunct="1">
+                <a:defRPr sz="1800" kern="1200">
+                  <a:solidFill>
+                    <a:schemeClr val="lt1"/>
+                  </a:solidFill>
+                  <a:latin typeface="+mn-lt"/>
+                  <a:ea typeface="+mn-ea"/>
+                  <a:cs typeface="+mn-cs"/>
+                </a:defRPr>
+              </a:lvl5pPr>
+              <a:lvl6pPr marL="2286000" indent="0" algn="l" defTabSz="457200" rtl="0" eaLnBrk="1" latinLnBrk="0" hangingPunct="1">
+                <a:defRPr sz="1800" kern="1200">
+                  <a:solidFill>
+                    <a:schemeClr val="lt1"/>
+                  </a:solidFill>
+                  <a:latin typeface="+mn-lt"/>
+                  <a:ea typeface="+mn-ea"/>
+                  <a:cs typeface="+mn-cs"/>
+                </a:defRPr>
+              </a:lvl6pPr>
+              <a:lvl7pPr marL="2743200" indent="0" algn="l" defTabSz="457200" rtl="0" eaLnBrk="1" latinLnBrk="0" hangingPunct="1">
+                <a:defRPr sz="1800" kern="1200">
+                  <a:solidFill>
+                    <a:schemeClr val="lt1"/>
+                  </a:solidFill>
+                  <a:latin typeface="+mn-lt"/>
+                  <a:ea typeface="+mn-ea"/>
+                  <a:cs typeface="+mn-cs"/>
+                </a:defRPr>
+              </a:lvl7pPr>
+              <a:lvl8pPr marL="3200400" indent="0" algn="l" defTabSz="457200" rtl="0" eaLnBrk="1" latinLnBrk="0" hangingPunct="1">
+                <a:defRPr sz="1800" kern="1200">
+                  <a:solidFill>
+                    <a:schemeClr val="lt1"/>
+                  </a:solidFill>
+                  <a:latin typeface="+mn-lt"/>
+                  <a:ea typeface="+mn-ea"/>
+                  <a:cs typeface="+mn-cs"/>
+                </a:defRPr>
+              </a:lvl8pPr>
+              <a:lvl9pPr marL="3657600" indent="0" algn="l" defTabSz="457200" rtl="0" eaLnBrk="1" latinLnBrk="0" hangingPunct="1">
+                <a:defRPr sz="1800" kern="1200">
+                  <a:solidFill>
+                    <a:schemeClr val="lt1"/>
+                  </a:solidFill>
+                  <a:latin typeface="+mn-lt"/>
+                  <a:ea typeface="+mn-ea"/>
+                  <a:cs typeface="+mn-cs"/>
+                </a:defRPr>
+              </a:lvl9pPr>
+            </a:lstStyle>
+            <a:p>
+              <a:pPr algn="ctr"/>
+              <a:r>
+                <a:rPr kumimoji="0" lang="en-US" altLang="ja-JP" sz="447" b="1" i="0" u="none" strike="noStrike" kern="0" cap="none" spc="0" normalizeH="0" baseline="0">
+                  <a:ln>
+                    <a:noFill/>
+                  </a:ln>
+                  <a:solidFill>
+                    <a:srgbClr val="666666"/>
+                  </a:solidFill>
+                  <a:effectLst/>
+                  <a:uLnTx/>
+                  <a:uFillTx/>
+                  <a:latin typeface="Meiryo UI"/>
+                  <a:ea typeface="Meiryo UI"/>
+                </a:rPr>
+                <a:t>1.6 Android</a:t>
+              </a:r>
+              <a:r>
+                <a:rPr kumimoji="0" lang="ja-JP" altLang="en-US" sz="447" b="1" i="0" u="none" strike="noStrike" kern="0" cap="none" spc="0" normalizeH="0" baseline="0">
+                  <a:ln>
+                    <a:noFill/>
+                  </a:ln>
+                  <a:solidFill>
+                    <a:srgbClr val="666666"/>
+                  </a:solidFill>
+                  <a:effectLst/>
+                  <a:uLnTx/>
+                  <a:uFillTx/>
+                  <a:latin typeface="Meiryo UI"/>
+                  <a:ea typeface="Meiryo UI"/>
+                </a:rPr>
+                <a:t>直接接続
+</a:t>
+              </a:r>
+              <a:r>
+                <a:rPr kumimoji="0" lang="en-US" altLang="ja-JP" sz="447" b="1" i="0" u="none" strike="noStrike" kern="0" cap="none" spc="0" normalizeH="0" baseline="0">
+                  <a:ln>
+                    <a:noFill/>
+                  </a:ln>
+                  <a:solidFill>
+                    <a:srgbClr val="666666"/>
+                  </a:solidFill>
+                  <a:effectLst/>
+                  <a:uLnTx/>
+                  <a:uFillTx/>
+                  <a:latin typeface="Meiryo UI"/>
+                  <a:ea typeface="Meiryo UI"/>
+                </a:rPr>
+                <a:t>AndroidBluetoothPrinterStrategy</a:t>
+              </a:r>
+              <a:r>
+                <a:rPr kumimoji="0" lang="ja-JP" altLang="en-US" sz="447" b="1" i="0" u="none" strike="noStrike" kern="0" cap="none" spc="0" normalizeH="0" baseline="0">
+                  <a:ln>
+                    <a:noFill/>
+                  </a:ln>
+                  <a:solidFill>
+                    <a:srgbClr val="666666"/>
+                  </a:solidFill>
+                  <a:effectLst/>
+                  <a:uLnTx/>
+                  <a:uFillTx/>
+                  <a:latin typeface="Meiryo UI"/>
+                  <a:ea typeface="Meiryo UI"/>
+                </a:rPr>
+                <a:t>等
+</a:t>
+              </a:r>
+              <a:r>
+                <a:rPr kumimoji="0" lang="ja-JP" altLang="en-US" sz="447" b="1" i="0" u="none" strike="noStrike" kern="0" cap="none" spc="0" normalizeH="0" baseline="0">
+                  <a:ln>
+                    <a:noFill/>
+                  </a:ln>
+                  <a:solidFill>
+                    <a:srgbClr val="FF0000"/>
+                  </a:solidFill>
+                  <a:effectLst/>
+                  <a:uLnTx/>
+                  <a:uFillTx/>
+                  <a:latin typeface="Meiryo UI"/>
+                  <a:ea typeface="Meiryo UI"/>
+                </a:rPr>
+                <a:t>現在は利用不可</a:t>
+              </a:r>
+            </a:p>
+          </p:txBody>
+        </p:sp>
+        <p:sp>
+          <p:nvSpPr>
+            <p:cNvPr id="9" name="shape_d71_PLATFORM_DOMAIN_OPOS_COMM" title="⑦ OPOS通信クラス群 OposNamedPipeCommandClient NamedPipeClient / NamedPipeEventReceiver">
+              <a:extLst>
+                <a:ext uri="{FF2B5EF4-FFF2-40B4-BE49-F238E27FC236}">
+                  <a16:creationId xmlns:a16="http://schemas.microsoft.com/office/drawing/2014/main" id="{E89D8E0E-2311-9BF2-82E0-2BFB411C2B3E}"/>
+                </a:ext>
+              </a:extLst>
+            </p:cNvPr>
+            <p:cNvSpPr/>
+            <p:nvPr/>
+          </p:nvSpPr>
+          <p:spPr>
+            <a:xfrm>
+              <a:off x="6732217" y="3498191"/>
+              <a:ext cx="2068024" cy="477728"/>
+            </a:xfrm>
+            <a:prstGeom prst="roundRect">
+              <a:avLst/>
+            </a:prstGeom>
+            <a:solidFill>
+              <a:srgbClr val="F8FBFD">
+                <a:alpha val="100000"/>
+              </a:srgbClr>
+            </a:solidFill>
+            <a:ln w="11361" cap="flat" cmpd="sng" algn="ctr">
+              <a:solidFill>
+                <a:srgbClr val="0D32B2"/>
+              </a:solidFill>
+              <a:prstDash val="solid"/>
+            </a:ln>
+            <a:effectLst/>
+          </p:spPr>
+          <p:style>
+            <a:lnRef idx="2">
+              <a:schemeClr val="accent1">
+                <a:shade val="15000"/>
+              </a:schemeClr>
+            </a:lnRef>
+            <a:fillRef idx="1">
+              <a:schemeClr val="accent1"/>
+            </a:fillRef>
+            <a:effectRef idx="0">
+              <a:schemeClr val="accent1"/>
+            </a:effectRef>
+            <a:fontRef idx="minor">
+              <a:schemeClr val="lt1"/>
+            </a:fontRef>
+          </p:style>
+          <p:txBody>
+            <a:bodyPr wrap="square" lIns="34084" tIns="17042" rIns="34084" bIns="17042" rtlCol="0" anchor="ctr">
+              <a:noAutofit/>
+            </a:bodyPr>
+            <a:lstStyle>
+              <a:defPPr>
+                <a:defRPr lang="en-US"/>
+              </a:defPPr>
+              <a:lvl1pPr marL="0" indent="0" algn="l" defTabSz="457200" rtl="0" eaLnBrk="1" latinLnBrk="0" hangingPunct="1">
+                <a:defRPr sz="1800" kern="1200">
+                  <a:solidFill>
+                    <a:schemeClr val="lt1"/>
+                  </a:solidFill>
+                  <a:latin typeface="+mn-lt"/>
+                  <a:ea typeface="+mn-ea"/>
+                  <a:cs typeface="+mn-cs"/>
+                </a:defRPr>
+              </a:lvl1pPr>
+              <a:lvl2pPr marL="457200" indent="0" algn="l" defTabSz="457200" rtl="0" eaLnBrk="1" latinLnBrk="0" hangingPunct="1">
+                <a:defRPr sz="1800" kern="1200">
+                  <a:solidFill>
+                    <a:schemeClr val="lt1"/>
+                  </a:solidFill>
+                  <a:latin typeface="+mn-lt"/>
+                  <a:ea typeface="+mn-ea"/>
+                  <a:cs typeface="+mn-cs"/>
+                </a:defRPr>
+              </a:lvl2pPr>
+              <a:lvl3pPr marL="914400" indent="0" algn="l" defTabSz="457200" rtl="0" eaLnBrk="1" latinLnBrk="0" hangingPunct="1">
+                <a:defRPr sz="1800" kern="1200">
+                  <a:solidFill>
+                    <a:schemeClr val="lt1"/>
+                  </a:solidFill>
+                  <a:latin typeface="+mn-lt"/>
+                  <a:ea typeface="+mn-ea"/>
+                  <a:cs typeface="+mn-cs"/>
+                </a:defRPr>
+              </a:lvl3pPr>
+              <a:lvl4pPr marL="1371600" indent="0" algn="l" defTabSz="457200" rtl="0" eaLnBrk="1" latinLnBrk="0" hangingPunct="1">
+                <a:defRPr sz="1800" kern="1200">
+                  <a:solidFill>
+                    <a:schemeClr val="lt1"/>
+                  </a:solidFill>
+                  <a:latin typeface="+mn-lt"/>
+                  <a:ea typeface="+mn-ea"/>
+                  <a:cs typeface="+mn-cs"/>
+                </a:defRPr>
+              </a:lvl4pPr>
+              <a:lvl5pPr marL="1828800" indent="0" algn="l" defTabSz="457200" rtl="0" eaLnBrk="1" latinLnBrk="0" hangingPunct="1">
+                <a:defRPr sz="1800" kern="1200">
+                  <a:solidFill>
+                    <a:schemeClr val="lt1"/>
+                  </a:solidFill>
+                  <a:latin typeface="+mn-lt"/>
+                  <a:ea typeface="+mn-ea"/>
+                  <a:cs typeface="+mn-cs"/>
+                </a:defRPr>
+              </a:lvl5pPr>
+              <a:lvl6pPr marL="2286000" indent="0" algn="l" defTabSz="457200" rtl="0" eaLnBrk="1" latinLnBrk="0" hangingPunct="1">
+                <a:defRPr sz="1800" kern="1200">
+                  <a:solidFill>
+                    <a:schemeClr val="lt1"/>
+                  </a:solidFill>
+                  <a:latin typeface="+mn-lt"/>
+                  <a:ea typeface="+mn-ea"/>
+                  <a:cs typeface="+mn-cs"/>
+                </a:defRPr>
+              </a:lvl6pPr>
+              <a:lvl7pPr marL="2743200" indent="0" algn="l" defTabSz="457200" rtl="0" eaLnBrk="1" latinLnBrk="0" hangingPunct="1">
+                <a:defRPr sz="1800" kern="1200">
+                  <a:solidFill>
+                    <a:schemeClr val="lt1"/>
+                  </a:solidFill>
+                  <a:latin typeface="+mn-lt"/>
+                  <a:ea typeface="+mn-ea"/>
+                  <a:cs typeface="+mn-cs"/>
+                </a:defRPr>
+              </a:lvl7pPr>
+              <a:lvl8pPr marL="3200400" indent="0" algn="l" defTabSz="457200" rtl="0" eaLnBrk="1" latinLnBrk="0" hangingPunct="1">
+                <a:defRPr sz="1800" kern="1200">
+                  <a:solidFill>
+                    <a:schemeClr val="lt1"/>
+                  </a:solidFill>
+                  <a:latin typeface="+mn-lt"/>
+                  <a:ea typeface="+mn-ea"/>
+                  <a:cs typeface="+mn-cs"/>
+                </a:defRPr>
+              </a:lvl8pPr>
+              <a:lvl9pPr marL="3657600" indent="0" algn="l" defTabSz="457200" rtl="0" eaLnBrk="1" latinLnBrk="0" hangingPunct="1">
+                <a:defRPr sz="1800" kern="1200">
+                  <a:solidFill>
+                    <a:schemeClr val="lt1"/>
+                  </a:solidFill>
+                  <a:latin typeface="+mn-lt"/>
+                  <a:ea typeface="+mn-ea"/>
+                  <a:cs typeface="+mn-cs"/>
+                </a:defRPr>
+              </a:lvl9pPr>
+            </a:lstStyle>
+            <a:p>
+              <a:pPr algn="ctr"/>
+              <a:r>
+                <a:rPr kumimoji="0" lang="en-US" altLang="ja-JP" sz="447" b="1" i="0" u="none" strike="noStrike" kern="0" cap="none" spc="0" normalizeH="0" baseline="0">
+                  <a:ln>
+                    <a:noFill/>
+                  </a:ln>
+                  <a:solidFill>
+                    <a:srgbClr val="111111"/>
+                  </a:solidFill>
+                  <a:effectLst/>
+                  <a:uLnTx/>
+                  <a:uFillTx/>
+                  <a:latin typeface="Meiryo UI"/>
+                  <a:ea typeface="Meiryo UI"/>
+                </a:rPr>
+                <a:t>1.7 OPOS</a:t>
+              </a:r>
+              <a:r>
+                <a:rPr kumimoji="0" lang="ja-JP" altLang="en-US" sz="447" b="1" i="0" u="none" strike="noStrike" kern="0" cap="none" spc="0" normalizeH="0" baseline="0">
+                  <a:ln>
+                    <a:noFill/>
+                  </a:ln>
+                  <a:solidFill>
+                    <a:srgbClr val="111111"/>
+                  </a:solidFill>
+                  <a:effectLst/>
+                  <a:uLnTx/>
+                  <a:uFillTx/>
+                  <a:latin typeface="Meiryo UI"/>
+                  <a:ea typeface="Meiryo UI"/>
+                </a:rPr>
+                <a:t>通信クラス群
+</a:t>
+              </a:r>
+              <a:r>
+                <a:rPr kumimoji="0" lang="en-US" altLang="ja-JP" sz="447" b="1" i="0" u="none" strike="noStrike" kern="0" cap="none" spc="0" normalizeH="0" baseline="0">
+                  <a:ln>
+                    <a:noFill/>
+                  </a:ln>
+                  <a:solidFill>
+                    <a:srgbClr val="111111"/>
+                  </a:solidFill>
+                  <a:effectLst/>
+                  <a:uLnTx/>
+                  <a:uFillTx/>
+                  <a:latin typeface="Meiryo UI"/>
+                  <a:ea typeface="Meiryo UI"/>
+                </a:rPr>
+                <a:t>OposNamedPipeCommandClient
+NamedPipeClient /
+NamedPipeEventReceiver</a:t>
+              </a:r>
+              <a:endParaRPr kumimoji="0" lang="ja-JP" altLang="en-US" sz="447" b="1" i="0" u="none" strike="noStrike" kern="0" cap="none" spc="0" normalizeH="0" baseline="0">
+                <a:ln>
+                  <a:noFill/>
+                </a:ln>
+                <a:solidFill>
+                  <a:srgbClr val="111111"/>
+                </a:solidFill>
+                <a:effectLst/>
+                <a:uLnTx/>
+                <a:uFillTx/>
+                <a:latin typeface="Meiryo UI"/>
+                <a:ea typeface="Meiryo UI"/>
+              </a:endParaRPr>
+            </a:p>
+          </p:txBody>
+        </p:sp>
+        <p:sp>
+          <p:nvSpPr>
+            <p:cNvPr id="10" name="shape_d71_EXTERNAL_DOMAIN_IOS_API" title="③ 《接続境界》 iOS SDK / OS API TCP/IP・Bluetooth / カメラ・BLE">
+              <a:extLst>
+                <a:ext uri="{FF2B5EF4-FFF2-40B4-BE49-F238E27FC236}">
+                  <a16:creationId xmlns:a16="http://schemas.microsoft.com/office/drawing/2014/main" id="{BC80E38F-8D8E-EBE1-E60D-283EBFC21381}"/>
+                </a:ext>
+              </a:extLst>
+            </p:cNvPr>
+            <p:cNvSpPr/>
+            <p:nvPr/>
+          </p:nvSpPr>
+          <p:spPr>
+            <a:xfrm>
+              <a:off x="9128835" y="4015914"/>
+              <a:ext cx="1895408" cy="369552"/>
+            </a:xfrm>
+            <a:prstGeom prst="roundRect">
+              <a:avLst/>
+            </a:prstGeom>
+            <a:solidFill>
+              <a:srgbClr val="FCE4D6">
+                <a:alpha val="100000"/>
+              </a:srgbClr>
+            </a:solidFill>
+            <a:ln w="11361" cap="flat" cmpd="sng" algn="ctr">
+              <a:solidFill>
+                <a:srgbClr val="ED7D31"/>
+              </a:solidFill>
+              <a:prstDash val="solid"/>
+            </a:ln>
+            <a:effectLst/>
+          </p:spPr>
+          <p:style>
+            <a:lnRef idx="2">
+              <a:schemeClr val="accent1">
+                <a:shade val="15000"/>
+              </a:schemeClr>
+            </a:lnRef>
+            <a:fillRef idx="1">
+              <a:schemeClr val="accent1"/>
+            </a:fillRef>
+            <a:effectRef idx="0">
+              <a:schemeClr val="accent1"/>
+            </a:effectRef>
+            <a:fontRef idx="minor">
+              <a:schemeClr val="lt1"/>
+            </a:fontRef>
+          </p:style>
+          <p:txBody>
+            <a:bodyPr wrap="square" lIns="34084" tIns="17042" rIns="34084" bIns="17042" rtlCol="0" anchor="ctr">
+              <a:noAutofit/>
+            </a:bodyPr>
+            <a:lstStyle>
+              <a:defPPr>
+                <a:defRPr lang="en-US"/>
+              </a:defPPr>
+              <a:lvl1pPr marL="0" indent="0" algn="l" defTabSz="457200" rtl="0" eaLnBrk="1" latinLnBrk="0" hangingPunct="1">
+                <a:defRPr sz="1800" kern="1200">
+                  <a:solidFill>
+                    <a:schemeClr val="lt1"/>
+                  </a:solidFill>
+                  <a:latin typeface="+mn-lt"/>
+                  <a:ea typeface="+mn-ea"/>
+                  <a:cs typeface="+mn-cs"/>
+                </a:defRPr>
+              </a:lvl1pPr>
+              <a:lvl2pPr marL="457200" indent="0" algn="l" defTabSz="457200" rtl="0" eaLnBrk="1" latinLnBrk="0" hangingPunct="1">
+                <a:defRPr sz="1800" kern="1200">
+                  <a:solidFill>
+                    <a:schemeClr val="lt1"/>
+                  </a:solidFill>
+                  <a:latin typeface="+mn-lt"/>
+                  <a:ea typeface="+mn-ea"/>
+                  <a:cs typeface="+mn-cs"/>
+                </a:defRPr>
+              </a:lvl2pPr>
+              <a:lvl3pPr marL="914400" indent="0" algn="l" defTabSz="457200" rtl="0" eaLnBrk="1" latinLnBrk="0" hangingPunct="1">
+                <a:defRPr sz="1800" kern="1200">
+                  <a:solidFill>
+                    <a:schemeClr val="lt1"/>
+                  </a:solidFill>
+                  <a:latin typeface="+mn-lt"/>
+                  <a:ea typeface="+mn-ea"/>
+                  <a:cs typeface="+mn-cs"/>
+                </a:defRPr>
+              </a:lvl3pPr>
+              <a:lvl4pPr marL="1371600" indent="0" algn="l" defTabSz="457200" rtl="0" eaLnBrk="1" latinLnBrk="0" hangingPunct="1">
+                <a:defRPr sz="1800" kern="1200">
+                  <a:solidFill>
+                    <a:schemeClr val="lt1"/>
+                  </a:solidFill>
+                  <a:latin typeface="+mn-lt"/>
+                  <a:ea typeface="+mn-ea"/>
+                  <a:cs typeface="+mn-cs"/>
+                </a:defRPr>
+              </a:lvl4pPr>
+              <a:lvl5pPr marL="1828800" indent="0" algn="l" defTabSz="457200" rtl="0" eaLnBrk="1" latinLnBrk="0" hangingPunct="1">
+                <a:defRPr sz="1800" kern="1200">
+                  <a:solidFill>
+                    <a:schemeClr val="lt1"/>
+                  </a:solidFill>
+                  <a:latin typeface="+mn-lt"/>
+                  <a:ea typeface="+mn-ea"/>
+                  <a:cs typeface="+mn-cs"/>
+                </a:defRPr>
+              </a:lvl5pPr>
+              <a:lvl6pPr marL="2286000" indent="0" algn="l" defTabSz="457200" rtl="0" eaLnBrk="1" latinLnBrk="0" hangingPunct="1">
+                <a:defRPr sz="1800" kern="1200">
+                  <a:solidFill>
+                    <a:schemeClr val="lt1"/>
+                  </a:solidFill>
+                  <a:latin typeface="+mn-lt"/>
+                  <a:ea typeface="+mn-ea"/>
+                  <a:cs typeface="+mn-cs"/>
+                </a:defRPr>
+              </a:lvl6pPr>
+              <a:lvl7pPr marL="2743200" indent="0" algn="l" defTabSz="457200" rtl="0" eaLnBrk="1" latinLnBrk="0" hangingPunct="1">
+                <a:defRPr sz="1800" kern="1200">
+                  <a:solidFill>
+                    <a:schemeClr val="lt1"/>
+                  </a:solidFill>
+                  <a:latin typeface="+mn-lt"/>
+                  <a:ea typeface="+mn-ea"/>
+                  <a:cs typeface="+mn-cs"/>
+                </a:defRPr>
+              </a:lvl7pPr>
+              <a:lvl8pPr marL="3200400" indent="0" algn="l" defTabSz="457200" rtl="0" eaLnBrk="1" latinLnBrk="0" hangingPunct="1">
+                <a:defRPr sz="1800" kern="1200">
+                  <a:solidFill>
+                    <a:schemeClr val="lt1"/>
+                  </a:solidFill>
+                  <a:latin typeface="+mn-lt"/>
+                  <a:ea typeface="+mn-ea"/>
+                  <a:cs typeface="+mn-cs"/>
+                </a:defRPr>
+              </a:lvl8pPr>
+              <a:lvl9pPr marL="3657600" indent="0" algn="l" defTabSz="457200" rtl="0" eaLnBrk="1" latinLnBrk="0" hangingPunct="1">
+                <a:defRPr sz="1800" kern="1200">
+                  <a:solidFill>
+                    <a:schemeClr val="lt1"/>
+                  </a:solidFill>
+                  <a:latin typeface="+mn-lt"/>
+                  <a:ea typeface="+mn-ea"/>
+                  <a:cs typeface="+mn-cs"/>
+                </a:defRPr>
+              </a:lvl9pPr>
+            </a:lstStyle>
+            <a:p>
+              <a:pPr algn="ctr"/>
+              <a:r>
+                <a:rPr kumimoji="0" lang="ja-JP" altLang="en-US" sz="447" b="1" i="0" u="none" strike="noStrike" kern="0" cap="none" spc="0" normalizeH="0" baseline="0">
+                  <a:ln>
+                    <a:noFill/>
+                  </a:ln>
+                  <a:solidFill>
+                    <a:srgbClr val="111111"/>
+                  </a:solidFill>
+                  <a:effectLst/>
+                  <a:uLnTx/>
+                  <a:uFillTx/>
+                  <a:latin typeface="Meiryo UI"/>
+                  <a:ea typeface="Meiryo UI"/>
+                </a:rPr>
+                <a:t>2.3 </a:t>
+              </a:r>
+              <a:r>
+                <a:rPr kumimoji="0" lang="en-US" altLang="ja-JP" sz="447" b="1" i="0" u="none" strike="noStrike" kern="0" cap="none" spc="0" normalizeH="0" baseline="0">
+                  <a:ln>
+                    <a:noFill/>
+                  </a:ln>
+                  <a:solidFill>
+                    <a:srgbClr val="111111"/>
+                  </a:solidFill>
+                  <a:effectLst/>
+                  <a:uLnTx/>
+                  <a:uFillTx/>
+                  <a:latin typeface="Meiryo UI"/>
+                  <a:ea typeface="Meiryo UI"/>
+                </a:rPr>
+                <a:t>《</a:t>
+              </a:r>
+              <a:r>
+                <a:rPr kumimoji="0" lang="ja-JP" altLang="en-US" sz="447" b="1" i="0" u="none" strike="noStrike" kern="0" cap="none" spc="0" normalizeH="0" baseline="0">
+                  <a:ln>
+                    <a:noFill/>
+                  </a:ln>
+                  <a:solidFill>
+                    <a:srgbClr val="111111"/>
+                  </a:solidFill>
+                  <a:effectLst/>
+                  <a:uLnTx/>
+                  <a:uFillTx/>
+                  <a:latin typeface="Meiryo UI"/>
+                  <a:ea typeface="Meiryo UI"/>
+                </a:rPr>
+                <a:t>接続境界</a:t>
+              </a:r>
+              <a:r>
+                <a:rPr kumimoji="0" lang="en-US" altLang="ja-JP" sz="447" b="1" i="0" u="none" strike="noStrike" kern="0" cap="none" spc="0" normalizeH="0" baseline="0">
+                  <a:ln>
+                    <a:noFill/>
+                  </a:ln>
+                  <a:solidFill>
+                    <a:srgbClr val="111111"/>
+                  </a:solidFill>
+                  <a:effectLst/>
+                  <a:uLnTx/>
+                  <a:uFillTx/>
+                  <a:latin typeface="Meiryo UI"/>
+                  <a:ea typeface="Meiryo UI"/>
+                </a:rPr>
+                <a:t>》
+iOS SDK / OS API
+TCP/IP</a:t>
+              </a:r>
+              <a:r>
+                <a:rPr kumimoji="0" lang="ja-JP" altLang="en-US" sz="447" b="1" i="0" u="none" strike="noStrike" kern="0" cap="none" spc="0" normalizeH="0" baseline="0">
+                  <a:ln>
+                    <a:noFill/>
+                  </a:ln>
+                  <a:solidFill>
+                    <a:srgbClr val="111111"/>
+                  </a:solidFill>
+                  <a:effectLst/>
+                  <a:uLnTx/>
+                  <a:uFillTx/>
+                  <a:latin typeface="Meiryo UI"/>
+                  <a:ea typeface="Meiryo UI"/>
+                </a:rPr>
+                <a:t>・</a:t>
+              </a:r>
+              <a:r>
+                <a:rPr kumimoji="0" lang="en-US" altLang="ja-JP" sz="447" b="1" i="0" u="none" strike="noStrike" kern="0" cap="none" spc="0" normalizeH="0" baseline="0">
+                  <a:ln>
+                    <a:noFill/>
+                  </a:ln>
+                  <a:solidFill>
+                    <a:srgbClr val="111111"/>
+                  </a:solidFill>
+                  <a:effectLst/>
+                  <a:uLnTx/>
+                  <a:uFillTx/>
+                  <a:latin typeface="Meiryo UI"/>
+                  <a:ea typeface="Meiryo UI"/>
+                </a:rPr>
+                <a:t>Bluetooth / </a:t>
+              </a:r>
+              <a:r>
+                <a:rPr kumimoji="0" lang="ja-JP" altLang="en-US" sz="447" b="1" i="0" u="none" strike="noStrike" kern="0" cap="none" spc="0" normalizeH="0" baseline="0">
+                  <a:ln>
+                    <a:noFill/>
+                  </a:ln>
+                  <a:solidFill>
+                    <a:srgbClr val="111111"/>
+                  </a:solidFill>
+                  <a:effectLst/>
+                  <a:uLnTx/>
+                  <a:uFillTx/>
+                  <a:latin typeface="Meiryo UI"/>
+                  <a:ea typeface="Meiryo UI"/>
+                </a:rPr>
+                <a:t>カメラ・</a:t>
+              </a:r>
+              <a:r>
+                <a:rPr kumimoji="0" lang="en-US" altLang="ja-JP" sz="447" b="1" i="0" u="none" strike="noStrike" kern="0" cap="none" spc="0" normalizeH="0" baseline="0">
+                  <a:ln>
+                    <a:noFill/>
+                  </a:ln>
+                  <a:solidFill>
+                    <a:srgbClr val="111111"/>
+                  </a:solidFill>
+                  <a:effectLst/>
+                  <a:uLnTx/>
+                  <a:uFillTx/>
+                  <a:latin typeface="Meiryo UI"/>
+                  <a:ea typeface="Meiryo UI"/>
+                </a:rPr>
+                <a:t>BLE</a:t>
+              </a:r>
+              <a:endParaRPr kumimoji="0" lang="ja-JP" altLang="en-US" sz="447" b="1" i="0" u="none" strike="noStrike" kern="0" cap="none" spc="0" normalizeH="0" baseline="0">
+                <a:ln>
+                  <a:noFill/>
+                </a:ln>
+                <a:solidFill>
+                  <a:srgbClr val="111111"/>
+                </a:solidFill>
+                <a:effectLst/>
+                <a:uLnTx/>
+                <a:uFillTx/>
+                <a:latin typeface="Meiryo UI"/>
+                <a:ea typeface="Meiryo UI"/>
+              </a:endParaRPr>
+            </a:p>
+          </p:txBody>
+        </p:sp>
+        <p:sp>
+          <p:nvSpPr>
+            <p:cNvPr id="11" name="shape_d71_PLATFORM_DOMAIN_WIN_DIRECT" title="④ Windows直接接続 SerialHandyScannerStrategy等">
+              <a:extLst>
+                <a:ext uri="{FF2B5EF4-FFF2-40B4-BE49-F238E27FC236}">
+                  <a16:creationId xmlns:a16="http://schemas.microsoft.com/office/drawing/2014/main" id="{70E9D9EF-DBFC-9EF3-66B7-E831677C7D33}"/>
+                </a:ext>
+              </a:extLst>
+            </p:cNvPr>
+            <p:cNvSpPr/>
+            <p:nvPr/>
+          </p:nvSpPr>
+          <p:spPr>
+            <a:xfrm>
+              <a:off x="4977352" y="4534459"/>
+              <a:ext cx="1192187" cy="446921"/>
+            </a:xfrm>
+            <a:prstGeom prst="roundRect">
+              <a:avLst/>
+            </a:prstGeom>
+            <a:solidFill>
+              <a:srgbClr val="F8FBFD">
+                <a:alpha val="100000"/>
+              </a:srgbClr>
+            </a:solidFill>
+            <a:ln w="11361" cap="flat" cmpd="sng" algn="ctr">
+              <a:solidFill>
+                <a:srgbClr val="0D32B2"/>
+              </a:solidFill>
+              <a:prstDash val="solid"/>
+            </a:ln>
+            <a:effectLst/>
+          </p:spPr>
+          <p:style>
+            <a:lnRef idx="2">
+              <a:schemeClr val="accent1">
+                <a:shade val="15000"/>
+              </a:schemeClr>
+            </a:lnRef>
+            <a:fillRef idx="1">
+              <a:schemeClr val="accent1"/>
+            </a:fillRef>
+            <a:effectRef idx="0">
+              <a:schemeClr val="accent1"/>
+            </a:effectRef>
+            <a:fontRef idx="minor">
+              <a:schemeClr val="lt1"/>
+            </a:fontRef>
+          </p:style>
+          <p:txBody>
+            <a:bodyPr wrap="square" lIns="34084" tIns="17042" rIns="34084" bIns="17042" rtlCol="0" anchor="ctr">
+              <a:noAutofit/>
+            </a:bodyPr>
+            <a:lstStyle>
+              <a:defPPr>
+                <a:defRPr lang="en-US"/>
+              </a:defPPr>
+              <a:lvl1pPr marL="0" indent="0" algn="l" defTabSz="457200" rtl="0" eaLnBrk="1" latinLnBrk="0" hangingPunct="1">
+                <a:defRPr sz="1800" kern="1200">
+                  <a:solidFill>
+                    <a:schemeClr val="lt1"/>
+                  </a:solidFill>
+                  <a:latin typeface="+mn-lt"/>
+                  <a:ea typeface="+mn-ea"/>
+                  <a:cs typeface="+mn-cs"/>
+                </a:defRPr>
+              </a:lvl1pPr>
+              <a:lvl2pPr marL="457200" indent="0" algn="l" defTabSz="457200" rtl="0" eaLnBrk="1" latinLnBrk="0" hangingPunct="1">
+                <a:defRPr sz="1800" kern="1200">
+                  <a:solidFill>
+                    <a:schemeClr val="lt1"/>
+                  </a:solidFill>
+                  <a:latin typeface="+mn-lt"/>
+                  <a:ea typeface="+mn-ea"/>
+                  <a:cs typeface="+mn-cs"/>
+                </a:defRPr>
+              </a:lvl2pPr>
+              <a:lvl3pPr marL="914400" indent="0" algn="l" defTabSz="457200" rtl="0" eaLnBrk="1" latinLnBrk="0" hangingPunct="1">
+                <a:defRPr sz="1800" kern="1200">
+                  <a:solidFill>
+                    <a:schemeClr val="lt1"/>
+                  </a:solidFill>
+                  <a:latin typeface="+mn-lt"/>
+                  <a:ea typeface="+mn-ea"/>
+                  <a:cs typeface="+mn-cs"/>
+                </a:defRPr>
+              </a:lvl3pPr>
+              <a:lvl4pPr marL="1371600" indent="0" algn="l" defTabSz="457200" rtl="0" eaLnBrk="1" latinLnBrk="0" hangingPunct="1">
+                <a:defRPr sz="1800" kern="1200">
+                  <a:solidFill>
+                    <a:schemeClr val="lt1"/>
+                  </a:solidFill>
+                  <a:latin typeface="+mn-lt"/>
+                  <a:ea typeface="+mn-ea"/>
+                  <a:cs typeface="+mn-cs"/>
+                </a:defRPr>
+              </a:lvl4pPr>
+              <a:lvl5pPr marL="1828800" indent="0" algn="l" defTabSz="457200" rtl="0" eaLnBrk="1" latinLnBrk="0" hangingPunct="1">
+                <a:defRPr sz="1800" kern="1200">
+                  <a:solidFill>
+                    <a:schemeClr val="lt1"/>
+                  </a:solidFill>
+                  <a:latin typeface="+mn-lt"/>
+                  <a:ea typeface="+mn-ea"/>
+                  <a:cs typeface="+mn-cs"/>
+                </a:defRPr>
+              </a:lvl5pPr>
+              <a:lvl6pPr marL="2286000" indent="0" algn="l" defTabSz="457200" rtl="0" eaLnBrk="1" latinLnBrk="0" hangingPunct="1">
+                <a:defRPr sz="1800" kern="1200">
+                  <a:solidFill>
+                    <a:schemeClr val="lt1"/>
+                  </a:solidFill>
+                  <a:latin typeface="+mn-lt"/>
+                  <a:ea typeface="+mn-ea"/>
+                  <a:cs typeface="+mn-cs"/>
+                </a:defRPr>
+              </a:lvl6pPr>
+              <a:lvl7pPr marL="2743200" indent="0" algn="l" defTabSz="457200" rtl="0" eaLnBrk="1" latinLnBrk="0" hangingPunct="1">
+                <a:defRPr sz="1800" kern="1200">
+                  <a:solidFill>
+                    <a:schemeClr val="lt1"/>
+                  </a:solidFill>
+                  <a:latin typeface="+mn-lt"/>
+                  <a:ea typeface="+mn-ea"/>
+                  <a:cs typeface="+mn-cs"/>
+                </a:defRPr>
+              </a:lvl7pPr>
+              <a:lvl8pPr marL="3200400" indent="0" algn="l" defTabSz="457200" rtl="0" eaLnBrk="1" latinLnBrk="0" hangingPunct="1">
+                <a:defRPr sz="1800" kern="1200">
+                  <a:solidFill>
+                    <a:schemeClr val="lt1"/>
+                  </a:solidFill>
+                  <a:latin typeface="+mn-lt"/>
+                  <a:ea typeface="+mn-ea"/>
+                  <a:cs typeface="+mn-cs"/>
+                </a:defRPr>
+              </a:lvl8pPr>
+              <a:lvl9pPr marL="3657600" indent="0" algn="l" defTabSz="457200" rtl="0" eaLnBrk="1" latinLnBrk="0" hangingPunct="1">
+                <a:defRPr sz="1800" kern="1200">
+                  <a:solidFill>
+                    <a:schemeClr val="lt1"/>
+                  </a:solidFill>
+                  <a:latin typeface="+mn-lt"/>
+                  <a:ea typeface="+mn-ea"/>
+                  <a:cs typeface="+mn-cs"/>
+                </a:defRPr>
+              </a:lvl9pPr>
+            </a:lstStyle>
+            <a:p>
+              <a:pPr algn="ctr"/>
+              <a:r>
+                <a:rPr kumimoji="0" lang="en-US" altLang="ja-JP" sz="447" b="1" i="0" u="none" strike="noStrike" kern="0" cap="none" spc="0" normalizeH="0" baseline="0">
+                  <a:ln>
+                    <a:noFill/>
+                  </a:ln>
+                  <a:solidFill>
+                    <a:srgbClr val="111111"/>
+                  </a:solidFill>
+                  <a:effectLst/>
+                  <a:uLnTx/>
+                  <a:uFillTx/>
+                  <a:latin typeface="Meiryo UI"/>
+                  <a:ea typeface="Meiryo UI"/>
+                </a:rPr>
+                <a:t>1.4 Windows</a:t>
+              </a:r>
+              <a:r>
+                <a:rPr kumimoji="0" lang="ja-JP" altLang="en-US" sz="447" b="1" i="0" u="none" strike="noStrike" kern="0" cap="none" spc="0" normalizeH="0" baseline="0">
+                  <a:ln>
+                    <a:noFill/>
+                  </a:ln>
+                  <a:solidFill>
+                    <a:srgbClr val="111111"/>
+                  </a:solidFill>
+                  <a:effectLst/>
+                  <a:uLnTx/>
+                  <a:uFillTx/>
+                  <a:latin typeface="Meiryo UI"/>
+                  <a:ea typeface="Meiryo UI"/>
+                </a:rPr>
+                <a:t>直接接続
+</a:t>
+              </a:r>
+              <a:r>
+                <a:rPr kumimoji="0" lang="en-US" altLang="ja-JP" sz="447" b="1" i="0" u="none" strike="noStrike" kern="0" cap="none" spc="0" normalizeH="0" baseline="0">
+                  <a:ln>
+                    <a:noFill/>
+                  </a:ln>
+                  <a:solidFill>
+                    <a:srgbClr val="111111"/>
+                  </a:solidFill>
+                  <a:effectLst/>
+                  <a:uLnTx/>
+                  <a:uFillTx/>
+                  <a:latin typeface="Meiryo UI"/>
+                  <a:ea typeface="Meiryo UI"/>
+                </a:rPr>
+                <a:t>SerialHandyScannerStrategy</a:t>
+              </a:r>
+              <a:r>
+                <a:rPr kumimoji="0" lang="ja-JP" altLang="en-US" sz="447" b="1" i="0" u="none" strike="noStrike" kern="0" cap="none" spc="0" normalizeH="0" baseline="0">
+                  <a:ln>
+                    <a:noFill/>
+                  </a:ln>
+                  <a:solidFill>
+                    <a:srgbClr val="111111"/>
+                  </a:solidFill>
+                  <a:effectLst/>
+                  <a:uLnTx/>
+                  <a:uFillTx/>
+                  <a:latin typeface="Meiryo UI"/>
+                  <a:ea typeface="Meiryo UI"/>
+                </a:rPr>
+                <a:t>等</a:t>
+              </a:r>
+            </a:p>
+          </p:txBody>
+        </p:sp>
+        <p:sp>
+          <p:nvSpPr>
+            <p:cNvPr id="12" name="shape_d71_EXTERNAL_DOMAIN_ANDROID_API" title="④ 《接続境界》 Android API Bluetooth / カメラ / USB">
+              <a:extLst>
+                <a:ext uri="{FF2B5EF4-FFF2-40B4-BE49-F238E27FC236}">
+                  <a16:creationId xmlns:a16="http://schemas.microsoft.com/office/drawing/2014/main" id="{6F76B2CA-FB2E-7AC6-5B58-19B793005619}"/>
+                </a:ext>
+              </a:extLst>
+            </p:cNvPr>
+            <p:cNvSpPr/>
+            <p:nvPr/>
+          </p:nvSpPr>
+          <p:spPr>
+            <a:xfrm>
+              <a:off x="9121233" y="2376000"/>
+              <a:ext cx="1650174" cy="454867"/>
+            </a:xfrm>
+            <a:prstGeom prst="roundRect">
+              <a:avLst/>
+            </a:prstGeom>
+            <a:solidFill>
+              <a:srgbClr val="F2F2F2">
+                <a:alpha val="100000"/>
+              </a:srgbClr>
+            </a:solidFill>
+            <a:ln w="11361" cap="flat" cmpd="sng" algn="ctr">
+              <a:solidFill>
+                <a:srgbClr val="7F7F7F"/>
+              </a:solidFill>
+              <a:prstDash val="dash"/>
+            </a:ln>
+            <a:effectLst/>
+          </p:spPr>
+          <p:style>
+            <a:lnRef idx="2">
+              <a:schemeClr val="accent1">
+                <a:shade val="15000"/>
+              </a:schemeClr>
+            </a:lnRef>
+            <a:fillRef idx="1">
+              <a:schemeClr val="accent1"/>
+            </a:fillRef>
+            <a:effectRef idx="0">
+              <a:schemeClr val="accent1"/>
+            </a:effectRef>
+            <a:fontRef idx="minor">
+              <a:schemeClr val="lt1"/>
+            </a:fontRef>
+          </p:style>
+          <p:txBody>
+            <a:bodyPr wrap="square" lIns="34084" tIns="17042" rIns="34084" bIns="17042" rtlCol="0" anchor="ctr">
+              <a:noAutofit/>
+            </a:bodyPr>
+            <a:lstStyle>
+              <a:defPPr>
+                <a:defRPr lang="en-US"/>
+              </a:defPPr>
+              <a:lvl1pPr marL="0" indent="0" algn="l" defTabSz="457200" rtl="0" eaLnBrk="1" latinLnBrk="0" hangingPunct="1">
+                <a:defRPr sz="1800" kern="1200">
+                  <a:solidFill>
+                    <a:schemeClr val="lt1"/>
+                  </a:solidFill>
+                  <a:latin typeface="+mn-lt"/>
+                  <a:ea typeface="+mn-ea"/>
+                  <a:cs typeface="+mn-cs"/>
+                </a:defRPr>
+              </a:lvl1pPr>
+              <a:lvl2pPr marL="457200" indent="0" algn="l" defTabSz="457200" rtl="0" eaLnBrk="1" latinLnBrk="0" hangingPunct="1">
+                <a:defRPr sz="1800" kern="1200">
+                  <a:solidFill>
+                    <a:schemeClr val="lt1"/>
+                  </a:solidFill>
+                  <a:latin typeface="+mn-lt"/>
+                  <a:ea typeface="+mn-ea"/>
+                  <a:cs typeface="+mn-cs"/>
+                </a:defRPr>
+              </a:lvl2pPr>
+              <a:lvl3pPr marL="914400" indent="0" algn="l" defTabSz="457200" rtl="0" eaLnBrk="1" latinLnBrk="0" hangingPunct="1">
+                <a:defRPr sz="1800" kern="1200">
+                  <a:solidFill>
+                    <a:schemeClr val="lt1"/>
+                  </a:solidFill>
+                  <a:latin typeface="+mn-lt"/>
+                  <a:ea typeface="+mn-ea"/>
+                  <a:cs typeface="+mn-cs"/>
+                </a:defRPr>
+              </a:lvl3pPr>
+              <a:lvl4pPr marL="1371600" indent="0" algn="l" defTabSz="457200" rtl="0" eaLnBrk="1" latinLnBrk="0" hangingPunct="1">
+                <a:defRPr sz="1800" kern="1200">
+                  <a:solidFill>
+                    <a:schemeClr val="lt1"/>
+                  </a:solidFill>
+                  <a:latin typeface="+mn-lt"/>
+                  <a:ea typeface="+mn-ea"/>
+                  <a:cs typeface="+mn-cs"/>
+                </a:defRPr>
+              </a:lvl4pPr>
+              <a:lvl5pPr marL="1828800" indent="0" algn="l" defTabSz="457200" rtl="0" eaLnBrk="1" latinLnBrk="0" hangingPunct="1">
+                <a:defRPr sz="1800" kern="1200">
+                  <a:solidFill>
+                    <a:schemeClr val="lt1"/>
+                  </a:solidFill>
+                  <a:latin typeface="+mn-lt"/>
+                  <a:ea typeface="+mn-ea"/>
+                  <a:cs typeface="+mn-cs"/>
+                </a:defRPr>
+              </a:lvl5pPr>
+              <a:lvl6pPr marL="2286000" indent="0" algn="l" defTabSz="457200" rtl="0" eaLnBrk="1" latinLnBrk="0" hangingPunct="1">
+                <a:defRPr sz="1800" kern="1200">
+                  <a:solidFill>
+                    <a:schemeClr val="lt1"/>
+                  </a:solidFill>
+                  <a:latin typeface="+mn-lt"/>
+                  <a:ea typeface="+mn-ea"/>
+                  <a:cs typeface="+mn-cs"/>
+                </a:defRPr>
+              </a:lvl6pPr>
+              <a:lvl7pPr marL="2743200" indent="0" algn="l" defTabSz="457200" rtl="0" eaLnBrk="1" latinLnBrk="0" hangingPunct="1">
+                <a:defRPr sz="1800" kern="1200">
+                  <a:solidFill>
+                    <a:schemeClr val="lt1"/>
+                  </a:solidFill>
+                  <a:latin typeface="+mn-lt"/>
+                  <a:ea typeface="+mn-ea"/>
+                  <a:cs typeface="+mn-cs"/>
+                </a:defRPr>
+              </a:lvl7pPr>
+              <a:lvl8pPr marL="3200400" indent="0" algn="l" defTabSz="457200" rtl="0" eaLnBrk="1" latinLnBrk="0" hangingPunct="1">
+                <a:defRPr sz="1800" kern="1200">
+                  <a:solidFill>
+                    <a:schemeClr val="lt1"/>
+                  </a:solidFill>
+                  <a:latin typeface="+mn-lt"/>
+                  <a:ea typeface="+mn-ea"/>
+                  <a:cs typeface="+mn-cs"/>
+                </a:defRPr>
+              </a:lvl8pPr>
+              <a:lvl9pPr marL="3657600" indent="0" algn="l" defTabSz="457200" rtl="0" eaLnBrk="1" latinLnBrk="0" hangingPunct="1">
+                <a:defRPr sz="1800" kern="1200">
+                  <a:solidFill>
+                    <a:schemeClr val="lt1"/>
+                  </a:solidFill>
+                  <a:latin typeface="+mn-lt"/>
+                  <a:ea typeface="+mn-ea"/>
+                  <a:cs typeface="+mn-cs"/>
+                </a:defRPr>
+              </a:lvl9pPr>
+            </a:lstStyle>
+            <a:p>
+              <a:pPr algn="ctr"/>
+              <a:r>
+                <a:rPr kumimoji="0" lang="ja-JP" altLang="en-US" sz="447" b="1" i="0" u="none" strike="noStrike" kern="0" cap="none" spc="0" normalizeH="0" baseline="0">
+                  <a:ln>
+                    <a:noFill/>
+                  </a:ln>
+                  <a:solidFill>
+                    <a:srgbClr val="666666"/>
+                  </a:solidFill>
+                  <a:effectLst/>
+                  <a:uLnTx/>
+                  <a:uFillTx/>
+                  <a:latin typeface="Meiryo UI"/>
+                  <a:ea typeface="Meiryo UI"/>
+                </a:rPr>
+                <a:t>2.4 </a:t>
+              </a:r>
+              <a:r>
+                <a:rPr kumimoji="0" lang="en-US" altLang="ja-JP" sz="447" b="1" i="0" u="none" strike="noStrike" kern="0" cap="none" spc="0" normalizeH="0" baseline="0">
+                  <a:ln>
+                    <a:noFill/>
+                  </a:ln>
+                  <a:solidFill>
+                    <a:srgbClr val="666666"/>
+                  </a:solidFill>
+                  <a:effectLst/>
+                  <a:uLnTx/>
+                  <a:uFillTx/>
+                  <a:latin typeface="Meiryo UI"/>
+                  <a:ea typeface="Meiryo UI"/>
+                </a:rPr>
+                <a:t>《</a:t>
+              </a:r>
+              <a:r>
+                <a:rPr kumimoji="0" lang="ja-JP" altLang="en-US" sz="447" b="1" i="0" u="none" strike="noStrike" kern="0" cap="none" spc="0" normalizeH="0" baseline="0">
+                  <a:ln>
+                    <a:noFill/>
+                  </a:ln>
+                  <a:solidFill>
+                    <a:srgbClr val="666666"/>
+                  </a:solidFill>
+                  <a:effectLst/>
+                  <a:uLnTx/>
+                  <a:uFillTx/>
+                  <a:latin typeface="Meiryo UI"/>
+                  <a:ea typeface="Meiryo UI"/>
+                </a:rPr>
+                <a:t>接続境界</a:t>
+              </a:r>
+              <a:r>
+                <a:rPr kumimoji="0" lang="en-US" altLang="ja-JP" sz="447" b="1" i="0" u="none" strike="noStrike" kern="0" cap="none" spc="0" normalizeH="0" baseline="0">
+                  <a:ln>
+                    <a:noFill/>
+                  </a:ln>
+                  <a:solidFill>
+                    <a:srgbClr val="666666"/>
+                  </a:solidFill>
+                  <a:effectLst/>
+                  <a:uLnTx/>
+                  <a:uFillTx/>
+                  <a:latin typeface="Meiryo UI"/>
+                  <a:ea typeface="Meiryo UI"/>
+                </a:rPr>
+                <a:t>》
+Android API
+Bluetooth / </a:t>
+              </a:r>
+              <a:r>
+                <a:rPr kumimoji="0" lang="ja-JP" altLang="en-US" sz="447" b="1" i="0" u="none" strike="noStrike" kern="0" cap="none" spc="0" normalizeH="0" baseline="0">
+                  <a:ln>
+                    <a:noFill/>
+                  </a:ln>
+                  <a:solidFill>
+                    <a:srgbClr val="666666"/>
+                  </a:solidFill>
+                  <a:effectLst/>
+                  <a:uLnTx/>
+                  <a:uFillTx/>
+                  <a:latin typeface="Meiryo UI"/>
+                  <a:ea typeface="Meiryo UI"/>
+                </a:rPr>
+                <a:t>カメラ </a:t>
+              </a:r>
+              <a:r>
+                <a:rPr kumimoji="0" lang="en-US" altLang="ja-JP" sz="447" b="1" i="0" u="none" strike="noStrike" kern="0" cap="none" spc="0" normalizeH="0" baseline="0">
+                  <a:ln>
+                    <a:noFill/>
+                  </a:ln>
+                  <a:solidFill>
+                    <a:srgbClr val="666666"/>
+                  </a:solidFill>
+                  <a:effectLst/>
+                  <a:uLnTx/>
+                  <a:uFillTx/>
+                  <a:latin typeface="Meiryo UI"/>
+                  <a:ea typeface="Meiryo UI"/>
+                </a:rPr>
+                <a:t>/ USB</a:t>
+              </a:r>
+              <a:endParaRPr kumimoji="0" lang="ja-JP" altLang="en-US" sz="447" b="1" i="0" u="none" strike="noStrike" kern="0" cap="none" spc="0" normalizeH="0" baseline="0">
+                <a:ln>
+                  <a:noFill/>
+                </a:ln>
+                <a:solidFill>
+                  <a:srgbClr val="666666"/>
+                </a:solidFill>
+                <a:effectLst/>
+                <a:uLnTx/>
+                <a:uFillTx/>
+                <a:latin typeface="Meiryo UI"/>
+                <a:ea typeface="Meiryo UI"/>
+              </a:endParaRPr>
+            </a:p>
+          </p:txBody>
+        </p:sp>
+        <p:sp>
+          <p:nvSpPr>
+            <p:cNvPr id="13" name="shape_d71_EXTERNAL_DOMAIN_WIN_API" title="② 《接続境界》 Windows API SerialPort / Raw Input">
+              <a:extLst>
+                <a:ext uri="{FF2B5EF4-FFF2-40B4-BE49-F238E27FC236}">
+                  <a16:creationId xmlns:a16="http://schemas.microsoft.com/office/drawing/2014/main" id="{D1A83C5A-9DDF-661A-8A7A-D1E4F4A1AD96}"/>
+                </a:ext>
+              </a:extLst>
+            </p:cNvPr>
+            <p:cNvSpPr/>
+            <p:nvPr/>
+          </p:nvSpPr>
+          <p:spPr>
+            <a:xfrm>
+              <a:off x="9139093" y="4582080"/>
+              <a:ext cx="1791034" cy="362649"/>
+            </a:xfrm>
+            <a:prstGeom prst="roundRect">
+              <a:avLst/>
+            </a:prstGeom>
+            <a:solidFill>
+              <a:srgbClr val="FCE4D6">
+                <a:alpha val="100000"/>
+              </a:srgbClr>
+            </a:solidFill>
+            <a:ln w="11361" cap="flat" cmpd="sng" algn="ctr">
+              <a:solidFill>
+                <a:srgbClr val="ED7D31"/>
+              </a:solidFill>
+              <a:prstDash val="solid"/>
+            </a:ln>
+            <a:effectLst/>
+          </p:spPr>
+          <p:style>
+            <a:lnRef idx="2">
+              <a:schemeClr val="accent1">
+                <a:shade val="15000"/>
+              </a:schemeClr>
+            </a:lnRef>
+            <a:fillRef idx="1">
+              <a:schemeClr val="accent1"/>
+            </a:fillRef>
+            <a:effectRef idx="0">
+              <a:schemeClr val="accent1"/>
+            </a:effectRef>
+            <a:fontRef idx="minor">
+              <a:schemeClr val="lt1"/>
+            </a:fontRef>
+          </p:style>
+          <p:txBody>
+            <a:bodyPr wrap="square" lIns="34084" tIns="17042" rIns="34084" bIns="17042" rtlCol="0" anchor="ctr">
+              <a:noAutofit/>
+            </a:bodyPr>
+            <a:lstStyle>
+              <a:defPPr>
+                <a:defRPr lang="en-US"/>
+              </a:defPPr>
+              <a:lvl1pPr marL="0" indent="0" algn="l" defTabSz="457200" rtl="0" eaLnBrk="1" latinLnBrk="0" hangingPunct="1">
+                <a:defRPr sz="1800" kern="1200">
+                  <a:solidFill>
+                    <a:schemeClr val="lt1"/>
+                  </a:solidFill>
+                  <a:latin typeface="+mn-lt"/>
+                  <a:ea typeface="+mn-ea"/>
+                  <a:cs typeface="+mn-cs"/>
+                </a:defRPr>
+              </a:lvl1pPr>
+              <a:lvl2pPr marL="457200" indent="0" algn="l" defTabSz="457200" rtl="0" eaLnBrk="1" latinLnBrk="0" hangingPunct="1">
+                <a:defRPr sz="1800" kern="1200">
+                  <a:solidFill>
+                    <a:schemeClr val="lt1"/>
+                  </a:solidFill>
+                  <a:latin typeface="+mn-lt"/>
+                  <a:ea typeface="+mn-ea"/>
+                  <a:cs typeface="+mn-cs"/>
+                </a:defRPr>
+              </a:lvl2pPr>
+              <a:lvl3pPr marL="914400" indent="0" algn="l" defTabSz="457200" rtl="0" eaLnBrk="1" latinLnBrk="0" hangingPunct="1">
+                <a:defRPr sz="1800" kern="1200">
+                  <a:solidFill>
+                    <a:schemeClr val="lt1"/>
+                  </a:solidFill>
+                  <a:latin typeface="+mn-lt"/>
+                  <a:ea typeface="+mn-ea"/>
+                  <a:cs typeface="+mn-cs"/>
+                </a:defRPr>
+              </a:lvl3pPr>
+              <a:lvl4pPr marL="1371600" indent="0" algn="l" defTabSz="457200" rtl="0" eaLnBrk="1" latinLnBrk="0" hangingPunct="1">
+                <a:defRPr sz="1800" kern="1200">
+                  <a:solidFill>
+                    <a:schemeClr val="lt1"/>
+                  </a:solidFill>
+                  <a:latin typeface="+mn-lt"/>
+                  <a:ea typeface="+mn-ea"/>
+                  <a:cs typeface="+mn-cs"/>
+                </a:defRPr>
+              </a:lvl4pPr>
+              <a:lvl5pPr marL="1828800" indent="0" algn="l" defTabSz="457200" rtl="0" eaLnBrk="1" latinLnBrk="0" hangingPunct="1">
+                <a:defRPr sz="1800" kern="1200">
+                  <a:solidFill>
+                    <a:schemeClr val="lt1"/>
+                  </a:solidFill>
+                  <a:latin typeface="+mn-lt"/>
+                  <a:ea typeface="+mn-ea"/>
+                  <a:cs typeface="+mn-cs"/>
+                </a:defRPr>
+              </a:lvl5pPr>
+              <a:lvl6pPr marL="2286000" indent="0" algn="l" defTabSz="457200" rtl="0" eaLnBrk="1" latinLnBrk="0" hangingPunct="1">
+                <a:defRPr sz="1800" kern="1200">
+                  <a:solidFill>
+                    <a:schemeClr val="lt1"/>
+                  </a:solidFill>
+                  <a:latin typeface="+mn-lt"/>
+                  <a:ea typeface="+mn-ea"/>
+                  <a:cs typeface="+mn-cs"/>
+                </a:defRPr>
+              </a:lvl6pPr>
+              <a:lvl7pPr marL="2743200" indent="0" algn="l" defTabSz="457200" rtl="0" eaLnBrk="1" latinLnBrk="0" hangingPunct="1">
+                <a:defRPr sz="1800" kern="1200">
+                  <a:solidFill>
+                    <a:schemeClr val="lt1"/>
+                  </a:solidFill>
+                  <a:latin typeface="+mn-lt"/>
+                  <a:ea typeface="+mn-ea"/>
+                  <a:cs typeface="+mn-cs"/>
+                </a:defRPr>
+              </a:lvl7pPr>
+              <a:lvl8pPr marL="3200400" indent="0" algn="l" defTabSz="457200" rtl="0" eaLnBrk="1" latinLnBrk="0" hangingPunct="1">
+                <a:defRPr sz="1800" kern="1200">
+                  <a:solidFill>
+                    <a:schemeClr val="lt1"/>
+                  </a:solidFill>
+                  <a:latin typeface="+mn-lt"/>
+                  <a:ea typeface="+mn-ea"/>
+                  <a:cs typeface="+mn-cs"/>
+                </a:defRPr>
+              </a:lvl8pPr>
+              <a:lvl9pPr marL="3657600" indent="0" algn="l" defTabSz="457200" rtl="0" eaLnBrk="1" latinLnBrk="0" hangingPunct="1">
+                <a:defRPr sz="1800" kern="1200">
+                  <a:solidFill>
+                    <a:schemeClr val="lt1"/>
+                  </a:solidFill>
+                  <a:latin typeface="+mn-lt"/>
+                  <a:ea typeface="+mn-ea"/>
+                  <a:cs typeface="+mn-cs"/>
+                </a:defRPr>
+              </a:lvl9pPr>
+            </a:lstStyle>
+            <a:p>
+              <a:pPr algn="ctr"/>
+              <a:r>
+                <a:rPr kumimoji="0" lang="ja-JP" altLang="en-US" sz="447" b="1" i="0" u="none" strike="noStrike" kern="0" cap="none" spc="0" normalizeH="0" baseline="0">
+                  <a:ln>
+                    <a:noFill/>
+                  </a:ln>
+                  <a:solidFill>
+                    <a:srgbClr val="111111"/>
+                  </a:solidFill>
+                  <a:effectLst/>
+                  <a:uLnTx/>
+                  <a:uFillTx/>
+                  <a:latin typeface="Meiryo UI"/>
+                  <a:ea typeface="Meiryo UI"/>
+                </a:rPr>
+                <a:t>2.2 </a:t>
+              </a:r>
+              <a:r>
+                <a:rPr kumimoji="0" lang="en-US" altLang="ja-JP" sz="447" b="1" i="0" u="none" strike="noStrike" kern="0" cap="none" spc="0" normalizeH="0" baseline="0">
+                  <a:ln>
+                    <a:noFill/>
+                  </a:ln>
+                  <a:solidFill>
+                    <a:srgbClr val="111111"/>
+                  </a:solidFill>
+                  <a:effectLst/>
+                  <a:uLnTx/>
+                  <a:uFillTx/>
+                  <a:latin typeface="Meiryo UI"/>
+                  <a:ea typeface="Meiryo UI"/>
+                </a:rPr>
+                <a:t>《</a:t>
+              </a:r>
+              <a:r>
+                <a:rPr kumimoji="0" lang="ja-JP" altLang="en-US" sz="447" b="1" i="0" u="none" strike="noStrike" kern="0" cap="none" spc="0" normalizeH="0" baseline="0">
+                  <a:ln>
+                    <a:noFill/>
+                  </a:ln>
+                  <a:solidFill>
+                    <a:srgbClr val="111111"/>
+                  </a:solidFill>
+                  <a:effectLst/>
+                  <a:uLnTx/>
+                  <a:uFillTx/>
+                  <a:latin typeface="Meiryo UI"/>
+                  <a:ea typeface="Meiryo UI"/>
+                </a:rPr>
+                <a:t>接続境界</a:t>
+              </a:r>
+              <a:r>
+                <a:rPr kumimoji="0" lang="en-US" altLang="ja-JP" sz="447" b="1" i="0" u="none" strike="noStrike" kern="0" cap="none" spc="0" normalizeH="0" baseline="0">
+                  <a:ln>
+                    <a:noFill/>
+                  </a:ln>
+                  <a:solidFill>
+                    <a:srgbClr val="111111"/>
+                  </a:solidFill>
+                  <a:effectLst/>
+                  <a:uLnTx/>
+                  <a:uFillTx/>
+                  <a:latin typeface="Meiryo UI"/>
+                  <a:ea typeface="Meiryo UI"/>
+                </a:rPr>
+                <a:t>》
+Windows API
+SerialPort / Raw Input</a:t>
+              </a:r>
+              <a:endParaRPr kumimoji="0" lang="ja-JP" altLang="en-US" sz="447" b="1" i="0" u="none" strike="noStrike" kern="0" cap="none" spc="0" normalizeH="0" baseline="0">
+                <a:ln>
+                  <a:noFill/>
+                </a:ln>
+                <a:solidFill>
+                  <a:srgbClr val="111111"/>
+                </a:solidFill>
+                <a:effectLst/>
+                <a:uLnTx/>
+                <a:uFillTx/>
+                <a:latin typeface="Meiryo UI"/>
+                <a:ea typeface="Meiryo UI"/>
+              </a:endParaRPr>
+            </a:p>
+          </p:txBody>
+        </p:sp>
+        <p:sp>
+          <p:nvSpPr>
+            <p:cNvPr id="14" name="shape_d71_PLATFORM_DOMAIN_DEVICE_CONTRACTS" title="⑧ 共通デバイス通信契約 TabletPos.DeviceContracts">
+              <a:extLst>
+                <a:ext uri="{FF2B5EF4-FFF2-40B4-BE49-F238E27FC236}">
+                  <a16:creationId xmlns:a16="http://schemas.microsoft.com/office/drawing/2014/main" id="{E4AE597E-2A46-7D0F-2C1E-27A52C89C2D0}"/>
+                </a:ext>
+              </a:extLst>
+            </p:cNvPr>
+            <p:cNvSpPr/>
+            <p:nvPr/>
+          </p:nvSpPr>
+          <p:spPr>
+            <a:xfrm>
+              <a:off x="6524216" y="2848133"/>
+              <a:ext cx="1576565" cy="346885"/>
+            </a:xfrm>
+            <a:prstGeom prst="roundRect">
+              <a:avLst/>
+            </a:prstGeom>
+            <a:solidFill>
+              <a:srgbClr val="FFF2CC">
+                <a:alpha val="100000"/>
+              </a:srgbClr>
+            </a:solidFill>
+            <a:ln w="11361" cap="flat" cmpd="sng" algn="ctr">
+              <a:solidFill>
+                <a:srgbClr val="BF9000"/>
+              </a:solidFill>
+              <a:prstDash val="solid"/>
+            </a:ln>
+            <a:effectLst/>
+          </p:spPr>
+          <p:style>
+            <a:lnRef idx="2">
+              <a:schemeClr val="accent1">
+                <a:shade val="15000"/>
+              </a:schemeClr>
+            </a:lnRef>
+            <a:fillRef idx="1">
+              <a:schemeClr val="accent1"/>
+            </a:fillRef>
+            <a:effectRef idx="0">
+              <a:schemeClr val="accent1"/>
+            </a:effectRef>
+            <a:fontRef idx="minor">
+              <a:schemeClr val="lt1"/>
+            </a:fontRef>
+          </p:style>
+          <p:txBody>
+            <a:bodyPr wrap="square" lIns="34084" tIns="17042" rIns="34084" bIns="17042" rtlCol="0" anchor="ctr">
+              <a:noAutofit/>
+            </a:bodyPr>
+            <a:lstStyle>
+              <a:defPPr>
+                <a:defRPr lang="en-US"/>
+              </a:defPPr>
+              <a:lvl1pPr marL="0" indent="0" algn="l" defTabSz="457200" rtl="0" eaLnBrk="1" latinLnBrk="0" hangingPunct="1">
+                <a:defRPr sz="1800" kern="1200">
+                  <a:solidFill>
+                    <a:schemeClr val="lt1"/>
+                  </a:solidFill>
+                  <a:latin typeface="+mn-lt"/>
+                  <a:ea typeface="+mn-ea"/>
+                  <a:cs typeface="+mn-cs"/>
+                </a:defRPr>
+              </a:lvl1pPr>
+              <a:lvl2pPr marL="457200" indent="0" algn="l" defTabSz="457200" rtl="0" eaLnBrk="1" latinLnBrk="0" hangingPunct="1">
+                <a:defRPr sz="1800" kern="1200">
+                  <a:solidFill>
+                    <a:schemeClr val="lt1"/>
+                  </a:solidFill>
+                  <a:latin typeface="+mn-lt"/>
+                  <a:ea typeface="+mn-ea"/>
+                  <a:cs typeface="+mn-cs"/>
+                </a:defRPr>
+              </a:lvl2pPr>
+              <a:lvl3pPr marL="914400" indent="0" algn="l" defTabSz="457200" rtl="0" eaLnBrk="1" latinLnBrk="0" hangingPunct="1">
+                <a:defRPr sz="1800" kern="1200">
+                  <a:solidFill>
+                    <a:schemeClr val="lt1"/>
+                  </a:solidFill>
+                  <a:latin typeface="+mn-lt"/>
+                  <a:ea typeface="+mn-ea"/>
+                  <a:cs typeface="+mn-cs"/>
+                </a:defRPr>
+              </a:lvl3pPr>
+              <a:lvl4pPr marL="1371600" indent="0" algn="l" defTabSz="457200" rtl="0" eaLnBrk="1" latinLnBrk="0" hangingPunct="1">
+                <a:defRPr sz="1800" kern="1200">
+                  <a:solidFill>
+                    <a:schemeClr val="lt1"/>
+                  </a:solidFill>
+                  <a:latin typeface="+mn-lt"/>
+                  <a:ea typeface="+mn-ea"/>
+                  <a:cs typeface="+mn-cs"/>
+                </a:defRPr>
+              </a:lvl4pPr>
+              <a:lvl5pPr marL="1828800" indent="0" algn="l" defTabSz="457200" rtl="0" eaLnBrk="1" latinLnBrk="0" hangingPunct="1">
+                <a:defRPr sz="1800" kern="1200">
+                  <a:solidFill>
+                    <a:schemeClr val="lt1"/>
+                  </a:solidFill>
+                  <a:latin typeface="+mn-lt"/>
+                  <a:ea typeface="+mn-ea"/>
+                  <a:cs typeface="+mn-cs"/>
+                </a:defRPr>
+              </a:lvl5pPr>
+              <a:lvl6pPr marL="2286000" indent="0" algn="l" defTabSz="457200" rtl="0" eaLnBrk="1" latinLnBrk="0" hangingPunct="1">
+                <a:defRPr sz="1800" kern="1200">
+                  <a:solidFill>
+                    <a:schemeClr val="lt1"/>
+                  </a:solidFill>
+                  <a:latin typeface="+mn-lt"/>
+                  <a:ea typeface="+mn-ea"/>
+                  <a:cs typeface="+mn-cs"/>
+                </a:defRPr>
+              </a:lvl6pPr>
+              <a:lvl7pPr marL="2743200" indent="0" algn="l" defTabSz="457200" rtl="0" eaLnBrk="1" latinLnBrk="0" hangingPunct="1">
+                <a:defRPr sz="1800" kern="1200">
+                  <a:solidFill>
+                    <a:schemeClr val="lt1"/>
+                  </a:solidFill>
+                  <a:latin typeface="+mn-lt"/>
+                  <a:ea typeface="+mn-ea"/>
+                  <a:cs typeface="+mn-cs"/>
+                </a:defRPr>
+              </a:lvl7pPr>
+              <a:lvl8pPr marL="3200400" indent="0" algn="l" defTabSz="457200" rtl="0" eaLnBrk="1" latinLnBrk="0" hangingPunct="1">
+                <a:defRPr sz="1800" kern="1200">
+                  <a:solidFill>
+                    <a:schemeClr val="lt1"/>
+                  </a:solidFill>
+                  <a:latin typeface="+mn-lt"/>
+                  <a:ea typeface="+mn-ea"/>
+                  <a:cs typeface="+mn-cs"/>
+                </a:defRPr>
+              </a:lvl8pPr>
+              <a:lvl9pPr marL="3657600" indent="0" algn="l" defTabSz="457200" rtl="0" eaLnBrk="1" latinLnBrk="0" hangingPunct="1">
+                <a:defRPr sz="1800" kern="1200">
+                  <a:solidFill>
+                    <a:schemeClr val="lt1"/>
+                  </a:solidFill>
+                  <a:latin typeface="+mn-lt"/>
+                  <a:ea typeface="+mn-ea"/>
+                  <a:cs typeface="+mn-cs"/>
+                </a:defRPr>
+              </a:lvl9pPr>
+            </a:lstStyle>
+            <a:p>
+              <a:pPr algn="ctr"/>
+              <a:r>
+                <a:rPr kumimoji="0" lang="ja-JP" altLang="en-US" sz="447" b="1" i="0" u="none" strike="noStrike" kern="0" cap="none" spc="0" normalizeH="0" baseline="0">
+                  <a:ln>
+                    <a:noFill/>
+                  </a:ln>
+                  <a:solidFill>
+                    <a:srgbClr val="111111"/>
+                  </a:solidFill>
+                  <a:effectLst/>
+                  <a:uLnTx/>
+                  <a:uFillTx/>
+                  <a:latin typeface="Meiryo UI"/>
+                  <a:ea typeface="Meiryo UI"/>
+                </a:rPr>
+                <a:t>1.8 共通デバイス通信契約
+Pos.DeviceContracts</a:t>
+              </a:r>
+            </a:p>
+          </p:txBody>
+        </p:sp>
+        <p:sp>
+          <p:nvSpPr>
+            <p:cNvPr id="15" name="shape_d71_PLATFORM_DOMAIN_IOS" title="⑤ iOS直接接続 IosEpsonPrinterStrategy等">
+              <a:extLst>
+                <a:ext uri="{FF2B5EF4-FFF2-40B4-BE49-F238E27FC236}">
+                  <a16:creationId xmlns:a16="http://schemas.microsoft.com/office/drawing/2014/main" id="{9CBDCA00-092B-D6F9-21EF-A5C3762EC98D}"/>
+                </a:ext>
+              </a:extLst>
+            </p:cNvPr>
+            <p:cNvSpPr/>
+            <p:nvPr/>
+          </p:nvSpPr>
+          <p:spPr>
+            <a:xfrm>
+              <a:off x="4977605" y="4032485"/>
+              <a:ext cx="1116011" cy="342279"/>
+            </a:xfrm>
+            <a:prstGeom prst="roundRect">
+              <a:avLst/>
+            </a:prstGeom>
+            <a:solidFill>
+              <a:srgbClr val="F8FBFD">
+                <a:alpha val="100000"/>
+              </a:srgbClr>
+            </a:solidFill>
+            <a:ln w="11361" cap="flat" cmpd="sng" algn="ctr">
+              <a:solidFill>
+                <a:srgbClr val="0D32B2"/>
+              </a:solidFill>
+              <a:prstDash val="solid"/>
+            </a:ln>
+            <a:effectLst/>
+          </p:spPr>
+          <p:style>
+            <a:lnRef idx="2">
+              <a:schemeClr val="accent1">
+                <a:shade val="15000"/>
+              </a:schemeClr>
+            </a:lnRef>
+            <a:fillRef idx="1">
+              <a:schemeClr val="accent1"/>
+            </a:fillRef>
+            <a:effectRef idx="0">
+              <a:schemeClr val="accent1"/>
+            </a:effectRef>
+            <a:fontRef idx="minor">
+              <a:schemeClr val="lt1"/>
+            </a:fontRef>
+          </p:style>
+          <p:txBody>
+            <a:bodyPr wrap="square" lIns="34084" tIns="17042" rIns="34084" bIns="17042" rtlCol="0" anchor="ctr">
+              <a:noAutofit/>
+            </a:bodyPr>
+            <a:lstStyle>
+              <a:defPPr>
+                <a:defRPr lang="en-US"/>
+              </a:defPPr>
+              <a:lvl1pPr marL="0" indent="0" algn="l" defTabSz="457200" rtl="0" eaLnBrk="1" latinLnBrk="0" hangingPunct="1">
+                <a:defRPr sz="1800" kern="1200">
+                  <a:solidFill>
+                    <a:schemeClr val="lt1"/>
+                  </a:solidFill>
+                  <a:latin typeface="+mn-lt"/>
+                  <a:ea typeface="+mn-ea"/>
+                  <a:cs typeface="+mn-cs"/>
+                </a:defRPr>
+              </a:lvl1pPr>
+              <a:lvl2pPr marL="457200" indent="0" algn="l" defTabSz="457200" rtl="0" eaLnBrk="1" latinLnBrk="0" hangingPunct="1">
+                <a:defRPr sz="1800" kern="1200">
+                  <a:solidFill>
+                    <a:schemeClr val="lt1"/>
+                  </a:solidFill>
+                  <a:latin typeface="+mn-lt"/>
+                  <a:ea typeface="+mn-ea"/>
+                  <a:cs typeface="+mn-cs"/>
+                </a:defRPr>
+              </a:lvl2pPr>
+              <a:lvl3pPr marL="914400" indent="0" algn="l" defTabSz="457200" rtl="0" eaLnBrk="1" latinLnBrk="0" hangingPunct="1">
+                <a:defRPr sz="1800" kern="1200">
+                  <a:solidFill>
+                    <a:schemeClr val="lt1"/>
+                  </a:solidFill>
+                  <a:latin typeface="+mn-lt"/>
+                  <a:ea typeface="+mn-ea"/>
+                  <a:cs typeface="+mn-cs"/>
+                </a:defRPr>
+              </a:lvl3pPr>
+              <a:lvl4pPr marL="1371600" indent="0" algn="l" defTabSz="457200" rtl="0" eaLnBrk="1" latinLnBrk="0" hangingPunct="1">
+                <a:defRPr sz="1800" kern="1200">
+                  <a:solidFill>
+                    <a:schemeClr val="lt1"/>
+                  </a:solidFill>
+                  <a:latin typeface="+mn-lt"/>
+                  <a:ea typeface="+mn-ea"/>
+                  <a:cs typeface="+mn-cs"/>
+                </a:defRPr>
+              </a:lvl4pPr>
+              <a:lvl5pPr marL="1828800" indent="0" algn="l" defTabSz="457200" rtl="0" eaLnBrk="1" latinLnBrk="0" hangingPunct="1">
+                <a:defRPr sz="1800" kern="1200">
+                  <a:solidFill>
+                    <a:schemeClr val="lt1"/>
+                  </a:solidFill>
+                  <a:latin typeface="+mn-lt"/>
+                  <a:ea typeface="+mn-ea"/>
+                  <a:cs typeface="+mn-cs"/>
+                </a:defRPr>
+              </a:lvl5pPr>
+              <a:lvl6pPr marL="2286000" indent="0" algn="l" defTabSz="457200" rtl="0" eaLnBrk="1" latinLnBrk="0" hangingPunct="1">
+                <a:defRPr sz="1800" kern="1200">
+                  <a:solidFill>
+                    <a:schemeClr val="lt1"/>
+                  </a:solidFill>
+                  <a:latin typeface="+mn-lt"/>
+                  <a:ea typeface="+mn-ea"/>
+                  <a:cs typeface="+mn-cs"/>
+                </a:defRPr>
+              </a:lvl6pPr>
+              <a:lvl7pPr marL="2743200" indent="0" algn="l" defTabSz="457200" rtl="0" eaLnBrk="1" latinLnBrk="0" hangingPunct="1">
+                <a:defRPr sz="1800" kern="1200">
+                  <a:solidFill>
+                    <a:schemeClr val="lt1"/>
+                  </a:solidFill>
+                  <a:latin typeface="+mn-lt"/>
+                  <a:ea typeface="+mn-ea"/>
+                  <a:cs typeface="+mn-cs"/>
+                </a:defRPr>
+              </a:lvl7pPr>
+              <a:lvl8pPr marL="3200400" indent="0" algn="l" defTabSz="457200" rtl="0" eaLnBrk="1" latinLnBrk="0" hangingPunct="1">
+                <a:defRPr sz="1800" kern="1200">
+                  <a:solidFill>
+                    <a:schemeClr val="lt1"/>
+                  </a:solidFill>
+                  <a:latin typeface="+mn-lt"/>
+                  <a:ea typeface="+mn-ea"/>
+                  <a:cs typeface="+mn-cs"/>
+                </a:defRPr>
+              </a:lvl8pPr>
+              <a:lvl9pPr marL="3657600" indent="0" algn="l" defTabSz="457200" rtl="0" eaLnBrk="1" latinLnBrk="0" hangingPunct="1">
+                <a:defRPr sz="1800" kern="1200">
+                  <a:solidFill>
+                    <a:schemeClr val="lt1"/>
+                  </a:solidFill>
+                  <a:latin typeface="+mn-lt"/>
+                  <a:ea typeface="+mn-ea"/>
+                  <a:cs typeface="+mn-cs"/>
+                </a:defRPr>
+              </a:lvl9pPr>
+            </a:lstStyle>
+            <a:p>
+              <a:pPr algn="ctr"/>
+              <a:r>
+                <a:rPr kumimoji="0" lang="en-US" altLang="ja-JP" sz="447" b="1" i="0" u="none" strike="noStrike" kern="0" cap="none" spc="0" normalizeH="0" baseline="0">
+                  <a:ln>
+                    <a:noFill/>
+                  </a:ln>
+                  <a:solidFill>
+                    <a:srgbClr val="111111"/>
+                  </a:solidFill>
+                  <a:effectLst/>
+                  <a:uLnTx/>
+                  <a:uFillTx/>
+                  <a:latin typeface="Meiryo UI"/>
+                  <a:ea typeface="Meiryo UI"/>
+                </a:rPr>
+                <a:t>1.5 iOS</a:t>
+              </a:r>
+              <a:r>
+                <a:rPr kumimoji="0" lang="ja-JP" altLang="en-US" sz="447" b="1" i="0" u="none" strike="noStrike" kern="0" cap="none" spc="0" normalizeH="0" baseline="0">
+                  <a:ln>
+                    <a:noFill/>
+                  </a:ln>
+                  <a:solidFill>
+                    <a:srgbClr val="111111"/>
+                  </a:solidFill>
+                  <a:effectLst/>
+                  <a:uLnTx/>
+                  <a:uFillTx/>
+                  <a:latin typeface="Meiryo UI"/>
+                  <a:ea typeface="Meiryo UI"/>
+                </a:rPr>
+                <a:t>直接接続
+</a:t>
+              </a:r>
+              <a:r>
+                <a:rPr kumimoji="0" lang="en-US" altLang="ja-JP" sz="447" b="1" i="0" u="none" strike="noStrike" kern="0" cap="none" spc="0" normalizeH="0" baseline="0">
+                  <a:ln>
+                    <a:noFill/>
+                  </a:ln>
+                  <a:solidFill>
+                    <a:srgbClr val="111111"/>
+                  </a:solidFill>
+                  <a:effectLst/>
+                  <a:uLnTx/>
+                  <a:uFillTx/>
+                  <a:latin typeface="Meiryo UI"/>
+                  <a:ea typeface="Meiryo UI"/>
+                </a:rPr>
+                <a:t>IosEpsonPrinterStrategy</a:t>
+              </a:r>
+              <a:r>
+                <a:rPr kumimoji="0" lang="ja-JP" altLang="en-US" sz="447" b="1" i="0" u="none" strike="noStrike" kern="0" cap="none" spc="0" normalizeH="0" baseline="0">
+                  <a:ln>
+                    <a:noFill/>
+                  </a:ln>
+                  <a:solidFill>
+                    <a:srgbClr val="111111"/>
+                  </a:solidFill>
+                  <a:effectLst/>
+                  <a:uLnTx/>
+                  <a:uFillTx/>
+                  <a:latin typeface="Meiryo UI"/>
+                  <a:ea typeface="Meiryo UI"/>
+                </a:rPr>
+                <a:t>等</a:t>
+              </a:r>
+            </a:p>
+          </p:txBody>
+        </p:sp>
+        <p:sp>
+          <p:nvSpPr>
+            <p:cNvPr id="16" name="shape_d71_EXTERNAL_DOMAIN_CONNECTOR" title="① 《接続境界》 デバイスコネクタ TabletPos.Host">
+              <a:extLst>
+                <a:ext uri="{FF2B5EF4-FFF2-40B4-BE49-F238E27FC236}">
+                  <a16:creationId xmlns:a16="http://schemas.microsoft.com/office/drawing/2014/main" id="{2894F169-FCDD-502F-C678-E95D9573E9A9}"/>
+                </a:ext>
+              </a:extLst>
+            </p:cNvPr>
+            <p:cNvSpPr/>
+            <p:nvPr/>
+          </p:nvSpPr>
+          <p:spPr>
+            <a:xfrm>
+              <a:off x="9386259" y="3555599"/>
+              <a:ext cx="1604460" cy="360079"/>
+            </a:xfrm>
+            <a:prstGeom prst="roundRect">
+              <a:avLst/>
+            </a:prstGeom>
+            <a:solidFill>
+              <a:srgbClr val="FCE4D6">
+                <a:alpha val="100000"/>
+              </a:srgbClr>
+            </a:solidFill>
+            <a:ln w="11361" cap="flat" cmpd="sng" algn="ctr">
+              <a:solidFill>
+                <a:srgbClr val="ED7D31"/>
+              </a:solidFill>
+              <a:prstDash val="solid"/>
+            </a:ln>
+            <a:effectLst/>
+          </p:spPr>
+          <p:style>
+            <a:lnRef idx="2">
+              <a:schemeClr val="accent1">
+                <a:shade val="15000"/>
+              </a:schemeClr>
+            </a:lnRef>
+            <a:fillRef idx="1">
+              <a:schemeClr val="accent1"/>
+            </a:fillRef>
+            <a:effectRef idx="0">
+              <a:schemeClr val="accent1"/>
+            </a:effectRef>
+            <a:fontRef idx="minor">
+              <a:schemeClr val="lt1"/>
+            </a:fontRef>
+          </p:style>
+          <p:txBody>
+            <a:bodyPr wrap="square" lIns="34084" tIns="17042" rIns="34084" bIns="17042" rtlCol="0" anchor="ctr">
+              <a:noAutofit/>
+            </a:bodyPr>
+            <a:lstStyle>
+              <a:defPPr>
+                <a:defRPr lang="en-US"/>
+              </a:defPPr>
+              <a:lvl1pPr marL="0" indent="0" algn="l" defTabSz="457200" rtl="0" eaLnBrk="1" latinLnBrk="0" hangingPunct="1">
+                <a:defRPr sz="1800" kern="1200">
+                  <a:solidFill>
+                    <a:schemeClr val="lt1"/>
+                  </a:solidFill>
+                  <a:latin typeface="+mn-lt"/>
+                  <a:ea typeface="+mn-ea"/>
+                  <a:cs typeface="+mn-cs"/>
+                </a:defRPr>
+              </a:lvl1pPr>
+              <a:lvl2pPr marL="457200" indent="0" algn="l" defTabSz="457200" rtl="0" eaLnBrk="1" latinLnBrk="0" hangingPunct="1">
+                <a:defRPr sz="1800" kern="1200">
+                  <a:solidFill>
+                    <a:schemeClr val="lt1"/>
+                  </a:solidFill>
+                  <a:latin typeface="+mn-lt"/>
+                  <a:ea typeface="+mn-ea"/>
+                  <a:cs typeface="+mn-cs"/>
+                </a:defRPr>
+              </a:lvl2pPr>
+              <a:lvl3pPr marL="914400" indent="0" algn="l" defTabSz="457200" rtl="0" eaLnBrk="1" latinLnBrk="0" hangingPunct="1">
+                <a:defRPr sz="1800" kern="1200">
+                  <a:solidFill>
+                    <a:schemeClr val="lt1"/>
+                  </a:solidFill>
+                  <a:latin typeface="+mn-lt"/>
+                  <a:ea typeface="+mn-ea"/>
+                  <a:cs typeface="+mn-cs"/>
+                </a:defRPr>
+              </a:lvl3pPr>
+              <a:lvl4pPr marL="1371600" indent="0" algn="l" defTabSz="457200" rtl="0" eaLnBrk="1" latinLnBrk="0" hangingPunct="1">
+                <a:defRPr sz="1800" kern="1200">
+                  <a:solidFill>
+                    <a:schemeClr val="lt1"/>
+                  </a:solidFill>
+                  <a:latin typeface="+mn-lt"/>
+                  <a:ea typeface="+mn-ea"/>
+                  <a:cs typeface="+mn-cs"/>
+                </a:defRPr>
+              </a:lvl4pPr>
+              <a:lvl5pPr marL="1828800" indent="0" algn="l" defTabSz="457200" rtl="0" eaLnBrk="1" latinLnBrk="0" hangingPunct="1">
+                <a:defRPr sz="1800" kern="1200">
+                  <a:solidFill>
+                    <a:schemeClr val="lt1"/>
+                  </a:solidFill>
+                  <a:latin typeface="+mn-lt"/>
+                  <a:ea typeface="+mn-ea"/>
+                  <a:cs typeface="+mn-cs"/>
+                </a:defRPr>
+              </a:lvl5pPr>
+              <a:lvl6pPr marL="2286000" indent="0" algn="l" defTabSz="457200" rtl="0" eaLnBrk="1" latinLnBrk="0" hangingPunct="1">
+                <a:defRPr sz="1800" kern="1200">
+                  <a:solidFill>
+                    <a:schemeClr val="lt1"/>
+                  </a:solidFill>
+                  <a:latin typeface="+mn-lt"/>
+                  <a:ea typeface="+mn-ea"/>
+                  <a:cs typeface="+mn-cs"/>
+                </a:defRPr>
+              </a:lvl6pPr>
+              <a:lvl7pPr marL="2743200" indent="0" algn="l" defTabSz="457200" rtl="0" eaLnBrk="1" latinLnBrk="0" hangingPunct="1">
+                <a:defRPr sz="1800" kern="1200">
+                  <a:solidFill>
+                    <a:schemeClr val="lt1"/>
+                  </a:solidFill>
+                  <a:latin typeface="+mn-lt"/>
+                  <a:ea typeface="+mn-ea"/>
+                  <a:cs typeface="+mn-cs"/>
+                </a:defRPr>
+              </a:lvl7pPr>
+              <a:lvl8pPr marL="3200400" indent="0" algn="l" defTabSz="457200" rtl="0" eaLnBrk="1" latinLnBrk="0" hangingPunct="1">
+                <a:defRPr sz="1800" kern="1200">
+                  <a:solidFill>
+                    <a:schemeClr val="lt1"/>
+                  </a:solidFill>
+                  <a:latin typeface="+mn-lt"/>
+                  <a:ea typeface="+mn-ea"/>
+                  <a:cs typeface="+mn-cs"/>
+                </a:defRPr>
+              </a:lvl8pPr>
+              <a:lvl9pPr marL="3657600" indent="0" algn="l" defTabSz="457200" rtl="0" eaLnBrk="1" latinLnBrk="0" hangingPunct="1">
+                <a:defRPr sz="1800" kern="1200">
+                  <a:solidFill>
+                    <a:schemeClr val="lt1"/>
+                  </a:solidFill>
+                  <a:latin typeface="+mn-lt"/>
+                  <a:ea typeface="+mn-ea"/>
+                  <a:cs typeface="+mn-cs"/>
+                </a:defRPr>
+              </a:lvl9pPr>
+            </a:lstStyle>
+            <a:p>
+              <a:pPr algn="ctr"/>
+              <a:r>
+                <a:rPr kumimoji="0" lang="ja-JP" altLang="en-US" sz="447" b="1" i="0" u="none" strike="noStrike" kern="0" cap="none" spc="0" normalizeH="0" baseline="0">
+                  <a:ln>
+                    <a:noFill/>
+                  </a:ln>
+                  <a:solidFill>
+                    <a:srgbClr val="111111"/>
+                  </a:solidFill>
+                  <a:effectLst/>
+                  <a:uLnTx/>
+                  <a:uFillTx/>
+                  <a:latin typeface="Meiryo UI"/>
+                  <a:ea typeface="Meiryo UI"/>
+                </a:rPr>
+                <a:t>2.1 《接続境界》
+デバイスコネクタ
+Pos.DeviceConnector</a:t>
+              </a:r>
+            </a:p>
+          </p:txBody>
+        </p:sp>
+        <p:sp>
+          <p:nvSpPr>
+            <p:cNvPr id="17" name="shape_d71_PLATFORM_DOMAIN_OPOS" title="③ Windows OPOS／OCX OposPrinterStrategy等">
+              <a:extLst>
+                <a:ext uri="{FF2B5EF4-FFF2-40B4-BE49-F238E27FC236}">
+                  <a16:creationId xmlns:a16="http://schemas.microsoft.com/office/drawing/2014/main" id="{3240A543-580D-6DD6-EB33-C29D2B57E5B1}"/>
+                </a:ext>
+              </a:extLst>
+            </p:cNvPr>
+            <p:cNvSpPr/>
+            <p:nvPr/>
+          </p:nvSpPr>
+          <p:spPr>
+            <a:xfrm>
+              <a:off x="4991603" y="3558598"/>
+              <a:ext cx="1014168" cy="351804"/>
+            </a:xfrm>
+            <a:prstGeom prst="roundRect">
+              <a:avLst/>
+            </a:prstGeom>
+            <a:solidFill>
+              <a:srgbClr val="F8FBFD">
+                <a:alpha val="100000"/>
+              </a:srgbClr>
+            </a:solidFill>
+            <a:ln w="11361" cap="flat" cmpd="sng" algn="ctr">
+              <a:solidFill>
+                <a:srgbClr val="0D32B2"/>
+              </a:solidFill>
+              <a:prstDash val="solid"/>
+            </a:ln>
+            <a:effectLst/>
+          </p:spPr>
+          <p:style>
+            <a:lnRef idx="2">
+              <a:schemeClr val="accent1">
+                <a:shade val="15000"/>
+              </a:schemeClr>
+            </a:lnRef>
+            <a:fillRef idx="1">
+              <a:schemeClr val="accent1"/>
+            </a:fillRef>
+            <a:effectRef idx="0">
+              <a:schemeClr val="accent1"/>
+            </a:effectRef>
+            <a:fontRef idx="minor">
+              <a:schemeClr val="lt1"/>
+            </a:fontRef>
+          </p:style>
+          <p:txBody>
+            <a:bodyPr wrap="square" lIns="34084" tIns="17042" rIns="34084" bIns="17042" rtlCol="0" anchor="ctr">
+              <a:noAutofit/>
+            </a:bodyPr>
+            <a:lstStyle>
+              <a:defPPr>
+                <a:defRPr lang="en-US"/>
+              </a:defPPr>
+              <a:lvl1pPr marL="0" indent="0" algn="l" defTabSz="457200" rtl="0" eaLnBrk="1" latinLnBrk="0" hangingPunct="1">
+                <a:defRPr sz="1800" kern="1200">
+                  <a:solidFill>
+                    <a:schemeClr val="lt1"/>
+                  </a:solidFill>
+                  <a:latin typeface="+mn-lt"/>
+                  <a:ea typeface="+mn-ea"/>
+                  <a:cs typeface="+mn-cs"/>
+                </a:defRPr>
+              </a:lvl1pPr>
+              <a:lvl2pPr marL="457200" indent="0" algn="l" defTabSz="457200" rtl="0" eaLnBrk="1" latinLnBrk="0" hangingPunct="1">
+                <a:defRPr sz="1800" kern="1200">
+                  <a:solidFill>
+                    <a:schemeClr val="lt1"/>
+                  </a:solidFill>
+                  <a:latin typeface="+mn-lt"/>
+                  <a:ea typeface="+mn-ea"/>
+                  <a:cs typeface="+mn-cs"/>
+                </a:defRPr>
+              </a:lvl2pPr>
+              <a:lvl3pPr marL="914400" indent="0" algn="l" defTabSz="457200" rtl="0" eaLnBrk="1" latinLnBrk="0" hangingPunct="1">
+                <a:defRPr sz="1800" kern="1200">
+                  <a:solidFill>
+                    <a:schemeClr val="lt1"/>
+                  </a:solidFill>
+                  <a:latin typeface="+mn-lt"/>
+                  <a:ea typeface="+mn-ea"/>
+                  <a:cs typeface="+mn-cs"/>
+                </a:defRPr>
+              </a:lvl3pPr>
+              <a:lvl4pPr marL="1371600" indent="0" algn="l" defTabSz="457200" rtl="0" eaLnBrk="1" latinLnBrk="0" hangingPunct="1">
+                <a:defRPr sz="1800" kern="1200">
+                  <a:solidFill>
+                    <a:schemeClr val="lt1"/>
+                  </a:solidFill>
+                  <a:latin typeface="+mn-lt"/>
+                  <a:ea typeface="+mn-ea"/>
+                  <a:cs typeface="+mn-cs"/>
+                </a:defRPr>
+              </a:lvl4pPr>
+              <a:lvl5pPr marL="1828800" indent="0" algn="l" defTabSz="457200" rtl="0" eaLnBrk="1" latinLnBrk="0" hangingPunct="1">
+                <a:defRPr sz="1800" kern="1200">
+                  <a:solidFill>
+                    <a:schemeClr val="lt1"/>
+                  </a:solidFill>
+                  <a:latin typeface="+mn-lt"/>
+                  <a:ea typeface="+mn-ea"/>
+                  <a:cs typeface="+mn-cs"/>
+                </a:defRPr>
+              </a:lvl5pPr>
+              <a:lvl6pPr marL="2286000" indent="0" algn="l" defTabSz="457200" rtl="0" eaLnBrk="1" latinLnBrk="0" hangingPunct="1">
+                <a:defRPr sz="1800" kern="1200">
+                  <a:solidFill>
+                    <a:schemeClr val="lt1"/>
+                  </a:solidFill>
+                  <a:latin typeface="+mn-lt"/>
+                  <a:ea typeface="+mn-ea"/>
+                  <a:cs typeface="+mn-cs"/>
+                </a:defRPr>
+              </a:lvl6pPr>
+              <a:lvl7pPr marL="2743200" indent="0" algn="l" defTabSz="457200" rtl="0" eaLnBrk="1" latinLnBrk="0" hangingPunct="1">
+                <a:defRPr sz="1800" kern="1200">
+                  <a:solidFill>
+                    <a:schemeClr val="lt1"/>
+                  </a:solidFill>
+                  <a:latin typeface="+mn-lt"/>
+                  <a:ea typeface="+mn-ea"/>
+                  <a:cs typeface="+mn-cs"/>
+                </a:defRPr>
+              </a:lvl7pPr>
+              <a:lvl8pPr marL="3200400" indent="0" algn="l" defTabSz="457200" rtl="0" eaLnBrk="1" latinLnBrk="0" hangingPunct="1">
+                <a:defRPr sz="1800" kern="1200">
+                  <a:solidFill>
+                    <a:schemeClr val="lt1"/>
+                  </a:solidFill>
+                  <a:latin typeface="+mn-lt"/>
+                  <a:ea typeface="+mn-ea"/>
+                  <a:cs typeface="+mn-cs"/>
+                </a:defRPr>
+              </a:lvl8pPr>
+              <a:lvl9pPr marL="3657600" indent="0" algn="l" defTabSz="457200" rtl="0" eaLnBrk="1" latinLnBrk="0" hangingPunct="1">
+                <a:defRPr sz="1800" kern="1200">
+                  <a:solidFill>
+                    <a:schemeClr val="lt1"/>
+                  </a:solidFill>
+                  <a:latin typeface="+mn-lt"/>
+                  <a:ea typeface="+mn-ea"/>
+                  <a:cs typeface="+mn-cs"/>
+                </a:defRPr>
+              </a:lvl9pPr>
+            </a:lstStyle>
+            <a:p>
+              <a:pPr algn="ctr"/>
+              <a:r>
+                <a:rPr kumimoji="0" lang="en-US" altLang="ja-JP" sz="447" b="1" i="0" u="none" strike="noStrike" kern="0" cap="none" spc="0" normalizeH="0" baseline="0">
+                  <a:ln>
+                    <a:noFill/>
+                  </a:ln>
+                  <a:solidFill>
+                    <a:srgbClr val="111111"/>
+                  </a:solidFill>
+                  <a:effectLst/>
+                  <a:uLnTx/>
+                  <a:uFillTx/>
+                  <a:latin typeface="Meiryo UI"/>
+                  <a:ea typeface="Meiryo UI"/>
+                </a:rPr>
+                <a:t>1.3 Windows OPOS</a:t>
+              </a:r>
+              <a:r>
+                <a:rPr kumimoji="0" lang="ja-JP" altLang="en-US" sz="447" b="1" i="0" u="none" strike="noStrike" kern="0" cap="none" spc="0" normalizeH="0" baseline="0">
+                  <a:ln>
+                    <a:noFill/>
+                  </a:ln>
+                  <a:solidFill>
+                    <a:srgbClr val="111111"/>
+                  </a:solidFill>
+                  <a:effectLst/>
+                  <a:uLnTx/>
+                  <a:uFillTx/>
+                  <a:latin typeface="Meiryo UI"/>
+                  <a:ea typeface="Meiryo UI"/>
+                </a:rPr>
+                <a:t>／</a:t>
+              </a:r>
+              <a:r>
+                <a:rPr kumimoji="0" lang="en-US" altLang="ja-JP" sz="447" b="1" i="0" u="none" strike="noStrike" kern="0" cap="none" spc="0" normalizeH="0" baseline="0">
+                  <a:ln>
+                    <a:noFill/>
+                  </a:ln>
+                  <a:solidFill>
+                    <a:srgbClr val="111111"/>
+                  </a:solidFill>
+                  <a:effectLst/>
+                  <a:uLnTx/>
+                  <a:uFillTx/>
+                  <a:latin typeface="Meiryo UI"/>
+                  <a:ea typeface="Meiryo UI"/>
+                </a:rPr>
+                <a:t>OCX
+OposPrinterStrategy</a:t>
+              </a:r>
+              <a:r>
+                <a:rPr kumimoji="0" lang="ja-JP" altLang="en-US" sz="447" b="1" i="0" u="none" strike="noStrike" kern="0" cap="none" spc="0" normalizeH="0" baseline="0">
+                  <a:ln>
+                    <a:noFill/>
+                  </a:ln>
+                  <a:solidFill>
+                    <a:srgbClr val="111111"/>
+                  </a:solidFill>
+                  <a:effectLst/>
+                  <a:uLnTx/>
+                  <a:uFillTx/>
+                  <a:latin typeface="Meiryo UI"/>
+                  <a:ea typeface="Meiryo UI"/>
+                </a:rPr>
+                <a:t>等</a:t>
+              </a:r>
+            </a:p>
+          </p:txBody>
+        </p:sp>
+        <p:sp>
+          <p:nvSpPr>
+            <p:cNvPr id="18" name="shape_d71_PLATFORM_DOMAIN_PLATFORM" title="② プラットフォーム別 ストラテジー群">
+              <a:extLst>
+                <a:ext uri="{FF2B5EF4-FFF2-40B4-BE49-F238E27FC236}">
+                  <a16:creationId xmlns:a16="http://schemas.microsoft.com/office/drawing/2014/main" id="{CE9A80E6-AF06-FEC3-8DC0-AB0C5D276B2E}"/>
+                </a:ext>
+              </a:extLst>
+            </p:cNvPr>
+            <p:cNvSpPr/>
+            <p:nvPr/>
+          </p:nvSpPr>
+          <p:spPr>
+            <a:xfrm>
+              <a:off x="3499604" y="3814147"/>
+              <a:ext cx="977481" cy="341423"/>
+            </a:xfrm>
+            <a:prstGeom prst="roundRect">
+              <a:avLst/>
+            </a:prstGeom>
+            <a:solidFill>
+              <a:srgbClr val="F8FBFD">
+                <a:alpha val="100000"/>
+              </a:srgbClr>
+            </a:solidFill>
+            <a:ln w="11361" cap="flat" cmpd="sng" algn="ctr">
+              <a:solidFill>
+                <a:srgbClr val="0D32B2"/>
+              </a:solidFill>
+              <a:prstDash val="solid"/>
+            </a:ln>
+            <a:effectLst/>
+          </p:spPr>
+          <p:style>
+            <a:lnRef idx="2">
+              <a:schemeClr val="accent1">
+                <a:shade val="15000"/>
+              </a:schemeClr>
+            </a:lnRef>
+            <a:fillRef idx="1">
+              <a:schemeClr val="accent1"/>
+            </a:fillRef>
+            <a:effectRef idx="0">
+              <a:schemeClr val="accent1"/>
+            </a:effectRef>
+            <a:fontRef idx="minor">
+              <a:schemeClr val="lt1"/>
+            </a:fontRef>
+          </p:style>
+          <p:txBody>
+            <a:bodyPr wrap="square" lIns="34084" tIns="17042" rIns="34084" bIns="17042" rtlCol="0" anchor="ctr">
+              <a:noAutofit/>
+            </a:bodyPr>
+            <a:lstStyle>
+              <a:defPPr>
+                <a:defRPr lang="en-US"/>
+              </a:defPPr>
+              <a:lvl1pPr marL="0" indent="0" algn="l" defTabSz="457200" rtl="0" eaLnBrk="1" latinLnBrk="0" hangingPunct="1">
+                <a:defRPr sz="1800" kern="1200">
+                  <a:solidFill>
+                    <a:schemeClr val="lt1"/>
+                  </a:solidFill>
+                  <a:latin typeface="+mn-lt"/>
+                  <a:ea typeface="+mn-ea"/>
+                  <a:cs typeface="+mn-cs"/>
+                </a:defRPr>
+              </a:lvl1pPr>
+              <a:lvl2pPr marL="457200" indent="0" algn="l" defTabSz="457200" rtl="0" eaLnBrk="1" latinLnBrk="0" hangingPunct="1">
+                <a:defRPr sz="1800" kern="1200">
+                  <a:solidFill>
+                    <a:schemeClr val="lt1"/>
+                  </a:solidFill>
+                  <a:latin typeface="+mn-lt"/>
+                  <a:ea typeface="+mn-ea"/>
+                  <a:cs typeface="+mn-cs"/>
+                </a:defRPr>
+              </a:lvl2pPr>
+              <a:lvl3pPr marL="914400" indent="0" algn="l" defTabSz="457200" rtl="0" eaLnBrk="1" latinLnBrk="0" hangingPunct="1">
+                <a:defRPr sz="1800" kern="1200">
+                  <a:solidFill>
+                    <a:schemeClr val="lt1"/>
+                  </a:solidFill>
+                  <a:latin typeface="+mn-lt"/>
+                  <a:ea typeface="+mn-ea"/>
+                  <a:cs typeface="+mn-cs"/>
+                </a:defRPr>
+              </a:lvl3pPr>
+              <a:lvl4pPr marL="1371600" indent="0" algn="l" defTabSz="457200" rtl="0" eaLnBrk="1" latinLnBrk="0" hangingPunct="1">
+                <a:defRPr sz="1800" kern="1200">
+                  <a:solidFill>
+                    <a:schemeClr val="lt1"/>
+                  </a:solidFill>
+                  <a:latin typeface="+mn-lt"/>
+                  <a:ea typeface="+mn-ea"/>
+                  <a:cs typeface="+mn-cs"/>
+                </a:defRPr>
+              </a:lvl4pPr>
+              <a:lvl5pPr marL="1828800" indent="0" algn="l" defTabSz="457200" rtl="0" eaLnBrk="1" latinLnBrk="0" hangingPunct="1">
+                <a:defRPr sz="1800" kern="1200">
+                  <a:solidFill>
+                    <a:schemeClr val="lt1"/>
+                  </a:solidFill>
+                  <a:latin typeface="+mn-lt"/>
+                  <a:ea typeface="+mn-ea"/>
+                  <a:cs typeface="+mn-cs"/>
+                </a:defRPr>
+              </a:lvl5pPr>
+              <a:lvl6pPr marL="2286000" indent="0" algn="l" defTabSz="457200" rtl="0" eaLnBrk="1" latinLnBrk="0" hangingPunct="1">
+                <a:defRPr sz="1800" kern="1200">
+                  <a:solidFill>
+                    <a:schemeClr val="lt1"/>
+                  </a:solidFill>
+                  <a:latin typeface="+mn-lt"/>
+                  <a:ea typeface="+mn-ea"/>
+                  <a:cs typeface="+mn-cs"/>
+                </a:defRPr>
+              </a:lvl6pPr>
+              <a:lvl7pPr marL="2743200" indent="0" algn="l" defTabSz="457200" rtl="0" eaLnBrk="1" latinLnBrk="0" hangingPunct="1">
+                <a:defRPr sz="1800" kern="1200">
+                  <a:solidFill>
+                    <a:schemeClr val="lt1"/>
+                  </a:solidFill>
+                  <a:latin typeface="+mn-lt"/>
+                  <a:ea typeface="+mn-ea"/>
+                  <a:cs typeface="+mn-cs"/>
+                </a:defRPr>
+              </a:lvl7pPr>
+              <a:lvl8pPr marL="3200400" indent="0" algn="l" defTabSz="457200" rtl="0" eaLnBrk="1" latinLnBrk="0" hangingPunct="1">
+                <a:defRPr sz="1800" kern="1200">
+                  <a:solidFill>
+                    <a:schemeClr val="lt1"/>
+                  </a:solidFill>
+                  <a:latin typeface="+mn-lt"/>
+                  <a:ea typeface="+mn-ea"/>
+                  <a:cs typeface="+mn-cs"/>
+                </a:defRPr>
+              </a:lvl8pPr>
+              <a:lvl9pPr marL="3657600" indent="0" algn="l" defTabSz="457200" rtl="0" eaLnBrk="1" latinLnBrk="0" hangingPunct="1">
+                <a:defRPr sz="1800" kern="1200">
+                  <a:solidFill>
+                    <a:schemeClr val="lt1"/>
+                  </a:solidFill>
+                  <a:latin typeface="+mn-lt"/>
+                  <a:ea typeface="+mn-ea"/>
+                  <a:cs typeface="+mn-cs"/>
+                </a:defRPr>
+              </a:lvl9pPr>
+            </a:lstStyle>
+            <a:p>
+              <a:pPr algn="ctr"/>
+              <a:r>
+                <a:rPr kumimoji="0" lang="ja-JP" altLang="en-US" sz="447" b="1" i="0" u="none" strike="noStrike" kern="0" cap="none" spc="0" normalizeH="0" baseline="0">
+                  <a:ln>
+                    <a:noFill/>
+                  </a:ln>
+                  <a:solidFill>
+                    <a:srgbClr val="111111"/>
+                  </a:solidFill>
+                  <a:effectLst/>
+                  <a:uLnTx/>
+                  <a:uFillTx/>
+                  <a:latin typeface="Meiryo UI"/>
+                  <a:ea typeface="Meiryo UI"/>
+                </a:rPr>
+                <a:t>1.2 プラットフォーム別
+ストラテジー群</a:t>
+              </a:r>
+            </a:p>
+          </p:txBody>
+        </p:sp>
+        <p:cxnSp>
+          <p:nvCxnSpPr>
+            <p:cNvPr id="19" name="edge_d71_01_PLATFORM_DOMAIN_CONTRACT_to_PLATFORM_DOMAIN_PLATFORM" descr="実装クラス群" title="実装クラス群">
+              <a:extLst>
+                <a:ext uri="{FF2B5EF4-FFF2-40B4-BE49-F238E27FC236}">
+                  <a16:creationId xmlns:a16="http://schemas.microsoft.com/office/drawing/2014/main" id="{62ECFC00-8AD7-1708-9F48-47C8D8F6C6B0}"/>
+                </a:ext>
+              </a:extLst>
+            </p:cNvPr>
+            <p:cNvCxnSpPr>
+              <a:cxnSpLocks/>
+              <a:stCxn id="7" idx="3"/>
+              <a:endCxn id="18" idx="1"/>
+            </p:cNvCxnSpPr>
+            <p:nvPr/>
+          </p:nvCxnSpPr>
+          <p:spPr>
+            <a:xfrm flipV="1">
+              <a:off x="2797764" y="3984859"/>
+              <a:ext cx="701840" cy="1007"/>
+            </a:xfrm>
+            <a:prstGeom prst="straightConnector1">
+              <a:avLst/>
+            </a:prstGeom>
+            <a:noFill/>
+            <a:ln w="11361" cap="flat" cmpd="sng" algn="ctr">
+              <a:solidFill>
+                <a:srgbClr val="7F7F7F"/>
+              </a:solidFill>
+              <a:prstDash val="dash"/>
+              <a:tailEnd type="triangle"/>
+            </a:ln>
+            <a:effectLst/>
+          </p:spPr>
+          <p:style>
+            <a:lnRef idx="1">
+              <a:schemeClr val="accent1"/>
+            </a:lnRef>
+            <a:fillRef idx="0">
+              <a:schemeClr val="accent1"/>
+            </a:fillRef>
+            <a:effectRef idx="0">
+              <a:schemeClr val="accent1"/>
+            </a:effectRef>
+            <a:fontRef idx="minor">
+              <a:schemeClr val="tx1"/>
+            </a:fontRef>
+          </p:style>
+        </p:cxnSp>
+        <p:cxnSp>
+          <p:nvCxnSpPr>
+            <p:cNvPr id="20" name="edge_d71_02_PLATFORM_DOMAIN_PLATFORM_to_PLATFORM_DOMAIN_OPOS" title="② プラットフォーム別 → ③ Windows OPOS／OCX">
+              <a:extLst>
+                <a:ext uri="{FF2B5EF4-FFF2-40B4-BE49-F238E27FC236}">
+                  <a16:creationId xmlns:a16="http://schemas.microsoft.com/office/drawing/2014/main" id="{4862E0DA-4C93-AC58-D939-CFEFE3706CC4}"/>
+                </a:ext>
+              </a:extLst>
+            </p:cNvPr>
+            <p:cNvCxnSpPr/>
+            <p:nvPr/>
+          </p:nvCxnSpPr>
+          <p:spPr>
+            <a:xfrm flipV="1">
+              <a:off x="4481965" y="3738685"/>
+              <a:ext cx="504141" cy="247182"/>
+            </a:xfrm>
+            <a:prstGeom prst="bentConnector3">
+              <a:avLst>
+                <a:gd name="adj1" fmla="val 50000"/>
+              </a:avLst>
+            </a:prstGeom>
+            <a:noFill/>
+            <a:ln w="11361" cap="flat" cmpd="sng" algn="ctr">
+              <a:solidFill>
+                <a:srgbClr val="4472C4"/>
+              </a:solidFill>
+              <a:prstDash val="solid"/>
+              <a:tailEnd type="triangle"/>
+            </a:ln>
+            <a:effectLst/>
+          </p:spPr>
+          <p:style>
+            <a:lnRef idx="1">
+              <a:schemeClr val="accent1"/>
+            </a:lnRef>
+            <a:fillRef idx="0">
+              <a:schemeClr val="accent1"/>
+            </a:fillRef>
+            <a:effectRef idx="0">
+              <a:schemeClr val="accent1"/>
+            </a:effectRef>
+            <a:fontRef idx="minor">
+              <a:schemeClr val="tx1"/>
+            </a:fontRef>
+          </p:style>
+        </p:cxnSp>
+        <p:cxnSp>
+          <p:nvCxnSpPr>
+            <p:cNvPr id="21" name="edge_d71_03_PLATFORM_DOMAIN_PLATFORM_to_PLATFORM_DOMAIN_WIN_DIRECT" title="② プラットフォーム別 → ④ Windows直接接続">
+              <a:extLst>
+                <a:ext uri="{FF2B5EF4-FFF2-40B4-BE49-F238E27FC236}">
+                  <a16:creationId xmlns:a16="http://schemas.microsoft.com/office/drawing/2014/main" id="{7E3B9609-7835-BDB3-FFFD-68C1631B6473}"/>
+                </a:ext>
+              </a:extLst>
+            </p:cNvPr>
+            <p:cNvCxnSpPr>
+              <a:endCxn id="11" idx="1"/>
+            </p:cNvCxnSpPr>
+            <p:nvPr/>
+          </p:nvCxnSpPr>
+          <p:spPr>
+            <a:xfrm rot="16200000" flipH="1">
+              <a:off x="4343631" y="4124198"/>
+              <a:ext cx="772055" cy="495388"/>
+            </a:xfrm>
+            <a:prstGeom prst="bentConnector2">
+              <a:avLst/>
+            </a:prstGeom>
+            <a:noFill/>
+            <a:ln w="11361" cap="flat" cmpd="sng" algn="ctr">
+              <a:solidFill>
+                <a:srgbClr val="4472C4"/>
+              </a:solidFill>
+              <a:prstDash val="solid"/>
+              <a:tailEnd type="triangle"/>
+            </a:ln>
+            <a:effectLst/>
+          </p:spPr>
+          <p:style>
+            <a:lnRef idx="1">
+              <a:schemeClr val="accent1"/>
+            </a:lnRef>
+            <a:fillRef idx="0">
+              <a:schemeClr val="accent1"/>
+            </a:fillRef>
+            <a:effectRef idx="0">
+              <a:schemeClr val="accent1"/>
+            </a:effectRef>
+            <a:fontRef idx="minor">
+              <a:schemeClr val="tx1"/>
+            </a:fontRef>
+          </p:style>
+        </p:cxnSp>
+        <p:cxnSp>
+          <p:nvCxnSpPr>
+            <p:cNvPr id="22" name="edge_d71_04_PLATFORM_DOMAIN_PLATFORM_to_PLATFORM_DOMAIN_IOS" title="② プラットフォーム別 → ⑤ iOS直接接続">
+              <a:extLst>
+                <a:ext uri="{FF2B5EF4-FFF2-40B4-BE49-F238E27FC236}">
+                  <a16:creationId xmlns:a16="http://schemas.microsoft.com/office/drawing/2014/main" id="{123A8B5E-5DD8-08DA-B331-2B799A00869A}"/>
+                </a:ext>
+              </a:extLst>
+            </p:cNvPr>
+            <p:cNvCxnSpPr/>
+            <p:nvPr/>
+          </p:nvCxnSpPr>
+          <p:spPr>
+            <a:xfrm>
+              <a:off x="4481965" y="3985866"/>
+              <a:ext cx="493937" cy="218187"/>
+            </a:xfrm>
+            <a:prstGeom prst="bentConnector3">
+              <a:avLst>
+                <a:gd name="adj1" fmla="val 50000"/>
+              </a:avLst>
+            </a:prstGeom>
+            <a:noFill/>
+            <a:ln w="11361" cap="flat" cmpd="sng" algn="ctr">
+              <a:solidFill>
+                <a:srgbClr val="4472C4"/>
+              </a:solidFill>
+              <a:prstDash val="solid"/>
+              <a:tailEnd type="triangle"/>
+            </a:ln>
+            <a:effectLst/>
+          </p:spPr>
+          <p:style>
+            <a:lnRef idx="1">
+              <a:schemeClr val="accent1"/>
+            </a:lnRef>
+            <a:fillRef idx="0">
+              <a:schemeClr val="accent1"/>
+            </a:fillRef>
+            <a:effectRef idx="0">
+              <a:schemeClr val="accent1"/>
+            </a:effectRef>
+            <a:fontRef idx="minor">
+              <a:schemeClr val="tx1"/>
+            </a:fontRef>
+          </p:style>
+        </p:cxnSp>
+        <p:cxnSp>
+          <p:nvCxnSpPr>
+            <p:cNvPr id="23" name="edge_d71_05_PLATFORM_DOMAIN_PLATFORM_to_PLATFORM_DOMAIN_ANDROID" title="② プラットフォーム別 → ⑥ Android直接接続">
+              <a:extLst>
+                <a:ext uri="{FF2B5EF4-FFF2-40B4-BE49-F238E27FC236}">
+                  <a16:creationId xmlns:a16="http://schemas.microsoft.com/office/drawing/2014/main" id="{130093F2-C2A4-3CC6-2D8F-48C67CA49431}"/>
+                </a:ext>
+              </a:extLst>
+            </p:cNvPr>
+            <p:cNvCxnSpPr>
+              <a:endCxn id="8" idx="1"/>
+            </p:cNvCxnSpPr>
+            <p:nvPr/>
+          </p:nvCxnSpPr>
+          <p:spPr>
+            <a:xfrm rot="5400000" flipH="1" flipV="1">
+              <a:off x="4040526" y="3052530"/>
+              <a:ext cx="1373157" cy="490284"/>
+            </a:xfrm>
+            <a:prstGeom prst="curvedConnector2">
+              <a:avLst/>
+            </a:prstGeom>
+            <a:noFill/>
+            <a:ln w="11361" cap="flat" cmpd="sng" algn="ctr">
+              <a:solidFill>
+                <a:srgbClr val="7F7F7F"/>
+              </a:solidFill>
+              <a:prstDash val="dash"/>
+              <a:tailEnd type="triangle"/>
+            </a:ln>
+            <a:effectLst/>
+          </p:spPr>
+          <p:style>
+            <a:lnRef idx="1">
+              <a:schemeClr val="accent1"/>
+            </a:lnRef>
+            <a:fillRef idx="0">
+              <a:schemeClr val="accent1"/>
+            </a:fillRef>
+            <a:effectRef idx="0">
+              <a:schemeClr val="accent1"/>
+            </a:effectRef>
+            <a:fontRef idx="minor">
+              <a:schemeClr val="tx1"/>
+            </a:fontRef>
+          </p:style>
+        </p:cxnSp>
+        <p:cxnSp>
+          <p:nvCxnSpPr>
+            <p:cNvPr id="24" name="edge_d71_06_PLATFORM_DOMAIN_OPOS_to_PLATFORM_DOMAIN_OPOS_COMM" descr="コマンド変換" title="コマンド変換">
+              <a:extLst>
+                <a:ext uri="{FF2B5EF4-FFF2-40B4-BE49-F238E27FC236}">
+                  <a16:creationId xmlns:a16="http://schemas.microsoft.com/office/drawing/2014/main" id="{10A22FA1-181F-E9A6-06ED-81A47768BA25}"/>
+                </a:ext>
+              </a:extLst>
+            </p:cNvPr>
+            <p:cNvCxnSpPr/>
+            <p:nvPr/>
+          </p:nvCxnSpPr>
+          <p:spPr>
+            <a:xfrm>
+              <a:off x="6005771" y="3739692"/>
+              <a:ext cx="724742" cy="0"/>
+            </a:xfrm>
+            <a:prstGeom prst="straightConnector1">
+              <a:avLst/>
+            </a:prstGeom>
+            <a:noFill/>
+            <a:ln w="11361" cap="flat" cmpd="sng" algn="ctr">
+              <a:solidFill>
+                <a:srgbClr val="4472C4"/>
+              </a:solidFill>
+              <a:prstDash val="solid"/>
+              <a:tailEnd type="triangle"/>
+            </a:ln>
+            <a:effectLst/>
+          </p:spPr>
+          <p:style>
+            <a:lnRef idx="1">
+              <a:schemeClr val="accent1"/>
+            </a:lnRef>
+            <a:fillRef idx="0">
+              <a:schemeClr val="accent1"/>
+            </a:fillRef>
+            <a:effectRef idx="0">
+              <a:schemeClr val="accent1"/>
+            </a:effectRef>
+            <a:fontRef idx="minor">
+              <a:schemeClr val="tx1"/>
+            </a:fontRef>
+          </p:style>
+        </p:cxnSp>
+        <p:cxnSp>
+          <p:nvCxnSpPr>
+            <p:cNvPr id="25" name="edge_d71_07_PLATFORM_DOMAIN_DEVICE_CONTRACTS_to_PLATFORM_DOMAIN_OPOS_COMM" descr="共通DTO" title="共通DTO">
+              <a:extLst>
+                <a:ext uri="{FF2B5EF4-FFF2-40B4-BE49-F238E27FC236}">
+                  <a16:creationId xmlns:a16="http://schemas.microsoft.com/office/drawing/2014/main" id="{6213ED30-3B56-EC55-E473-6A9A218DE39E}"/>
+                </a:ext>
+              </a:extLst>
+            </p:cNvPr>
+            <p:cNvCxnSpPr>
+              <a:cxnSpLocks/>
+              <a:stCxn id="14" idx="2"/>
+              <a:endCxn id="9" idx="0"/>
+            </p:cNvCxnSpPr>
+            <p:nvPr/>
+          </p:nvCxnSpPr>
+          <p:spPr>
+            <a:xfrm rot="16200000" flipH="1">
+              <a:off x="7390158" y="3120532"/>
+              <a:ext cx="303174" cy="452143"/>
+            </a:xfrm>
+            <a:prstGeom prst="curvedConnector3">
+              <a:avLst>
+                <a:gd name="adj1" fmla="val 50000"/>
+              </a:avLst>
+            </a:prstGeom>
+            <a:noFill/>
+            <a:ln w="11361" cap="flat" cmpd="sng" algn="ctr">
+              <a:solidFill>
+                <a:srgbClr val="7F7F7F"/>
+              </a:solidFill>
+              <a:prstDash val="dash"/>
+              <a:tailEnd type="triangle"/>
+            </a:ln>
+            <a:effectLst/>
+          </p:spPr>
+          <p:style>
+            <a:lnRef idx="1">
+              <a:schemeClr val="accent1"/>
+            </a:lnRef>
+            <a:fillRef idx="0">
+              <a:schemeClr val="accent1"/>
+            </a:fillRef>
+            <a:effectRef idx="0">
+              <a:schemeClr val="accent1"/>
+            </a:effectRef>
+            <a:fontRef idx="minor">
+              <a:schemeClr val="tx1"/>
+            </a:fontRef>
+          </p:style>
+        </p:cxnSp>
+        <p:cxnSp>
+          <p:nvCxnSpPr>
+            <p:cNvPr id="26" name="edge_d71_08_PLATFORM_DOMAIN_OPOS_COMM_to_EXTERNAL_DOMAIN_CONNECTOR" descr="名前付きパイプ通信" title="名前付きパイプ通信">
+              <a:extLst>
+                <a:ext uri="{FF2B5EF4-FFF2-40B4-BE49-F238E27FC236}">
+                  <a16:creationId xmlns:a16="http://schemas.microsoft.com/office/drawing/2014/main" id="{4C99304C-6231-26C5-7783-A93121464F0E}"/>
+                </a:ext>
+              </a:extLst>
+            </p:cNvPr>
+            <p:cNvCxnSpPr>
+              <a:cxnSpLocks/>
+              <a:endCxn id="16" idx="0"/>
+            </p:cNvCxnSpPr>
+            <p:nvPr/>
+          </p:nvCxnSpPr>
+          <p:spPr>
+            <a:xfrm flipV="1">
+              <a:off x="8799389" y="3555599"/>
+              <a:ext cx="1389100" cy="178709"/>
+            </a:xfrm>
+            <a:prstGeom prst="bentConnector4">
+              <a:avLst>
+                <a:gd name="adj1" fmla="val 21256"/>
+                <a:gd name="adj2" fmla="val 224966"/>
+              </a:avLst>
+            </a:prstGeom>
+            <a:noFill/>
+            <a:ln w="11361" cap="flat" cmpd="sng" algn="ctr">
+              <a:solidFill>
+                <a:srgbClr val="4472C4"/>
+              </a:solidFill>
+              <a:prstDash val="solid"/>
+              <a:tailEnd type="triangle"/>
+            </a:ln>
+            <a:effectLst/>
+          </p:spPr>
+          <p:style>
+            <a:lnRef idx="1">
+              <a:schemeClr val="accent1"/>
+            </a:lnRef>
+            <a:fillRef idx="0">
+              <a:schemeClr val="accent1"/>
+            </a:fillRef>
+            <a:effectRef idx="0">
+              <a:schemeClr val="accent1"/>
+            </a:effectRef>
+            <a:fontRef idx="minor">
+              <a:schemeClr val="tx1"/>
+            </a:fontRef>
+          </p:style>
+        </p:cxnSp>
+        <p:cxnSp>
+          <p:nvCxnSpPr>
+            <p:cNvPr id="27" name="edge_d71_09_PLATFORM_DOMAIN_WIN_DIRECT_to_EXTERNAL_DOMAIN_WIN_API" descr="直接接続" title="直接接続">
+              <a:extLst>
+                <a:ext uri="{FF2B5EF4-FFF2-40B4-BE49-F238E27FC236}">
+                  <a16:creationId xmlns:a16="http://schemas.microsoft.com/office/drawing/2014/main" id="{6308969E-3A19-832E-2531-551E228F051D}"/>
+                </a:ext>
+              </a:extLst>
+            </p:cNvPr>
+            <p:cNvCxnSpPr>
+              <a:cxnSpLocks/>
+              <a:stCxn id="11" idx="3"/>
+              <a:endCxn id="13" idx="1"/>
+            </p:cNvCxnSpPr>
+            <p:nvPr/>
+          </p:nvCxnSpPr>
+          <p:spPr>
+            <a:xfrm>
+              <a:off x="6169539" y="4762681"/>
+              <a:ext cx="2969554" cy="723"/>
+            </a:xfrm>
+            <a:prstGeom prst="straightConnector1">
+              <a:avLst/>
+            </a:prstGeom>
+            <a:noFill/>
+            <a:ln w="11361" cap="flat" cmpd="sng" algn="ctr">
+              <a:solidFill>
+                <a:srgbClr val="4472C4"/>
+              </a:solidFill>
+              <a:prstDash val="solid"/>
+              <a:tailEnd type="triangle"/>
+            </a:ln>
+            <a:effectLst/>
+          </p:spPr>
+          <p:style>
+            <a:lnRef idx="1">
+              <a:schemeClr val="accent1"/>
+            </a:lnRef>
+            <a:fillRef idx="0">
+              <a:schemeClr val="accent1"/>
+            </a:fillRef>
+            <a:effectRef idx="0">
+              <a:schemeClr val="accent1"/>
+            </a:effectRef>
+            <a:fontRef idx="minor">
+              <a:schemeClr val="tx1"/>
+            </a:fontRef>
+          </p:style>
+        </p:cxnSp>
+        <p:cxnSp>
+          <p:nvCxnSpPr>
+            <p:cNvPr id="28" name="edge_d71_10_PLATFORM_DOMAIN_IOS_to_EXTERNAL_DOMAIN_IOS_API" descr="直接接続" title="直接接続">
+              <a:extLst>
+                <a:ext uri="{FF2B5EF4-FFF2-40B4-BE49-F238E27FC236}">
+                  <a16:creationId xmlns:a16="http://schemas.microsoft.com/office/drawing/2014/main" id="{BE2172E5-D08F-03DB-0B05-02D132CF1FC9}"/>
+                </a:ext>
+              </a:extLst>
+            </p:cNvPr>
+            <p:cNvCxnSpPr>
+              <a:cxnSpLocks/>
+              <a:stCxn id="15" idx="3"/>
+              <a:endCxn id="10" idx="1"/>
+            </p:cNvCxnSpPr>
+            <p:nvPr/>
+          </p:nvCxnSpPr>
+          <p:spPr>
+            <a:xfrm flipV="1">
+              <a:off x="6093616" y="4202278"/>
+              <a:ext cx="3035219" cy="1348"/>
+            </a:xfrm>
+            <a:prstGeom prst="straightConnector1">
+              <a:avLst/>
+            </a:prstGeom>
+            <a:noFill/>
+            <a:ln w="11361" cap="flat" cmpd="sng" algn="ctr">
+              <a:solidFill>
+                <a:srgbClr val="4472C4"/>
+              </a:solidFill>
+              <a:prstDash val="solid"/>
+              <a:tailEnd type="triangle"/>
+            </a:ln>
+            <a:effectLst/>
+          </p:spPr>
+          <p:style>
+            <a:lnRef idx="1">
+              <a:schemeClr val="accent1"/>
+            </a:lnRef>
+            <a:fillRef idx="0">
+              <a:schemeClr val="accent1"/>
+            </a:fillRef>
+            <a:effectRef idx="0">
+              <a:schemeClr val="accent1"/>
+            </a:effectRef>
+            <a:fontRef idx="minor">
+              <a:schemeClr val="tx1"/>
+            </a:fontRef>
+          </p:style>
+        </p:cxnSp>
+        <p:cxnSp>
+          <p:nvCxnSpPr>
+            <p:cNvPr id="29" name="edge_d71_11_PLATFORM_DOMAIN_ANDROID_to_EXTERNAL_DOMAIN_ANDROID_API" descr="現在は接続しない" title="現在は接続しない">
+              <a:extLst>
+                <a:ext uri="{FF2B5EF4-FFF2-40B4-BE49-F238E27FC236}">
+                  <a16:creationId xmlns:a16="http://schemas.microsoft.com/office/drawing/2014/main" id="{765B0177-7BFA-9808-266E-38EE20CF6041}"/>
+                </a:ext>
+              </a:extLst>
+            </p:cNvPr>
+            <p:cNvCxnSpPr>
+              <a:cxnSpLocks/>
+              <a:stCxn id="8" idx="3"/>
+              <a:endCxn id="12" idx="1"/>
+            </p:cNvCxnSpPr>
+            <p:nvPr/>
+          </p:nvCxnSpPr>
+          <p:spPr>
+            <a:xfrm flipV="1">
+              <a:off x="6310605" y="2600259"/>
+              <a:ext cx="2810628" cy="10832"/>
+            </a:xfrm>
+            <a:prstGeom prst="straightConnector1">
+              <a:avLst/>
+            </a:prstGeom>
+            <a:noFill/>
+            <a:ln w="11361" cap="flat" cmpd="sng" algn="ctr">
+              <a:solidFill>
+                <a:srgbClr val="7F7F7F"/>
+              </a:solidFill>
+              <a:prstDash val="dash"/>
+              <a:tailEnd type="triangle"/>
+            </a:ln>
+            <a:effectLst/>
+          </p:spPr>
+          <p:style>
+            <a:lnRef idx="1">
+              <a:schemeClr val="accent1"/>
+            </a:lnRef>
+            <a:fillRef idx="0">
+              <a:schemeClr val="accent1"/>
+            </a:fillRef>
+            <a:effectRef idx="0">
+              <a:schemeClr val="accent1"/>
+            </a:effectRef>
+            <a:fontRef idx="minor">
+              <a:schemeClr val="tx1"/>
+            </a:fontRef>
+          </p:style>
+        </p:cxnSp>
+        <p:sp>
+          <p:nvSpPr>
+            <p:cNvPr id="30" name="edge_label_d71_01_PLATFORM_DOMAIN_CONTRACT_to_PLATFORM_DOMAIN_PLATFORM" descr="実装クラス群" title="実装クラス群">
+              <a:extLst>
+                <a:ext uri="{FF2B5EF4-FFF2-40B4-BE49-F238E27FC236}">
+                  <a16:creationId xmlns:a16="http://schemas.microsoft.com/office/drawing/2014/main" id="{F7E815C4-DD4F-0C64-5FA4-4F72855885C2}"/>
+                </a:ext>
+              </a:extLst>
+            </p:cNvPr>
+            <p:cNvSpPr txBox="1"/>
+            <p:nvPr/>
+          </p:nvSpPr>
+          <p:spPr>
+            <a:xfrm>
+              <a:off x="2930921" y="3939765"/>
+              <a:ext cx="417269" cy="92203"/>
+            </a:xfrm>
+            <a:prstGeom prst="rect">
+              <a:avLst/>
+            </a:prstGeom>
+            <a:solidFill>
+              <a:srgbClr val="FFFFFF"/>
+            </a:solidFill>
+            <a:ln w="11361">
+              <a:solidFill>
+                <a:srgbClr val="1F4E79"/>
+              </a:solidFill>
+            </a:ln>
+          </p:spPr>
+          <p:txBody>
+            <a:bodyPr vert="horz" wrap="square" lIns="17042" tIns="5681" rIns="17042" bIns="5681" rtlCol="0" anchor="ctr">
+              <a:noAutofit/>
+            </a:bodyPr>
+            <a:lstStyle>
+              <a:defPPr>
+                <a:defRPr lang="en-US"/>
+              </a:defPPr>
+              <a:lvl1pPr marL="0" indent="0" algn="l" defTabSz="457200" rtl="0" eaLnBrk="1" latinLnBrk="0" hangingPunct="1">
+                <a:defRPr sz="1800" kern="1200">
+                  <a:solidFill>
+                    <a:schemeClr val="tx1"/>
+                  </a:solidFill>
+                  <a:latin typeface="+mn-lt"/>
+                  <a:ea typeface="+mn-ea"/>
+                  <a:cs typeface="+mn-cs"/>
+                </a:defRPr>
+              </a:lvl1pPr>
+              <a:lvl2pPr marL="457200" indent="0" algn="l" defTabSz="457200" rtl="0" eaLnBrk="1" latinLnBrk="0" hangingPunct="1">
+                <a:defRPr sz="1800" kern="1200">
+                  <a:solidFill>
+                    <a:schemeClr val="tx1"/>
+                  </a:solidFill>
+                  <a:latin typeface="+mn-lt"/>
+                  <a:ea typeface="+mn-ea"/>
+                  <a:cs typeface="+mn-cs"/>
+                </a:defRPr>
+              </a:lvl2pPr>
+              <a:lvl3pPr marL="914400" indent="0" algn="l" defTabSz="457200" rtl="0" eaLnBrk="1" latinLnBrk="0" hangingPunct="1">
+                <a:defRPr sz="1800" kern="1200">
+                  <a:solidFill>
+                    <a:schemeClr val="tx1"/>
+                  </a:solidFill>
+                  <a:latin typeface="+mn-lt"/>
+                  <a:ea typeface="+mn-ea"/>
+                  <a:cs typeface="+mn-cs"/>
+                </a:defRPr>
+              </a:lvl3pPr>
+              <a:lvl4pPr marL="1371600" indent="0" algn="l" defTabSz="457200" rtl="0" eaLnBrk="1" latinLnBrk="0" hangingPunct="1">
+                <a:defRPr sz="1800" kern="1200">
+                  <a:solidFill>
+                    <a:schemeClr val="tx1"/>
+                  </a:solidFill>
+                  <a:latin typeface="+mn-lt"/>
+                  <a:ea typeface="+mn-ea"/>
+                  <a:cs typeface="+mn-cs"/>
+                </a:defRPr>
+              </a:lvl4pPr>
+              <a:lvl5pPr marL="1828800" indent="0" algn="l" defTabSz="457200" rtl="0" eaLnBrk="1" latinLnBrk="0" hangingPunct="1">
+                <a:defRPr sz="1800" kern="1200">
+                  <a:solidFill>
+                    <a:schemeClr val="tx1"/>
+                  </a:solidFill>
+                  <a:latin typeface="+mn-lt"/>
+                  <a:ea typeface="+mn-ea"/>
+                  <a:cs typeface="+mn-cs"/>
+                </a:defRPr>
+              </a:lvl5pPr>
+              <a:lvl6pPr marL="2286000" indent="0" algn="l" defTabSz="457200" rtl="0" eaLnBrk="1" latinLnBrk="0" hangingPunct="1">
+                <a:defRPr sz="1800" kern="1200">
+                  <a:solidFill>
+                    <a:schemeClr val="tx1"/>
+                  </a:solidFill>
+                  <a:latin typeface="+mn-lt"/>
+                  <a:ea typeface="+mn-ea"/>
+                  <a:cs typeface="+mn-cs"/>
+                </a:defRPr>
+              </a:lvl6pPr>
+              <a:lvl7pPr marL="2743200" indent="0" algn="l" defTabSz="457200" rtl="0" eaLnBrk="1" latinLnBrk="0" hangingPunct="1">
+                <a:defRPr sz="1800" kern="1200">
+                  <a:solidFill>
+                    <a:schemeClr val="tx1"/>
+                  </a:solidFill>
+                  <a:latin typeface="+mn-lt"/>
+                  <a:ea typeface="+mn-ea"/>
+                  <a:cs typeface="+mn-cs"/>
+                </a:defRPr>
+              </a:lvl7pPr>
+              <a:lvl8pPr marL="3200400" indent="0" algn="l" defTabSz="457200" rtl="0" eaLnBrk="1" latinLnBrk="0" hangingPunct="1">
+                <a:defRPr sz="1800" kern="1200">
+                  <a:solidFill>
+                    <a:schemeClr val="tx1"/>
+                  </a:solidFill>
+                  <a:latin typeface="+mn-lt"/>
+                  <a:ea typeface="+mn-ea"/>
+                  <a:cs typeface="+mn-cs"/>
+                </a:defRPr>
+              </a:lvl8pPr>
+              <a:lvl9pPr marL="3657600" indent="0" algn="l" defTabSz="457200" rtl="0" eaLnBrk="1" latinLnBrk="0" hangingPunct="1">
+                <a:defRPr sz="1800" kern="1200">
+                  <a:solidFill>
+                    <a:schemeClr val="tx1"/>
+                  </a:solidFill>
+                  <a:latin typeface="+mn-lt"/>
+                  <a:ea typeface="+mn-ea"/>
+                  <a:cs typeface="+mn-cs"/>
+                </a:defRPr>
+              </a:lvl9pPr>
+            </a:lstStyle>
+            <a:p>
+              <a:pPr algn="ctr"/>
+              <a:r>
+                <a:rPr kumimoji="0" lang="ja-JP" altLang="en-US" sz="402" b="0" i="0" u="none" strike="noStrike" kern="0" cap="none" spc="0" normalizeH="0" baseline="0">
+                  <a:ln>
+                    <a:noFill/>
+                  </a:ln>
+                  <a:solidFill>
+                    <a:srgbClr val="111111"/>
+                  </a:solidFill>
+                  <a:effectLst/>
+                  <a:uLnTx/>
+                  <a:uFillTx/>
+                  <a:latin typeface="Meiryo UI"/>
+                  <a:ea typeface="Meiryo UI"/>
+                </a:rPr>
+                <a:t>実装クラス群</a:t>
+              </a:r>
+            </a:p>
+          </p:txBody>
+        </p:sp>
+        <p:sp>
+          <p:nvSpPr>
+            <p:cNvPr id="31" name="edge_label_d71_06_PLATFORM_DOMAIN_OPOS_to_PLATFORM_DOMAIN_OPOS_COMM" descr="コマンド変換" title="コマンド変換">
+              <a:extLst>
+                <a:ext uri="{FF2B5EF4-FFF2-40B4-BE49-F238E27FC236}">
+                  <a16:creationId xmlns:a16="http://schemas.microsoft.com/office/drawing/2014/main" id="{F1EC54C2-B74A-4867-76E8-208A992F68D0}"/>
+                </a:ext>
+              </a:extLst>
+            </p:cNvPr>
+            <p:cNvSpPr txBox="1"/>
+            <p:nvPr/>
+          </p:nvSpPr>
+          <p:spPr>
+            <a:xfrm>
+              <a:off x="6118833" y="3682021"/>
+              <a:ext cx="477621" cy="101728"/>
+            </a:xfrm>
+            <a:prstGeom prst="rect">
+              <a:avLst/>
+            </a:prstGeom>
+            <a:solidFill>
+              <a:srgbClr val="FFFFFF"/>
+            </a:solidFill>
+            <a:ln w="11361">
+              <a:solidFill>
+                <a:srgbClr val="1F4E79"/>
+              </a:solidFill>
+            </a:ln>
+          </p:spPr>
+          <p:txBody>
+            <a:bodyPr vert="horz" wrap="square" lIns="17042" tIns="5681" rIns="17042" bIns="5681" rtlCol="0" anchor="ctr">
+              <a:noAutofit/>
+            </a:bodyPr>
+            <a:lstStyle>
+              <a:defPPr>
+                <a:defRPr lang="en-US"/>
+              </a:defPPr>
+              <a:lvl1pPr marL="0" indent="0" algn="l" defTabSz="457200" rtl="0" eaLnBrk="1" latinLnBrk="0" hangingPunct="1">
+                <a:defRPr sz="1800" kern="1200">
+                  <a:solidFill>
+                    <a:schemeClr val="tx1"/>
+                  </a:solidFill>
+                  <a:latin typeface="+mn-lt"/>
+                  <a:ea typeface="+mn-ea"/>
+                  <a:cs typeface="+mn-cs"/>
+                </a:defRPr>
+              </a:lvl1pPr>
+              <a:lvl2pPr marL="457200" indent="0" algn="l" defTabSz="457200" rtl="0" eaLnBrk="1" latinLnBrk="0" hangingPunct="1">
+                <a:defRPr sz="1800" kern="1200">
+                  <a:solidFill>
+                    <a:schemeClr val="tx1"/>
+                  </a:solidFill>
+                  <a:latin typeface="+mn-lt"/>
+                  <a:ea typeface="+mn-ea"/>
+                  <a:cs typeface="+mn-cs"/>
+                </a:defRPr>
+              </a:lvl2pPr>
+              <a:lvl3pPr marL="914400" indent="0" algn="l" defTabSz="457200" rtl="0" eaLnBrk="1" latinLnBrk="0" hangingPunct="1">
+                <a:defRPr sz="1800" kern="1200">
+                  <a:solidFill>
+                    <a:schemeClr val="tx1"/>
+                  </a:solidFill>
+                  <a:latin typeface="+mn-lt"/>
+                  <a:ea typeface="+mn-ea"/>
+                  <a:cs typeface="+mn-cs"/>
+                </a:defRPr>
+              </a:lvl3pPr>
+              <a:lvl4pPr marL="1371600" indent="0" algn="l" defTabSz="457200" rtl="0" eaLnBrk="1" latinLnBrk="0" hangingPunct="1">
+                <a:defRPr sz="1800" kern="1200">
+                  <a:solidFill>
+                    <a:schemeClr val="tx1"/>
+                  </a:solidFill>
+                  <a:latin typeface="+mn-lt"/>
+                  <a:ea typeface="+mn-ea"/>
+                  <a:cs typeface="+mn-cs"/>
+                </a:defRPr>
+              </a:lvl4pPr>
+              <a:lvl5pPr marL="1828800" indent="0" algn="l" defTabSz="457200" rtl="0" eaLnBrk="1" latinLnBrk="0" hangingPunct="1">
+                <a:defRPr sz="1800" kern="1200">
+                  <a:solidFill>
+                    <a:schemeClr val="tx1"/>
+                  </a:solidFill>
+                  <a:latin typeface="+mn-lt"/>
+                  <a:ea typeface="+mn-ea"/>
+                  <a:cs typeface="+mn-cs"/>
+                </a:defRPr>
+              </a:lvl5pPr>
+              <a:lvl6pPr marL="2286000" indent="0" algn="l" defTabSz="457200" rtl="0" eaLnBrk="1" latinLnBrk="0" hangingPunct="1">
+                <a:defRPr sz="1800" kern="1200">
+                  <a:solidFill>
+                    <a:schemeClr val="tx1"/>
+                  </a:solidFill>
+                  <a:latin typeface="+mn-lt"/>
+                  <a:ea typeface="+mn-ea"/>
+                  <a:cs typeface="+mn-cs"/>
+                </a:defRPr>
+              </a:lvl6pPr>
+              <a:lvl7pPr marL="2743200" indent="0" algn="l" defTabSz="457200" rtl="0" eaLnBrk="1" latinLnBrk="0" hangingPunct="1">
+                <a:defRPr sz="1800" kern="1200">
+                  <a:solidFill>
+                    <a:schemeClr val="tx1"/>
+                  </a:solidFill>
+                  <a:latin typeface="+mn-lt"/>
+                  <a:ea typeface="+mn-ea"/>
+                  <a:cs typeface="+mn-cs"/>
+                </a:defRPr>
+              </a:lvl7pPr>
+              <a:lvl8pPr marL="3200400" indent="0" algn="l" defTabSz="457200" rtl="0" eaLnBrk="1" latinLnBrk="0" hangingPunct="1">
+                <a:defRPr sz="1800" kern="1200">
+                  <a:solidFill>
+                    <a:schemeClr val="tx1"/>
+                  </a:solidFill>
+                  <a:latin typeface="+mn-lt"/>
+                  <a:ea typeface="+mn-ea"/>
+                  <a:cs typeface="+mn-cs"/>
+                </a:defRPr>
+              </a:lvl8pPr>
+              <a:lvl9pPr marL="3657600" indent="0" algn="l" defTabSz="457200" rtl="0" eaLnBrk="1" latinLnBrk="0" hangingPunct="1">
+                <a:defRPr sz="1800" kern="1200">
+                  <a:solidFill>
+                    <a:schemeClr val="tx1"/>
+                  </a:solidFill>
+                  <a:latin typeface="+mn-lt"/>
+                  <a:ea typeface="+mn-ea"/>
+                  <a:cs typeface="+mn-cs"/>
+                </a:defRPr>
+              </a:lvl9pPr>
+            </a:lstStyle>
+            <a:p>
+              <a:pPr algn="ctr"/>
+              <a:r>
+                <a:rPr kumimoji="0" lang="ja-JP" altLang="en-US" sz="402" b="0" i="0" u="none" strike="noStrike" kern="0" cap="none" spc="0" normalizeH="0" baseline="0">
+                  <a:ln>
+                    <a:noFill/>
+                  </a:ln>
+                  <a:solidFill>
+                    <a:srgbClr val="111111"/>
+                  </a:solidFill>
+                  <a:effectLst/>
+                  <a:uLnTx/>
+                  <a:uFillTx/>
+                  <a:latin typeface="Meiryo UI"/>
+                  <a:ea typeface="Meiryo UI"/>
+                </a:rPr>
+                <a:t>コマンド変換</a:t>
+              </a:r>
+            </a:p>
+          </p:txBody>
+        </p:sp>
+        <p:sp>
+          <p:nvSpPr>
+            <p:cNvPr id="32" name="edge_label_d71_07_PLATFORM_DOMAIN_DEVICE_CONTRACTS_to_PLATFORM_DOMAIN_OPOS_COMM" descr="共通DTO" title="共通DTO">
+              <a:extLst>
+                <a:ext uri="{FF2B5EF4-FFF2-40B4-BE49-F238E27FC236}">
+                  <a16:creationId xmlns:a16="http://schemas.microsoft.com/office/drawing/2014/main" id="{62355FCA-F607-6881-8441-9FC9E7FC9266}"/>
+                </a:ext>
+              </a:extLst>
+            </p:cNvPr>
+            <p:cNvSpPr txBox="1"/>
+            <p:nvPr/>
+          </p:nvSpPr>
+          <p:spPr>
+            <a:xfrm>
+              <a:off x="7149487" y="3281235"/>
+              <a:ext cx="716726" cy="93511"/>
+            </a:xfrm>
+            <a:prstGeom prst="rect">
+              <a:avLst/>
+            </a:prstGeom>
+            <a:solidFill>
+              <a:srgbClr val="FFFFFF"/>
+            </a:solidFill>
+            <a:ln w="11361">
+              <a:solidFill>
+                <a:srgbClr val="1F4E79"/>
+              </a:solidFill>
+            </a:ln>
+          </p:spPr>
+          <p:txBody>
+            <a:bodyPr vert="horz" wrap="square" lIns="17042" tIns="5681" rIns="17042" bIns="5681" rtlCol="0" anchor="ctr">
+              <a:noAutofit/>
+            </a:bodyPr>
+            <a:lstStyle>
+              <a:defPPr>
+                <a:defRPr lang="en-US"/>
+              </a:defPPr>
+              <a:lvl1pPr marL="0" indent="0" algn="l" defTabSz="457200" rtl="0" eaLnBrk="1" latinLnBrk="0" hangingPunct="1">
+                <a:defRPr sz="1800" kern="1200">
+                  <a:solidFill>
+                    <a:schemeClr val="tx1"/>
+                  </a:solidFill>
+                  <a:latin typeface="+mn-lt"/>
+                  <a:ea typeface="+mn-ea"/>
+                  <a:cs typeface="+mn-cs"/>
+                </a:defRPr>
+              </a:lvl1pPr>
+              <a:lvl2pPr marL="457200" indent="0" algn="l" defTabSz="457200" rtl="0" eaLnBrk="1" latinLnBrk="0" hangingPunct="1">
+                <a:defRPr sz="1800" kern="1200">
+                  <a:solidFill>
+                    <a:schemeClr val="tx1"/>
+                  </a:solidFill>
+                  <a:latin typeface="+mn-lt"/>
+                  <a:ea typeface="+mn-ea"/>
+                  <a:cs typeface="+mn-cs"/>
+                </a:defRPr>
+              </a:lvl2pPr>
+              <a:lvl3pPr marL="914400" indent="0" algn="l" defTabSz="457200" rtl="0" eaLnBrk="1" latinLnBrk="0" hangingPunct="1">
+                <a:defRPr sz="1800" kern="1200">
+                  <a:solidFill>
+                    <a:schemeClr val="tx1"/>
+                  </a:solidFill>
+                  <a:latin typeface="+mn-lt"/>
+                  <a:ea typeface="+mn-ea"/>
+                  <a:cs typeface="+mn-cs"/>
+                </a:defRPr>
+              </a:lvl3pPr>
+              <a:lvl4pPr marL="1371600" indent="0" algn="l" defTabSz="457200" rtl="0" eaLnBrk="1" latinLnBrk="0" hangingPunct="1">
+                <a:defRPr sz="1800" kern="1200">
+                  <a:solidFill>
+                    <a:schemeClr val="tx1"/>
+                  </a:solidFill>
+                  <a:latin typeface="+mn-lt"/>
+                  <a:ea typeface="+mn-ea"/>
+                  <a:cs typeface="+mn-cs"/>
+                </a:defRPr>
+              </a:lvl4pPr>
+              <a:lvl5pPr marL="1828800" indent="0" algn="l" defTabSz="457200" rtl="0" eaLnBrk="1" latinLnBrk="0" hangingPunct="1">
+                <a:defRPr sz="1800" kern="1200">
+                  <a:solidFill>
+                    <a:schemeClr val="tx1"/>
+                  </a:solidFill>
+                  <a:latin typeface="+mn-lt"/>
+                  <a:ea typeface="+mn-ea"/>
+                  <a:cs typeface="+mn-cs"/>
+                </a:defRPr>
+              </a:lvl5pPr>
+              <a:lvl6pPr marL="2286000" indent="0" algn="l" defTabSz="457200" rtl="0" eaLnBrk="1" latinLnBrk="0" hangingPunct="1">
+                <a:defRPr sz="1800" kern="1200">
+                  <a:solidFill>
+                    <a:schemeClr val="tx1"/>
+                  </a:solidFill>
+                  <a:latin typeface="+mn-lt"/>
+                  <a:ea typeface="+mn-ea"/>
+                  <a:cs typeface="+mn-cs"/>
+                </a:defRPr>
+              </a:lvl6pPr>
+              <a:lvl7pPr marL="2743200" indent="0" algn="l" defTabSz="457200" rtl="0" eaLnBrk="1" latinLnBrk="0" hangingPunct="1">
+                <a:defRPr sz="1800" kern="1200">
+                  <a:solidFill>
+                    <a:schemeClr val="tx1"/>
+                  </a:solidFill>
+                  <a:latin typeface="+mn-lt"/>
+                  <a:ea typeface="+mn-ea"/>
+                  <a:cs typeface="+mn-cs"/>
+                </a:defRPr>
+              </a:lvl7pPr>
+              <a:lvl8pPr marL="3200400" indent="0" algn="l" defTabSz="457200" rtl="0" eaLnBrk="1" latinLnBrk="0" hangingPunct="1">
+                <a:defRPr sz="1800" kern="1200">
+                  <a:solidFill>
+                    <a:schemeClr val="tx1"/>
+                  </a:solidFill>
+                  <a:latin typeface="+mn-lt"/>
+                  <a:ea typeface="+mn-ea"/>
+                  <a:cs typeface="+mn-cs"/>
+                </a:defRPr>
+              </a:lvl8pPr>
+              <a:lvl9pPr marL="3657600" indent="0" algn="l" defTabSz="457200" rtl="0" eaLnBrk="1" latinLnBrk="0" hangingPunct="1">
+                <a:defRPr sz="1800" kern="1200">
+                  <a:solidFill>
+                    <a:schemeClr val="tx1"/>
+                  </a:solidFill>
+                  <a:latin typeface="+mn-lt"/>
+                  <a:ea typeface="+mn-ea"/>
+                  <a:cs typeface="+mn-cs"/>
+                </a:defRPr>
+              </a:lvl9pPr>
+            </a:lstStyle>
+            <a:p>
+              <a:r>
+                <a:rPr lang="ja-JP" altLang="ja-JP" sz="402">
+                  <a:latin typeface="Meiryo UI" panose="020B0604030504040204" pitchFamily="50" charset="-128"/>
+                  <a:ea typeface="Meiryo UI" panose="020B0604030504040204" pitchFamily="50" charset="-128"/>
+                  <a:cs typeface="+mn-cs"/>
+                </a:rPr>
+                <a:t>共通データ形式（DTO）</a:t>
+              </a:r>
+              <a:endParaRPr lang="ja-JP" altLang="ja-JP" sz="402">
+                <a:latin typeface="Meiryo UI" panose="020B0604030504040204" pitchFamily="50" charset="-128"/>
+                <a:ea typeface="Meiryo UI" panose="020B0604030504040204" pitchFamily="50" charset="-128"/>
+              </a:endParaRPr>
+            </a:p>
+          </p:txBody>
+        </p:sp>
+        <p:sp>
+          <p:nvSpPr>
+            <p:cNvPr id="33" name="edge_label_d71_08_PLATFORM_DOMAIN_OPOS_COMM_to_EXTERNAL_DOMAIN_CONNECTOR" descr="名前付きパイプ通信" title="名前付きパイプ通信">
+              <a:extLst>
+                <a:ext uri="{FF2B5EF4-FFF2-40B4-BE49-F238E27FC236}">
+                  <a16:creationId xmlns:a16="http://schemas.microsoft.com/office/drawing/2014/main" id="{FF444EDF-4AE3-A50E-CDD6-C7C6C990B3F1}"/>
+                </a:ext>
+              </a:extLst>
+            </p:cNvPr>
+            <p:cNvSpPr txBox="1"/>
+            <p:nvPr/>
+          </p:nvSpPr>
+          <p:spPr>
+            <a:xfrm>
+              <a:off x="9201469" y="3405798"/>
+              <a:ext cx="504152" cy="73728"/>
+            </a:xfrm>
+            <a:prstGeom prst="rect">
+              <a:avLst/>
+            </a:prstGeom>
+            <a:solidFill>
+              <a:srgbClr val="FFFFFF"/>
+            </a:solidFill>
+            <a:ln w="11361">
+              <a:solidFill>
+                <a:srgbClr val="1F4E79"/>
+              </a:solidFill>
+            </a:ln>
+          </p:spPr>
+          <p:txBody>
+            <a:bodyPr vert="horz" wrap="square" lIns="17042" tIns="5681" rIns="17042" bIns="5681" rtlCol="0" anchor="ctr">
+              <a:noAutofit/>
+            </a:bodyPr>
+            <a:lstStyle>
+              <a:defPPr>
+                <a:defRPr lang="en-US"/>
+              </a:defPPr>
+              <a:lvl1pPr marL="0" indent="0" algn="l" defTabSz="457200" rtl="0" eaLnBrk="1" latinLnBrk="0" hangingPunct="1">
+                <a:defRPr sz="1800" kern="1200">
+                  <a:solidFill>
+                    <a:schemeClr val="tx1"/>
+                  </a:solidFill>
+                  <a:latin typeface="+mn-lt"/>
+                  <a:ea typeface="+mn-ea"/>
+                  <a:cs typeface="+mn-cs"/>
+                </a:defRPr>
+              </a:lvl1pPr>
+              <a:lvl2pPr marL="457200" indent="0" algn="l" defTabSz="457200" rtl="0" eaLnBrk="1" latinLnBrk="0" hangingPunct="1">
+                <a:defRPr sz="1800" kern="1200">
+                  <a:solidFill>
+                    <a:schemeClr val="tx1"/>
+                  </a:solidFill>
+                  <a:latin typeface="+mn-lt"/>
+                  <a:ea typeface="+mn-ea"/>
+                  <a:cs typeface="+mn-cs"/>
+                </a:defRPr>
+              </a:lvl2pPr>
+              <a:lvl3pPr marL="914400" indent="0" algn="l" defTabSz="457200" rtl="0" eaLnBrk="1" latinLnBrk="0" hangingPunct="1">
+                <a:defRPr sz="1800" kern="1200">
+                  <a:solidFill>
+                    <a:schemeClr val="tx1"/>
+                  </a:solidFill>
+                  <a:latin typeface="+mn-lt"/>
+                  <a:ea typeface="+mn-ea"/>
+                  <a:cs typeface="+mn-cs"/>
+                </a:defRPr>
+              </a:lvl3pPr>
+              <a:lvl4pPr marL="1371600" indent="0" algn="l" defTabSz="457200" rtl="0" eaLnBrk="1" latinLnBrk="0" hangingPunct="1">
+                <a:defRPr sz="1800" kern="1200">
+                  <a:solidFill>
+                    <a:schemeClr val="tx1"/>
+                  </a:solidFill>
+                  <a:latin typeface="+mn-lt"/>
+                  <a:ea typeface="+mn-ea"/>
+                  <a:cs typeface="+mn-cs"/>
+                </a:defRPr>
+              </a:lvl4pPr>
+              <a:lvl5pPr marL="1828800" indent="0" algn="l" defTabSz="457200" rtl="0" eaLnBrk="1" latinLnBrk="0" hangingPunct="1">
+                <a:defRPr sz="1800" kern="1200">
+                  <a:solidFill>
+                    <a:schemeClr val="tx1"/>
+                  </a:solidFill>
+                  <a:latin typeface="+mn-lt"/>
+                  <a:ea typeface="+mn-ea"/>
+                  <a:cs typeface="+mn-cs"/>
+                </a:defRPr>
+              </a:lvl5pPr>
+              <a:lvl6pPr marL="2286000" indent="0" algn="l" defTabSz="457200" rtl="0" eaLnBrk="1" latinLnBrk="0" hangingPunct="1">
+                <a:defRPr sz="1800" kern="1200">
+                  <a:solidFill>
+                    <a:schemeClr val="tx1"/>
+                  </a:solidFill>
+                  <a:latin typeface="+mn-lt"/>
+                  <a:ea typeface="+mn-ea"/>
+                  <a:cs typeface="+mn-cs"/>
+                </a:defRPr>
+              </a:lvl6pPr>
+              <a:lvl7pPr marL="2743200" indent="0" algn="l" defTabSz="457200" rtl="0" eaLnBrk="1" latinLnBrk="0" hangingPunct="1">
+                <a:defRPr sz="1800" kern="1200">
+                  <a:solidFill>
+                    <a:schemeClr val="tx1"/>
+                  </a:solidFill>
+                  <a:latin typeface="+mn-lt"/>
+                  <a:ea typeface="+mn-ea"/>
+                  <a:cs typeface="+mn-cs"/>
+                </a:defRPr>
+              </a:lvl7pPr>
+              <a:lvl8pPr marL="3200400" indent="0" algn="l" defTabSz="457200" rtl="0" eaLnBrk="1" latinLnBrk="0" hangingPunct="1">
+                <a:defRPr sz="1800" kern="1200">
+                  <a:solidFill>
+                    <a:schemeClr val="tx1"/>
+                  </a:solidFill>
+                  <a:latin typeface="+mn-lt"/>
+                  <a:ea typeface="+mn-ea"/>
+                  <a:cs typeface="+mn-cs"/>
+                </a:defRPr>
+              </a:lvl8pPr>
+              <a:lvl9pPr marL="3657600" indent="0" algn="l" defTabSz="457200" rtl="0" eaLnBrk="1" latinLnBrk="0" hangingPunct="1">
+                <a:defRPr sz="1800" kern="1200">
+                  <a:solidFill>
+                    <a:schemeClr val="tx1"/>
+                  </a:solidFill>
+                  <a:latin typeface="+mn-lt"/>
+                  <a:ea typeface="+mn-ea"/>
+                  <a:cs typeface="+mn-cs"/>
+                </a:defRPr>
+              </a:lvl9pPr>
+            </a:lstStyle>
+            <a:p>
+              <a:pPr algn="ctr"/>
+              <a:r>
+                <a:rPr kumimoji="0" lang="ja-JP" altLang="en-US" sz="402" b="0" i="0" u="none" strike="noStrike" kern="0" cap="none" spc="0" normalizeH="0" baseline="0">
+                  <a:ln>
+                    <a:noFill/>
+                  </a:ln>
+                  <a:solidFill>
+                    <a:srgbClr val="111111"/>
+                  </a:solidFill>
+                  <a:effectLst/>
+                  <a:uLnTx/>
+                  <a:uFillTx/>
+                  <a:latin typeface="Meiryo UI"/>
+                  <a:ea typeface="Meiryo UI"/>
+                </a:rPr>
+                <a:t>名前付きパイプ通信</a:t>
+              </a:r>
+            </a:p>
+          </p:txBody>
+        </p:sp>
+        <p:sp>
+          <p:nvSpPr>
+            <p:cNvPr id="34" name="edge_label_d71_09_PLATFORM_DOMAIN_WIN_DIRECT_to_EXTERNAL_DOMAIN_WIN_API" descr="直接接続" title="直接接続">
+              <a:extLst>
+                <a:ext uri="{FF2B5EF4-FFF2-40B4-BE49-F238E27FC236}">
+                  <a16:creationId xmlns:a16="http://schemas.microsoft.com/office/drawing/2014/main" id="{9A71B2B4-50AC-2645-844E-73831D1A69AB}"/>
+                </a:ext>
+              </a:extLst>
+            </p:cNvPr>
+            <p:cNvSpPr txBox="1"/>
+            <p:nvPr/>
+          </p:nvSpPr>
+          <p:spPr>
+            <a:xfrm>
+              <a:off x="7434407" y="4715781"/>
+              <a:ext cx="391636" cy="95984"/>
+            </a:xfrm>
+            <a:prstGeom prst="rect">
+              <a:avLst/>
+            </a:prstGeom>
+            <a:solidFill>
+              <a:srgbClr val="FFFFFF"/>
+            </a:solidFill>
+            <a:ln w="11361">
+              <a:solidFill>
+                <a:srgbClr val="1F4E79"/>
+              </a:solidFill>
+            </a:ln>
+          </p:spPr>
+          <p:txBody>
+            <a:bodyPr vert="horz" wrap="square" lIns="17042" tIns="5681" rIns="17042" bIns="5681" rtlCol="0" anchor="ctr">
+              <a:noAutofit/>
+            </a:bodyPr>
+            <a:lstStyle>
+              <a:defPPr>
+                <a:defRPr lang="en-US"/>
+              </a:defPPr>
+              <a:lvl1pPr marL="0" indent="0" algn="l" defTabSz="457200" rtl="0" eaLnBrk="1" latinLnBrk="0" hangingPunct="1">
+                <a:defRPr sz="1800" kern="1200">
+                  <a:solidFill>
+                    <a:schemeClr val="tx1"/>
+                  </a:solidFill>
+                  <a:latin typeface="+mn-lt"/>
+                  <a:ea typeface="+mn-ea"/>
+                  <a:cs typeface="+mn-cs"/>
+                </a:defRPr>
+              </a:lvl1pPr>
+              <a:lvl2pPr marL="457200" indent="0" algn="l" defTabSz="457200" rtl="0" eaLnBrk="1" latinLnBrk="0" hangingPunct="1">
+                <a:defRPr sz="1800" kern="1200">
+                  <a:solidFill>
+                    <a:schemeClr val="tx1"/>
+                  </a:solidFill>
+                  <a:latin typeface="+mn-lt"/>
+                  <a:ea typeface="+mn-ea"/>
+                  <a:cs typeface="+mn-cs"/>
+                </a:defRPr>
+              </a:lvl2pPr>
+              <a:lvl3pPr marL="914400" indent="0" algn="l" defTabSz="457200" rtl="0" eaLnBrk="1" latinLnBrk="0" hangingPunct="1">
+                <a:defRPr sz="1800" kern="1200">
+                  <a:solidFill>
+                    <a:schemeClr val="tx1"/>
+                  </a:solidFill>
+                  <a:latin typeface="+mn-lt"/>
+                  <a:ea typeface="+mn-ea"/>
+                  <a:cs typeface="+mn-cs"/>
+                </a:defRPr>
+              </a:lvl3pPr>
+              <a:lvl4pPr marL="1371600" indent="0" algn="l" defTabSz="457200" rtl="0" eaLnBrk="1" latinLnBrk="0" hangingPunct="1">
+                <a:defRPr sz="1800" kern="1200">
+                  <a:solidFill>
+                    <a:schemeClr val="tx1"/>
+                  </a:solidFill>
+                  <a:latin typeface="+mn-lt"/>
+                  <a:ea typeface="+mn-ea"/>
+                  <a:cs typeface="+mn-cs"/>
+                </a:defRPr>
+              </a:lvl4pPr>
+              <a:lvl5pPr marL="1828800" indent="0" algn="l" defTabSz="457200" rtl="0" eaLnBrk="1" latinLnBrk="0" hangingPunct="1">
+                <a:defRPr sz="1800" kern="1200">
+                  <a:solidFill>
+                    <a:schemeClr val="tx1"/>
+                  </a:solidFill>
+                  <a:latin typeface="+mn-lt"/>
+                  <a:ea typeface="+mn-ea"/>
+                  <a:cs typeface="+mn-cs"/>
+                </a:defRPr>
+              </a:lvl5pPr>
+              <a:lvl6pPr marL="2286000" indent="0" algn="l" defTabSz="457200" rtl="0" eaLnBrk="1" latinLnBrk="0" hangingPunct="1">
+                <a:defRPr sz="1800" kern="1200">
+                  <a:solidFill>
+                    <a:schemeClr val="tx1"/>
+                  </a:solidFill>
+                  <a:latin typeface="+mn-lt"/>
+                  <a:ea typeface="+mn-ea"/>
+                  <a:cs typeface="+mn-cs"/>
+                </a:defRPr>
+              </a:lvl6pPr>
+              <a:lvl7pPr marL="2743200" indent="0" algn="l" defTabSz="457200" rtl="0" eaLnBrk="1" latinLnBrk="0" hangingPunct="1">
+                <a:defRPr sz="1800" kern="1200">
+                  <a:solidFill>
+                    <a:schemeClr val="tx1"/>
+                  </a:solidFill>
+                  <a:latin typeface="+mn-lt"/>
+                  <a:ea typeface="+mn-ea"/>
+                  <a:cs typeface="+mn-cs"/>
+                </a:defRPr>
+              </a:lvl7pPr>
+              <a:lvl8pPr marL="3200400" indent="0" algn="l" defTabSz="457200" rtl="0" eaLnBrk="1" latinLnBrk="0" hangingPunct="1">
+                <a:defRPr sz="1800" kern="1200">
+                  <a:solidFill>
+                    <a:schemeClr val="tx1"/>
+                  </a:solidFill>
+                  <a:latin typeface="+mn-lt"/>
+                  <a:ea typeface="+mn-ea"/>
+                  <a:cs typeface="+mn-cs"/>
+                </a:defRPr>
+              </a:lvl8pPr>
+              <a:lvl9pPr marL="3657600" indent="0" algn="l" defTabSz="457200" rtl="0" eaLnBrk="1" latinLnBrk="0" hangingPunct="1">
+                <a:defRPr sz="1800" kern="1200">
+                  <a:solidFill>
+                    <a:schemeClr val="tx1"/>
+                  </a:solidFill>
+                  <a:latin typeface="+mn-lt"/>
+                  <a:ea typeface="+mn-ea"/>
+                  <a:cs typeface="+mn-cs"/>
+                </a:defRPr>
+              </a:lvl9pPr>
+            </a:lstStyle>
+            <a:p>
+              <a:pPr algn="ctr"/>
+              <a:r>
+                <a:rPr kumimoji="0" lang="ja-JP" altLang="en-US" sz="402" b="0" i="0" u="none" strike="noStrike" kern="0" cap="none" spc="0" normalizeH="0" baseline="0">
+                  <a:ln>
+                    <a:noFill/>
+                  </a:ln>
+                  <a:solidFill>
+                    <a:srgbClr val="111111"/>
+                  </a:solidFill>
+                  <a:effectLst/>
+                  <a:uLnTx/>
+                  <a:uFillTx/>
+                  <a:latin typeface="Meiryo UI"/>
+                  <a:ea typeface="Meiryo UI"/>
+                </a:rPr>
+                <a:t>直接接続</a:t>
+              </a:r>
+            </a:p>
+          </p:txBody>
+        </p:sp>
+        <p:sp>
+          <p:nvSpPr>
+            <p:cNvPr id="35" name="edge_label_d71_10_PLATFORM_DOMAIN_IOS_to_EXTERNAL_DOMAIN_IOS_API" descr="直接接続" title="直接接続">
+              <a:extLst>
+                <a:ext uri="{FF2B5EF4-FFF2-40B4-BE49-F238E27FC236}">
+                  <a16:creationId xmlns:a16="http://schemas.microsoft.com/office/drawing/2014/main" id="{91FCB870-25A6-AC99-4F7B-1C110E96D042}"/>
+                </a:ext>
+              </a:extLst>
+            </p:cNvPr>
+            <p:cNvSpPr txBox="1"/>
+            <p:nvPr/>
+          </p:nvSpPr>
+          <p:spPr>
+            <a:xfrm>
+              <a:off x="7396535" y="4156701"/>
+              <a:ext cx="404543" cy="95984"/>
+            </a:xfrm>
+            <a:prstGeom prst="rect">
+              <a:avLst/>
+            </a:prstGeom>
+            <a:solidFill>
+              <a:srgbClr val="FFFFFF"/>
+            </a:solidFill>
+            <a:ln w="11361">
+              <a:solidFill>
+                <a:srgbClr val="1F4E79"/>
+              </a:solidFill>
+            </a:ln>
+          </p:spPr>
+          <p:txBody>
+            <a:bodyPr vert="horz" wrap="square" lIns="17042" tIns="5681" rIns="17042" bIns="5681" rtlCol="0" anchor="ctr">
+              <a:noAutofit/>
+            </a:bodyPr>
+            <a:lstStyle>
+              <a:defPPr>
+                <a:defRPr lang="en-US"/>
+              </a:defPPr>
+              <a:lvl1pPr marL="0" indent="0" algn="l" defTabSz="457200" rtl="0" eaLnBrk="1" latinLnBrk="0" hangingPunct="1">
+                <a:defRPr sz="1800" kern="1200">
+                  <a:solidFill>
+                    <a:schemeClr val="tx1"/>
+                  </a:solidFill>
+                  <a:latin typeface="+mn-lt"/>
+                  <a:ea typeface="+mn-ea"/>
+                  <a:cs typeface="+mn-cs"/>
+                </a:defRPr>
+              </a:lvl1pPr>
+              <a:lvl2pPr marL="457200" indent="0" algn="l" defTabSz="457200" rtl="0" eaLnBrk="1" latinLnBrk="0" hangingPunct="1">
+                <a:defRPr sz="1800" kern="1200">
+                  <a:solidFill>
+                    <a:schemeClr val="tx1"/>
+                  </a:solidFill>
+                  <a:latin typeface="+mn-lt"/>
+                  <a:ea typeface="+mn-ea"/>
+                  <a:cs typeface="+mn-cs"/>
+                </a:defRPr>
+              </a:lvl2pPr>
+              <a:lvl3pPr marL="914400" indent="0" algn="l" defTabSz="457200" rtl="0" eaLnBrk="1" latinLnBrk="0" hangingPunct="1">
+                <a:defRPr sz="1800" kern="1200">
+                  <a:solidFill>
+                    <a:schemeClr val="tx1"/>
+                  </a:solidFill>
+                  <a:latin typeface="+mn-lt"/>
+                  <a:ea typeface="+mn-ea"/>
+                  <a:cs typeface="+mn-cs"/>
+                </a:defRPr>
+              </a:lvl3pPr>
+              <a:lvl4pPr marL="1371600" indent="0" algn="l" defTabSz="457200" rtl="0" eaLnBrk="1" latinLnBrk="0" hangingPunct="1">
+                <a:defRPr sz="1800" kern="1200">
+                  <a:solidFill>
+                    <a:schemeClr val="tx1"/>
+                  </a:solidFill>
+                  <a:latin typeface="+mn-lt"/>
+                  <a:ea typeface="+mn-ea"/>
+                  <a:cs typeface="+mn-cs"/>
+                </a:defRPr>
+              </a:lvl4pPr>
+              <a:lvl5pPr marL="1828800" indent="0" algn="l" defTabSz="457200" rtl="0" eaLnBrk="1" latinLnBrk="0" hangingPunct="1">
+                <a:defRPr sz="1800" kern="1200">
+                  <a:solidFill>
+                    <a:schemeClr val="tx1"/>
+                  </a:solidFill>
+                  <a:latin typeface="+mn-lt"/>
+                  <a:ea typeface="+mn-ea"/>
+                  <a:cs typeface="+mn-cs"/>
+                </a:defRPr>
+              </a:lvl5pPr>
+              <a:lvl6pPr marL="2286000" indent="0" algn="l" defTabSz="457200" rtl="0" eaLnBrk="1" latinLnBrk="0" hangingPunct="1">
+                <a:defRPr sz="1800" kern="1200">
+                  <a:solidFill>
+                    <a:schemeClr val="tx1"/>
+                  </a:solidFill>
+                  <a:latin typeface="+mn-lt"/>
+                  <a:ea typeface="+mn-ea"/>
+                  <a:cs typeface="+mn-cs"/>
+                </a:defRPr>
+              </a:lvl6pPr>
+              <a:lvl7pPr marL="2743200" indent="0" algn="l" defTabSz="457200" rtl="0" eaLnBrk="1" latinLnBrk="0" hangingPunct="1">
+                <a:defRPr sz="1800" kern="1200">
+                  <a:solidFill>
+                    <a:schemeClr val="tx1"/>
+                  </a:solidFill>
+                  <a:latin typeface="+mn-lt"/>
+                  <a:ea typeface="+mn-ea"/>
+                  <a:cs typeface="+mn-cs"/>
+                </a:defRPr>
+              </a:lvl7pPr>
+              <a:lvl8pPr marL="3200400" indent="0" algn="l" defTabSz="457200" rtl="0" eaLnBrk="1" latinLnBrk="0" hangingPunct="1">
+                <a:defRPr sz="1800" kern="1200">
+                  <a:solidFill>
+                    <a:schemeClr val="tx1"/>
+                  </a:solidFill>
+                  <a:latin typeface="+mn-lt"/>
+                  <a:ea typeface="+mn-ea"/>
+                  <a:cs typeface="+mn-cs"/>
+                </a:defRPr>
+              </a:lvl8pPr>
+              <a:lvl9pPr marL="3657600" indent="0" algn="l" defTabSz="457200" rtl="0" eaLnBrk="1" latinLnBrk="0" hangingPunct="1">
+                <a:defRPr sz="1800" kern="1200">
+                  <a:solidFill>
+                    <a:schemeClr val="tx1"/>
+                  </a:solidFill>
+                  <a:latin typeface="+mn-lt"/>
+                  <a:ea typeface="+mn-ea"/>
+                  <a:cs typeface="+mn-cs"/>
+                </a:defRPr>
+              </a:lvl9pPr>
+            </a:lstStyle>
+            <a:p>
+              <a:pPr algn="ctr"/>
+              <a:r>
+                <a:rPr kumimoji="0" lang="ja-JP" altLang="en-US" sz="402" b="0" i="0" u="none" strike="noStrike" kern="0" cap="none" spc="0" normalizeH="0" baseline="0">
+                  <a:ln>
+                    <a:noFill/>
+                  </a:ln>
+                  <a:solidFill>
+                    <a:srgbClr val="111111"/>
+                  </a:solidFill>
+                  <a:effectLst/>
+                  <a:uLnTx/>
+                  <a:uFillTx/>
+                  <a:latin typeface="Meiryo UI"/>
+                  <a:ea typeface="Meiryo UI"/>
+                </a:rPr>
+                <a:t>直接接続</a:t>
+              </a:r>
+            </a:p>
+          </p:txBody>
+        </p:sp>
+        <p:sp>
+          <p:nvSpPr>
+            <p:cNvPr id="36" name="edge_label_d71_11_PLATFORM_DOMAIN_ANDROID_to_EXTERNAL_DOMAIN_ANDROID_API" descr="現在は接続しない" title="現在は接続しない">
+              <a:extLst>
+                <a:ext uri="{FF2B5EF4-FFF2-40B4-BE49-F238E27FC236}">
+                  <a16:creationId xmlns:a16="http://schemas.microsoft.com/office/drawing/2014/main" id="{0CDFCE1E-F16A-5573-93B3-81C3BEAC1C31}"/>
+                </a:ext>
+              </a:extLst>
+            </p:cNvPr>
+            <p:cNvSpPr txBox="1"/>
+            <p:nvPr/>
+          </p:nvSpPr>
+          <p:spPr>
+            <a:xfrm>
+              <a:off x="7416929" y="2545958"/>
+              <a:ext cx="611416" cy="94000"/>
+            </a:xfrm>
+            <a:prstGeom prst="rect">
+              <a:avLst/>
+            </a:prstGeom>
+            <a:solidFill>
+              <a:srgbClr val="FFFFFF"/>
+            </a:solidFill>
+            <a:ln w="11361">
+              <a:solidFill>
+                <a:srgbClr val="1F4E79"/>
+              </a:solidFill>
+            </a:ln>
+          </p:spPr>
+          <p:txBody>
+            <a:bodyPr vert="horz" wrap="square" lIns="17042" tIns="5681" rIns="17042" bIns="5681" rtlCol="0" anchor="ctr">
+              <a:noAutofit/>
+            </a:bodyPr>
+            <a:lstStyle>
+              <a:defPPr>
+                <a:defRPr lang="en-US"/>
+              </a:defPPr>
+              <a:lvl1pPr marL="0" indent="0" algn="l" defTabSz="457200" rtl="0" eaLnBrk="1" latinLnBrk="0" hangingPunct="1">
+                <a:defRPr sz="1800" kern="1200">
+                  <a:solidFill>
+                    <a:schemeClr val="tx1"/>
+                  </a:solidFill>
+                  <a:latin typeface="+mn-lt"/>
+                  <a:ea typeface="+mn-ea"/>
+                  <a:cs typeface="+mn-cs"/>
+                </a:defRPr>
+              </a:lvl1pPr>
+              <a:lvl2pPr marL="457200" indent="0" algn="l" defTabSz="457200" rtl="0" eaLnBrk="1" latinLnBrk="0" hangingPunct="1">
+                <a:defRPr sz="1800" kern="1200">
+                  <a:solidFill>
+                    <a:schemeClr val="tx1"/>
+                  </a:solidFill>
+                  <a:latin typeface="+mn-lt"/>
+                  <a:ea typeface="+mn-ea"/>
+                  <a:cs typeface="+mn-cs"/>
+                </a:defRPr>
+              </a:lvl2pPr>
+              <a:lvl3pPr marL="914400" indent="0" algn="l" defTabSz="457200" rtl="0" eaLnBrk="1" latinLnBrk="0" hangingPunct="1">
+                <a:defRPr sz="1800" kern="1200">
+                  <a:solidFill>
+                    <a:schemeClr val="tx1"/>
+                  </a:solidFill>
+                  <a:latin typeface="+mn-lt"/>
+                  <a:ea typeface="+mn-ea"/>
+                  <a:cs typeface="+mn-cs"/>
+                </a:defRPr>
+              </a:lvl3pPr>
+              <a:lvl4pPr marL="1371600" indent="0" algn="l" defTabSz="457200" rtl="0" eaLnBrk="1" latinLnBrk="0" hangingPunct="1">
+                <a:defRPr sz="1800" kern="1200">
+                  <a:solidFill>
+                    <a:schemeClr val="tx1"/>
+                  </a:solidFill>
+                  <a:latin typeface="+mn-lt"/>
+                  <a:ea typeface="+mn-ea"/>
+                  <a:cs typeface="+mn-cs"/>
+                </a:defRPr>
+              </a:lvl4pPr>
+              <a:lvl5pPr marL="1828800" indent="0" algn="l" defTabSz="457200" rtl="0" eaLnBrk="1" latinLnBrk="0" hangingPunct="1">
+                <a:defRPr sz="1800" kern="1200">
+                  <a:solidFill>
+                    <a:schemeClr val="tx1"/>
+                  </a:solidFill>
+                  <a:latin typeface="+mn-lt"/>
+                  <a:ea typeface="+mn-ea"/>
+                  <a:cs typeface="+mn-cs"/>
+                </a:defRPr>
+              </a:lvl5pPr>
+              <a:lvl6pPr marL="2286000" indent="0" algn="l" defTabSz="457200" rtl="0" eaLnBrk="1" latinLnBrk="0" hangingPunct="1">
+                <a:defRPr sz="1800" kern="1200">
+                  <a:solidFill>
+                    <a:schemeClr val="tx1"/>
+                  </a:solidFill>
+                  <a:latin typeface="+mn-lt"/>
+                  <a:ea typeface="+mn-ea"/>
+                  <a:cs typeface="+mn-cs"/>
+                </a:defRPr>
+              </a:lvl6pPr>
+              <a:lvl7pPr marL="2743200" indent="0" algn="l" defTabSz="457200" rtl="0" eaLnBrk="1" latinLnBrk="0" hangingPunct="1">
+                <a:defRPr sz="1800" kern="1200">
+                  <a:solidFill>
+                    <a:schemeClr val="tx1"/>
+                  </a:solidFill>
+                  <a:latin typeface="+mn-lt"/>
+                  <a:ea typeface="+mn-ea"/>
+                  <a:cs typeface="+mn-cs"/>
+                </a:defRPr>
+              </a:lvl7pPr>
+              <a:lvl8pPr marL="3200400" indent="0" algn="l" defTabSz="457200" rtl="0" eaLnBrk="1" latinLnBrk="0" hangingPunct="1">
+                <a:defRPr sz="1800" kern="1200">
+                  <a:solidFill>
+                    <a:schemeClr val="tx1"/>
+                  </a:solidFill>
+                  <a:latin typeface="+mn-lt"/>
+                  <a:ea typeface="+mn-ea"/>
+                  <a:cs typeface="+mn-cs"/>
+                </a:defRPr>
+              </a:lvl8pPr>
+              <a:lvl9pPr marL="3657600" indent="0" algn="l" defTabSz="457200" rtl="0" eaLnBrk="1" latinLnBrk="0" hangingPunct="1">
+                <a:defRPr sz="1800" kern="1200">
+                  <a:solidFill>
+                    <a:schemeClr val="tx1"/>
+                  </a:solidFill>
+                  <a:latin typeface="+mn-lt"/>
+                  <a:ea typeface="+mn-ea"/>
+                  <a:cs typeface="+mn-cs"/>
+                </a:defRPr>
+              </a:lvl9pPr>
+            </a:lstStyle>
+            <a:p>
+              <a:pPr algn="ctr"/>
+              <a:r>
+                <a:rPr kumimoji="0" lang="ja-JP" altLang="en-US" sz="402" b="0" i="0" u="none" strike="noStrike" kern="0" cap="none" spc="0" normalizeH="0" baseline="0">
+                  <a:ln>
+                    <a:noFill/>
+                  </a:ln>
+                  <a:solidFill>
+                    <a:srgbClr val="FF0000"/>
+                  </a:solidFill>
+                  <a:effectLst/>
+                  <a:uLnTx/>
+                  <a:uFillTx/>
+                  <a:latin typeface="Meiryo UI"/>
+                  <a:ea typeface="Meiryo UI"/>
+                </a:rPr>
+                <a:t>現在は接続しない</a:t>
+              </a:r>
+            </a:p>
+          </p:txBody>
+        </p:sp>
+      </p:grpSp>
     </p:spTree>
     <p:extLst>
       <p:ext uri="{BB962C8B-B14F-4D97-AF65-F5344CB8AC3E}">
